--- a/Amonov_Diplom_Prezentatsiya.pptx
+++ b/Amonov_Diplom_Prezentatsiya.pptx
@@ -100,7 +100,7 @@
 </file>
 
 <file path=ppt/slides/slide1.xml><?xml version="1.0" encoding="utf-8"?>
-<p:sld xmlns:p="http://schemas.openxmlformats.org/presentationml/2006/main" xmlns:a="http://schemas.openxmlformats.org/drawingml/2006/main" xmlns:r="http://schemas.openxmlformats.org/officeDocument/2006/relationships" xmlns:xdr="http://schemas.openxmlformats.org/drawingml/2006/spreadsheetDrawing">
+<p:sld xmlns:p="http://schemas.openxmlformats.org/presentationml/2006/main" xmlns:a="http://schemas.openxmlformats.org/drawingml/2006/main" xmlns:r="http://schemas.openxmlformats.org/officeDocument/2006/relationships">
   <p:cSld>
     <p:spTree>
       <p:nvGrpSpPr>
@@ -213,44 +213,11 @@
         </p:nvSpPr>
         <p:spPr>
           <a:xfrm>
-            <a:off x="0" y="0"/>
-            <a:ext cx="180000" cy="6858000"/>
-          </a:xfrm>
-          <a:prstGeom prst="rect">
-            <a:avLst/>
-          </a:prstGeom>
-          <a:solidFill>
-            <a:srgbClr val="00C6FF">
-              <a:alpha val="40000"/>
-            </a:srgbClr>
-          </a:solidFill>
-          <a:ln>
-            <a:noFill/>
-          </a:ln>
-        </p:spPr>
-        <p:txBody>
-          <a:bodyPr/>
-          <a:lstStyle/>
-          <a:p/>
-        </p:txBody>
-      </p:sp>
-      <p:sp>
-        <p:nvSpPr>
-          <p:cNvPr id="2" name="r"/>
-          <p:cNvSpPr>
-            <a:spLocks noGrp="1"/>
-          </p:cNvSpPr>
-          <p:nvPr/>
-        </p:nvSpPr>
-        <p:spPr>
-          <a:xfrm>
-            <a:off x="540000" y="792000"/>
-            <a:ext cx="11113200" cy="5112000"/>
-          </a:xfrm>
-          <a:prstGeom prst="roundRect">
-            <a:avLst>
-              <a:gd name="adj" fmla="val 20000"/>
-            </a:avLst>
+            <a:off x="540000" y="720000"/>
+            <a:ext cx="11113200" cy="5220000"/>
+          </a:xfrm>
+          <a:prstGeom prst="rect">
+            <a:avLst/>
           </a:prstGeom>
           <a:solidFill>
             <a:srgbClr val="0F2547">
@@ -277,7 +244,7 @@
         </p:nvSpPr>
         <p:spPr>
           <a:xfrm>
-            <a:off x="540000" y="792000"/>
+            <a:off x="540000" y="720000"/>
             <a:ext cx="11113200" cy="36000"/>
           </a:xfrm>
           <a:prstGeom prst="rect">
@@ -304,7 +271,7 @@
         </p:nvSpPr>
         <p:spPr>
           <a:xfrm>
-            <a:off x="720000" y="18000"/>
+            <a:off x="720000" y="36000"/>
             <a:ext cx="10800000" cy="540000"/>
           </a:xfrm>
           <a:prstGeom prst="rect">
@@ -318,13 +285,13 @@
           <a:p>
             <a:pPr algn="ctr"/>
             <a:r>
-              <a:rPr lang="uz-UZ" altLang="en-US" sz="1000" i="1" dirty="0">
+              <a:rPr lang="uz-UZ" altLang="en-US" sz="1100" i="1" dirty="0">
                 <a:solidFill>
                   <a:srgbClr val="00C6FF"/>
                 </a:solidFill>
                 <a:latin typeface="Calibri"/>
               </a:rPr>
-              <a:t>O'ZBEKISTON RESPUBLIKASI — TATU SAMARQAND FILIALI</a:t>
+              <a:t>O'ZBEKISTON RESPUBLIKASI | TATU SAMARQAND FILIALI | 2026</a:t>
             </a:r>
           </a:p>
         </p:txBody>
@@ -337,8 +304,8 @@
         </p:nvSpPr>
         <p:spPr>
           <a:xfrm>
-            <a:off x="720000" y="900000"/>
-            <a:ext cx="10800000" cy="432000"/>
+            <a:off x="720000" y="864000"/>
+            <a:ext cx="10800000" cy="396000"/>
           </a:xfrm>
           <a:prstGeom prst="rect">
             <a:avLst/>
@@ -351,7 +318,7 @@
           <a:p>
             <a:pPr algn="ctr"/>
             <a:r>
-              <a:rPr lang="uz-UZ" altLang="en-US" sz="1200" dirty="0">
+              <a:rPr lang="uz-UZ" altLang="en-US" sz="1300" dirty="0">
                 <a:solidFill>
                   <a:srgbClr val="FFD700"/>
                 </a:solidFill>
@@ -370,8 +337,8 @@
         </p:nvSpPr>
         <p:spPr>
           <a:xfrm>
-            <a:off x="720000" y="1368000"/>
-            <a:ext cx="10800000" cy="900000"/>
+            <a:off x="720000" y="1332000"/>
+            <a:ext cx="10800000" cy="1260000"/>
           </a:xfrm>
           <a:prstGeom prst="rect">
             <a:avLst/>
@@ -429,8 +396,8 @@
         </p:nvSpPr>
         <p:spPr>
           <a:xfrm>
-            <a:off x="2160000" y="2520000"/>
-            <a:ext cx="7920000" cy="28800"/>
+            <a:off x="1800000" y="2772000"/>
+            <a:ext cx="8640000" cy="28800"/>
           </a:xfrm>
           <a:prstGeom prst="rect">
             <a:avLst/>
@@ -456,8 +423,8 @@
         </p:nvSpPr>
         <p:spPr>
           <a:xfrm>
-            <a:off x="1080000" y="2664000"/>
-            <a:ext cx="10080000" cy="2160000"/>
+            <a:off x="720000" y="2916000"/>
+            <a:ext cx="10800000" cy="2340000"/>
           </a:xfrm>
           <a:prstGeom prst="rect">
             <a:avLst/>
@@ -470,7 +437,7 @@
           <a:p>
             <a:pPr algn="ctr">
               <a:spcBef>
-                <a:spcPts val="100"/>
+                <a:spcPts val="80"/>
               </a:spcBef>
             </a:pPr>
             <a:r>
@@ -495,7 +462,7 @@
           <a:p>
             <a:pPr algn="ctr">
               <a:spcBef>
-                <a:spcPts val="100"/>
+                <a:spcPts val="80"/>
               </a:spcBef>
             </a:pPr>
             <a:r>
@@ -520,7 +487,7 @@
           <a:p>
             <a:pPr algn="ctr">
               <a:spcBef>
-                <a:spcPts val="100"/>
+                <a:spcPts val="80"/>
               </a:spcBef>
             </a:pPr>
             <a:r>
@@ -545,26 +512,17 @@
           <a:p>
             <a:pPr algn="ctr">
               <a:spcBef>
-                <a:spcPts val="100"/>
-              </a:spcBef>
-            </a:pPr>
-            <a:r>
-              <a:rPr lang="uz-UZ" altLang="en-US" sz="1300" b="1" dirty="0">
-                <a:solidFill>
-                  <a:srgbClr val="00C6FF"/>
-                </a:solidFill>
-                <a:latin typeface="Calibri"/>
-              </a:rPr>
-              <a:t>Yil:</a:t>
-            </a:r>
-            <a:r>
-              <a:rPr lang="uz-UZ" altLang="en-US" sz="1300" dirty="0">
+                <a:spcPts val="80"/>
+              </a:spcBef>
+            </a:pPr>
+            <a:r>
+              <a:rPr lang="uz-UZ" altLang="en-US" sz="1400" dirty="0">
                 <a:solidFill>
                   <a:srgbClr val="FFFFFF"/>
                 </a:solidFill>
                 <a:latin typeface="Calibri"/>
               </a:rPr>
-              <a:t>  2026</a:t>
+              <a:t/>
             </a:r>
           </a:p>
           <a:p>
@@ -574,29 +532,13 @@
               </a:spcBef>
             </a:pPr>
             <a:r>
-              <a:rPr lang="uz-UZ" altLang="en-US" sz="1400" dirty="0">
-                <a:solidFill>
-                  <a:srgbClr val="FFFFFF"/>
-                </a:solidFill>
-                <a:latin typeface="Calibri"/>
-              </a:rPr>
-              <a:t/>
-            </a:r>
-          </a:p>
-          <a:p>
-            <a:pPr algn="ctr">
-              <a:spcBef>
-                <a:spcPts val="80"/>
-              </a:spcBef>
-            </a:pPr>
-            <a:r>
               <a:rPr lang="uz-UZ" altLang="en-US" sz="1100" i="1" dirty="0">
                 <a:solidFill>
                   <a:srgbClr val="B0C4DE"/>
                 </a:solidFill>
                 <a:latin typeface="Calibri"/>
               </a:rPr>
-              <a:t>React  •  Node.js  •  Express.js  •  Google Gemini AI</a:t>
+              <a:t>React  •  Node.js  •  Express.js  •  Google Gemini AI  •  Git</a:t>
             </a:r>
           </a:p>
         </p:txBody>
@@ -610,7 +552,7 @@
 </file>
 
 <file path=ppt/slides/slide10.xml><?xml version="1.0" encoding="utf-8"?>
-<p:sld xmlns:p="http://schemas.openxmlformats.org/presentationml/2006/main" xmlns:a="http://schemas.openxmlformats.org/drawingml/2006/main" xmlns:r="http://schemas.openxmlformats.org/officeDocument/2006/relationships" xmlns:xdr="http://schemas.openxmlformats.org/drawingml/2006/spreadsheetDrawing">
+<p:sld xmlns:p="http://schemas.openxmlformats.org/presentationml/2006/main" xmlns:a="http://schemas.openxmlformats.org/drawingml/2006/main" xmlns:r="http://schemas.openxmlformats.org/officeDocument/2006/relationships">
   <p:cSld>
     <p:spTree>
       <p:nvGrpSpPr>
@@ -672,7 +614,7 @@
             <a:avLst/>
           </a:prstGeom>
           <a:solidFill>
-            <a:srgbClr val="0D1B2A"/>
+            <a:srgbClr val="0a1628"/>
           </a:solidFill>
           <a:ln>
             <a:noFill/>
@@ -770,7 +712,7 @@
                 </a:solidFill>
                 <a:latin typeface="Calibri"/>
               </a:rPr>
-              <a:t>Tizimning 5 Ta Asosiy Moduli (Mantiqiy Model)</a:t>
+              <a:t>Tizimning 5 Ta Asosiy Moduli — Mantiqiy Model</a:t>
             </a:r>
           </a:p>
         </p:txBody>
@@ -840,7 +782,23 @@
                 </a:solidFill>
                 <a:latin typeface="Calibri"/>
               </a:rPr>
-              <a:t>    1️⃣  HOME — URL kiritish, regex validatsiya, progressiv yuklanish animatsiyasi</a:t>
+              <a:t>1️⃣  HOME — Kirish moduli</a:t>
+            </a:r>
+          </a:p>
+          <a:p>
+            <a:pPr>
+              <a:spcBef>
+                <a:spcPts val="40"/>
+              </a:spcBef>
+            </a:pPr>
+            <a:r>
+              <a:rPr lang="uz-UZ" altLang="en-US" sz="1200" dirty="0">
+                <a:solidFill>
+                  <a:srgbClr val="B0C4DE"/>
+                </a:solidFill>
+                <a:latin typeface="Calibri"/>
+              </a:rPr>
+              <a:t>   GitHub/GitLab URL qabul qilish, Regex validatsiya, yuklanish animatsiyasi</a:t>
             </a:r>
           </a:p>
           <a:p>
@@ -872,23 +830,39 @@
                 </a:solidFill>
                 <a:latin typeface="Calibri"/>
               </a:rPr>
-              <a:t>    2️⃣  COMMITS — Commitlar tarixi, qidiruv (xabar/muallif/ID bo'yicha)</a:t>
-            </a:r>
-          </a:p>
-          <a:p>
-            <a:pPr>
-              <a:spcBef>
-                <a:spcPts val="40"/>
-              </a:spcBef>
-            </a:pPr>
-            <a:r>
-              <a:rPr lang="uz-UZ" altLang="en-US" sz="1200" dirty="0">
-                <a:solidFill>
-                  <a:srgbClr val="B0C4DE"/>
-                </a:solidFill>
-                <a:latin typeface="Calibri"/>
-              </a:rPr>
-              <a:t>   Statistika kartochkalari: jami commit, qatorlar, mualliflar soni</a:t>
+              <a:t>2️⃣  COMMITS — Repository Explorer</a:t>
+            </a:r>
+          </a:p>
+          <a:p>
+            <a:pPr>
+              <a:spcBef>
+                <a:spcPts val="40"/>
+              </a:spcBef>
+            </a:pPr>
+            <a:r>
+              <a:rPr lang="uz-UZ" altLang="en-US" sz="1200" dirty="0">
+                <a:solidFill>
+                  <a:srgbClr val="B0C4DE"/>
+                </a:solidFill>
+                <a:latin typeface="Calibri"/>
+              </a:rPr>
+              <a:t>   Commitlar tarixi, qidiruv (xabar/muallif/ID), 4 ta statistik kartochka</a:t>
+            </a:r>
+          </a:p>
+          <a:p>
+            <a:pPr>
+              <a:spcBef>
+                <a:spcPts val="40"/>
+              </a:spcBef>
+            </a:pPr>
+            <a:r>
+              <a:rPr lang="uz-UZ" altLang="en-US" sz="1200" dirty="0">
+                <a:solidFill>
+                  <a:srgbClr val="B0C4DE"/>
+                </a:solidFill>
+                <a:latin typeface="Calibri"/>
+              </a:rPr>
+              <a:t>   Commit tanlash → ma'lumot zanjiri orqali keyingi sahifaga uzatish</a:t>
             </a:r>
           </a:p>
           <a:p>
@@ -920,23 +894,23 @@
                 </a:solidFill>
                 <a:latin typeface="Calibri"/>
               </a:rPr>
-              <a:t>    3️⃣  DIFF VIEWER — Qatorlar darajasida vizualizatsiya</a:t>
-            </a:r>
-          </a:p>
-          <a:p>
-            <a:pPr>
-              <a:spcBef>
-                <a:spcPts val="40"/>
-              </a:spcBef>
-            </a:pPr>
-            <a:r>
-              <a:rPr lang="uz-UZ" altLang="en-US" sz="1200" dirty="0">
-                <a:solidFill>
-                  <a:srgbClr val="B0C4DE"/>
-                </a:solidFill>
-                <a:latin typeface="Calibri"/>
-              </a:rPr>
-              <a:t>   Yashil = qo'shilgan (+)  |  Qizil = o'chirilgan (-)  |  Chap: fayllar paneli</a:t>
+              <a:t>3️⃣  DIFF VIEWER — Kod Vizualizatsiya yadro</a:t>
+            </a:r>
+          </a:p>
+          <a:p>
+            <a:pPr>
+              <a:spcBef>
+                <a:spcPts val="40"/>
+              </a:spcBef>
+            </a:pPr>
+            <a:r>
+              <a:rPr lang="uz-UZ" altLang="en-US" sz="1200" dirty="0">
+                <a:solidFill>
+                  <a:srgbClr val="B0C4DE"/>
+                </a:solidFill>
+                <a:latin typeface="Calibri"/>
+              </a:rPr>
+              <a:t>   Yashil (+) = qo'shilgan  |  Qizil (-) = o'chirilgan  |  Chap: fayllar paneli</a:t>
             </a:r>
           </a:p>
           <a:p>
@@ -968,23 +942,23 @@
                 </a:solidFill>
                 <a:latin typeface="Calibri"/>
               </a:rPr>
-              <a:t>    4️⃣  AI ANALYSIS — Google Gemini semantik hisoboti (o'zbek tilida)</a:t>
-            </a:r>
-          </a:p>
-          <a:p>
-            <a:pPr>
-              <a:spcBef>
-                <a:spcPts val="40"/>
-              </a:spcBef>
-            </a:pPr>
-            <a:r>
-              <a:rPr lang="uz-UZ" altLang="en-US" sz="1200" dirty="0">
-                <a:solidFill>
-                  <a:srgbClr val="B0C4DE"/>
-                </a:solidFill>
-                <a:latin typeface="Calibri"/>
-              </a:rPr>
-              <a:t>   Sintaktik o'zgarishlar + Biznes/Xavfsizlik mantiqi + Auto-fix tavsiyalar</a:t>
+              <a:t>4️⃣  AI ANALYSIS — Gemini Semantik Hisoboti</a:t>
+            </a:r>
+          </a:p>
+          <a:p>
+            <a:pPr>
+              <a:spcBef>
+                <a:spcPts val="40"/>
+              </a:spcBef>
+            </a:pPr>
+            <a:r>
+              <a:rPr lang="uz-UZ" altLang="en-US" sz="1200" dirty="0">
+                <a:solidFill>
+                  <a:srgbClr val="B0C4DE"/>
+                </a:solidFill>
+                <a:latin typeface="Calibri"/>
+              </a:rPr>
+              <a:t>   O'zbek tilida: sintaktik tahlil + biznes/xavfsizlik mantiqi + Auto-fix</a:t>
             </a:r>
           </a:p>
           <a:p>
@@ -1016,7 +990,7 @@
                 </a:solidFill>
                 <a:latin typeface="Calibri"/>
               </a:rPr>
-              <a:t>    5️⃣  DASHBOARD — Loyiha analitikasi</a:t>
+              <a:t>5️⃣  DASHBOARD — Loyiha Analitikasi</a:t>
             </a:r>
           </a:p>
           <a:p>
@@ -1064,23 +1038,23 @@
                 </a:solidFill>
                 <a:latin typeface="Calibri"/>
               </a:rPr>
-              <a:t>    📌 SPA arxitektura: Sahifalar almashinishida brauzer QAYTA YUKLANMAYDI</a:t>
-            </a:r>
-          </a:p>
-          <a:p>
-            <a:pPr>
-              <a:spcBef>
-                <a:spcPts val="40"/>
-              </a:spcBef>
-            </a:pPr>
-            <a:r>
-              <a:rPr lang="uz-UZ" altLang="en-US" sz="1200" dirty="0">
-                <a:solidFill>
-                  <a:srgbClr val="B0C4DE"/>
-                </a:solidFill>
-                <a:latin typeface="Calibri"/>
-              </a:rPr>
-              <a:t>   history.pushState orqali URL yo'llari dinamik aks ettiriladi</a:t>
+              <a:t>📌 SPA arxitektura: Brauzer QAYTA YUKLANMAYDI — history.pushState</a:t>
+            </a:r>
+          </a:p>
+          <a:p>
+            <a:pPr>
+              <a:spcBef>
+                <a:spcPts val="40"/>
+              </a:spcBef>
+            </a:pPr>
+            <a:r>
+              <a:rPr lang="uz-UZ" altLang="en-US" sz="1200" dirty="0">
+                <a:solidFill>
+                  <a:srgbClr val="B0C4DE"/>
+                </a:solidFill>
+                <a:latin typeface="Calibri"/>
+              </a:rPr>
+              <a:t>   Nofunksional talablar: &lt;200ms API javob, 50+ parallel so'rov, CORS himoya</a:t>
             </a:r>
           </a:p>
         </p:txBody>
@@ -1094,7 +1068,7 @@
 </file>
 
 <file path=ppt/slides/slide11.xml><?xml version="1.0" encoding="utf-8"?>
-<p:sld xmlns:p="http://schemas.openxmlformats.org/presentationml/2006/main" xmlns:a="http://schemas.openxmlformats.org/drawingml/2006/main" xmlns:r="http://schemas.openxmlformats.org/officeDocument/2006/relationships" xmlns:xdr="http://schemas.openxmlformats.org/drawingml/2006/spreadsheetDrawing">
+<p:sld xmlns:p="http://schemas.openxmlformats.org/presentationml/2006/main" xmlns:a="http://schemas.openxmlformats.org/drawingml/2006/main" xmlns:r="http://schemas.openxmlformats.org/officeDocument/2006/relationships">
   <p:cSld>
     <p:spTree>
       <p:nvGrpSpPr>
@@ -1156,7 +1130,7 @@
             <a:avLst/>
           </a:prstGeom>
           <a:solidFill>
-            <a:srgbClr val="0D1B2A"/>
+            <a:srgbClr val="0a1628"/>
           </a:solidFill>
           <a:ln>
             <a:noFill/>
@@ -1254,7 +1228,7 @@
                 </a:solidFill>
                 <a:latin typeface="Calibri"/>
               </a:rPr>
-              <a:t>Tizimning Kirish Qismi — Home Page</a:t>
+              <a:t>Home Page — Tizimning Kirish Moduli</a:t>
             </a:r>
           </a:p>
         </p:txBody>
@@ -1306,8 +1280,8 @@
         </p:blipFill>
         <p:spPr>
           <a:xfrm>
-            <a:off x="288000" y="1080000"/>
-            <a:ext cx="7380000" cy="5220000"/>
+            <a:off x="180000" y="1044000"/>
+            <a:ext cx="7920000" cy="5220000"/>
           </a:xfrm>
           <a:prstGeom prst="rect">
             <a:avLst/>
@@ -1324,8 +1298,8 @@
         </p:nvSpPr>
         <p:spPr>
           <a:xfrm>
-            <a:off x="266400" y="1058400"/>
-            <a:ext cx="7423200" cy="21600"/>
+            <a:off x="158400" y="1022400"/>
+            <a:ext cx="7963200" cy="21600"/>
           </a:xfrm>
           <a:prstGeom prst="rect">
             <a:avLst/>
@@ -1353,8 +1327,8 @@
         </p:nvSpPr>
         <p:spPr>
           <a:xfrm>
-            <a:off x="266400" y="6300000"/>
-            <a:ext cx="7423200" cy="21600"/>
+            <a:off x="158400" y="6263999"/>
+            <a:ext cx="7963200" cy="21600"/>
           </a:xfrm>
           <a:prstGeom prst="rect">
             <a:avLst/>
@@ -1382,7 +1356,7 @@
         </p:nvSpPr>
         <p:spPr>
           <a:xfrm>
-            <a:off x="266400" y="1058400"/>
+            <a:off x="158400" y="1022400"/>
             <a:ext cx="21600" cy="5263200"/>
           </a:xfrm>
           <a:prstGeom prst="rect">
@@ -1411,7 +1385,7 @@
         </p:nvSpPr>
         <p:spPr>
           <a:xfrm>
-            <a:off x="7668000" y="1058400"/>
+            <a:off x="8100000" y="1022400"/>
             <a:ext cx="21600" cy="5263200"/>
           </a:xfrm>
           <a:prstGeom prst="rect">
@@ -1440,17 +1414,15 @@
         </p:nvSpPr>
         <p:spPr>
           <a:xfrm>
-            <a:off x="7812000" y="1080000"/>
-            <a:ext cx="4273199" cy="5220000"/>
-          </a:xfrm>
-          <a:prstGeom prst="roundRect">
-            <a:avLst>
-              <a:gd name="adj" fmla="val 15000"/>
-            </a:avLst>
-          </a:prstGeom>
-          <a:solidFill>
-            <a:srgbClr val="0D1B2A">
-              <a:alpha val="80000"/>
+            <a:off x="8352000" y="1044000"/>
+            <a:ext cx="3708000" cy="5220000"/>
+          </a:xfrm>
+          <a:prstGeom prst="rect">
+            <a:avLst/>
+          </a:prstGeom>
+          <a:solidFill>
+            <a:srgbClr val="0a1628">
+              <a:alpha val="90000"/>
             </a:srgbClr>
           </a:solidFill>
           <a:ln>
@@ -1473,8 +1445,8 @@
         </p:nvSpPr>
         <p:spPr>
           <a:xfrm>
-            <a:off x="7812000" y="1080000"/>
-            <a:ext cx="43200" cy="5220000"/>
+            <a:off x="8352000" y="1044000"/>
+            <a:ext cx="36000" cy="5220000"/>
           </a:xfrm>
           <a:prstGeom prst="rect">
             <a:avLst/>
@@ -1500,8 +1472,8 @@
         </p:nvSpPr>
         <p:spPr>
           <a:xfrm>
-            <a:off x="7902000" y="1188000"/>
-            <a:ext cx="4093199" cy="5004000"/>
+            <a:off x="8460000" y="1152000"/>
+            <a:ext cx="3528000" cy="4968000"/>
           </a:xfrm>
           <a:prstGeom prst="rect">
             <a:avLst/>
@@ -1514,126 +1486,225 @@
           <a:p>
             <a:pPr>
               <a:spcBef>
-                <a:spcPts val="120"/>
-              </a:spcBef>
-            </a:pPr>
-            <a:r>
-              <a:rPr lang="uz-UZ" altLang="en-US" sz="1100" dirty="0">
+                <a:spcPts val="100"/>
+              </a:spcBef>
+            </a:pPr>
+            <a:r>
+              <a:rPr lang="uz-UZ" altLang="en-US" sz="1200" dirty="0">
                 <a:solidFill>
                   <a:srgbClr val="00C6FF"/>
                 </a:solidFill>
                 <a:latin typeface="Calibri"/>
               </a:rPr>
-              <a:t> ▸ </a:t>
-            </a:r>
-            <a:r>
-              <a:rPr lang="uz-UZ" altLang="en-US" sz="1100" dirty="0">
-                <a:solidFill>
-                  <a:srgbClr val="B0C4DE"/>
-                </a:solidFill>
-                <a:latin typeface="Calibri"/>
-              </a:rPr>
-              <a:t>GitHub/GitLab URL manzilini qabul qiladi</a:t>
-            </a:r>
-          </a:p>
-          <a:p>
-            <a:pPr>
-              <a:spcBef>
-                <a:spcPts val="120"/>
-              </a:spcBef>
-            </a:pPr>
-            <a:r>
-              <a:rPr lang="uz-UZ" altLang="en-US" sz="1100" dirty="0">
+              <a:t> ▸ GitHub/GitLab URL manzilini qabul qiladi</a:t>
+            </a:r>
+          </a:p>
+          <a:p>
+            <a:pPr>
+              <a:spcBef>
+                <a:spcPts val="40"/>
+              </a:spcBef>
+            </a:pPr>
+            <a:r>
+              <a:rPr lang="uz-UZ" altLang="en-US" sz="1400" dirty="0">
+                <a:solidFill>
+                  <a:srgbClr val="FFFFFF"/>
+                </a:solidFill>
+                <a:latin typeface="Calibri"/>
+              </a:rPr>
+              <a:t/>
+            </a:r>
+          </a:p>
+          <a:p>
+            <a:pPr>
+              <a:spcBef>
+                <a:spcPts val="100"/>
+              </a:spcBef>
+            </a:pPr>
+            <a:r>
+              <a:rPr lang="uz-UZ" altLang="en-US" sz="1200" dirty="0">
                 <a:solidFill>
                   <a:srgbClr val="00C6FF"/>
                 </a:solidFill>
                 <a:latin typeface="Calibri"/>
               </a:rPr>
-              <a:t> ▸ </a:t>
-            </a:r>
-            <a:r>
-              <a:rPr lang="uz-UZ" altLang="en-US" sz="1100" dirty="0">
-                <a:solidFill>
-                  <a:srgbClr val="B0C4DE"/>
-                </a:solidFill>
-                <a:latin typeface="Calibri"/>
-              </a:rPr>
-              <a:t>Regex validatsiya va xavfsizlik tekshiruvi</a:t>
-            </a:r>
-          </a:p>
-          <a:p>
-            <a:pPr>
-              <a:spcBef>
-                <a:spcPts val="120"/>
-              </a:spcBef>
-            </a:pPr>
-            <a:r>
-              <a:rPr lang="uz-UZ" altLang="en-US" sz="1100" dirty="0">
+              <a:t> ▸ Regex validatsiya:</a:t>
+            </a:r>
+          </a:p>
+          <a:p>
+            <a:pPr>
+              <a:spcBef>
+                <a:spcPts val="100"/>
+              </a:spcBef>
+            </a:pPr>
+            <a:r>
+              <a:rPr lang="uz-UZ" altLang="en-US" sz="1200" dirty="0">
+                <a:solidFill>
+                  <a:srgbClr val="B0C4DE"/>
+                </a:solidFill>
+                <a:latin typeface="Calibri"/>
+              </a:rPr>
+              <a:t>    URL formati va xavfsizlik tekshiruvi</a:t>
+            </a:r>
+          </a:p>
+          <a:p>
+            <a:pPr>
+              <a:spcBef>
+                <a:spcPts val="40"/>
+              </a:spcBef>
+            </a:pPr>
+            <a:r>
+              <a:rPr lang="uz-UZ" altLang="en-US" sz="1400" dirty="0">
+                <a:solidFill>
+                  <a:srgbClr val="FFFFFF"/>
+                </a:solidFill>
+                <a:latin typeface="Calibri"/>
+              </a:rPr>
+              <a:t/>
+            </a:r>
+          </a:p>
+          <a:p>
+            <a:pPr>
+              <a:spcBef>
+                <a:spcPts val="100"/>
+              </a:spcBef>
+            </a:pPr>
+            <a:r>
+              <a:rPr lang="uz-UZ" altLang="en-US" sz="1200" dirty="0">
                 <a:solidFill>
                   <a:srgbClr val="00C6FF"/>
                 </a:solidFill>
                 <a:latin typeface="Calibri"/>
               </a:rPr>
-              <a:t> ▸ </a:t>
-            </a:r>
-            <a:r>
-              <a:rPr lang="uz-UZ" altLang="en-US" sz="1100" dirty="0">
-                <a:solidFill>
-                  <a:srgbClr val="B0C4DE"/>
-                </a:solidFill>
-                <a:latin typeface="Calibri"/>
-              </a:rPr>
-              <a:t>Progressiv yuklanish animatsiyasi</a:t>
-            </a:r>
-          </a:p>
-          <a:p>
-            <a:pPr>
-              <a:spcBef>
-                <a:spcPts val="120"/>
-              </a:spcBef>
-            </a:pPr>
-            <a:r>
-              <a:rPr lang="uz-UZ" altLang="en-US" sz="1100" dirty="0">
+              <a:t> ▸ Progressiv loading animatsiyasi</a:t>
+            </a:r>
+          </a:p>
+          <a:p>
+            <a:pPr>
+              <a:spcBef>
+                <a:spcPts val="40"/>
+              </a:spcBef>
+            </a:pPr>
+            <a:r>
+              <a:rPr lang="uz-UZ" altLang="en-US" sz="1400" dirty="0">
+                <a:solidFill>
+                  <a:srgbClr val="FFFFFF"/>
+                </a:solidFill>
+                <a:latin typeface="Calibri"/>
+              </a:rPr>
+              <a:t/>
+            </a:r>
+          </a:p>
+          <a:p>
+            <a:pPr>
+              <a:spcBef>
+                <a:spcPts val="100"/>
+              </a:spcBef>
+            </a:pPr>
+            <a:r>
+              <a:rPr lang="uz-UZ" altLang="en-US" sz="1200" dirty="0">
                 <a:solidFill>
                   <a:srgbClr val="00C6FF"/>
                 </a:solidFill>
                 <a:latin typeface="Calibri"/>
               </a:rPr>
-              <a:t> ▸ </a:t>
-            </a:r>
-            <a:r>
-              <a:rPr lang="uz-UZ" altLang="en-US" sz="1100" dirty="0">
-                <a:solidFill>
-                  <a:srgbClr val="B0C4DE"/>
-                </a:solidFill>
-                <a:latin typeface="Calibri"/>
-              </a:rPr>
-              <a:t>Tayyor ommabop repozitoriyalar ro'yxati</a:t>
-            </a:r>
-          </a:p>
-          <a:p>
-            <a:pPr>
-              <a:spcBef>
-                <a:spcPts val="120"/>
-              </a:spcBef>
-            </a:pPr>
-            <a:r>
-              <a:rPr lang="uz-UZ" altLang="en-US" sz="1100" dirty="0">
+              <a:t> ▸ Tayyor ommabop repozitoriyalar ro'yxati</a:t>
+            </a:r>
+          </a:p>
+          <a:p>
+            <a:pPr>
+              <a:spcBef>
+                <a:spcPts val="40"/>
+              </a:spcBef>
+            </a:pPr>
+            <a:r>
+              <a:rPr lang="uz-UZ" altLang="en-US" sz="1400" dirty="0">
+                <a:solidFill>
+                  <a:srgbClr val="FFFFFF"/>
+                </a:solidFill>
+                <a:latin typeface="Calibri"/>
+              </a:rPr>
+              <a:t/>
+            </a:r>
+          </a:p>
+          <a:p>
+            <a:pPr>
+              <a:spcBef>
+                <a:spcPts val="100"/>
+              </a:spcBef>
+            </a:pPr>
+            <a:r>
+              <a:rPr lang="uz-UZ" altLang="en-US" sz="1200" dirty="0">
                 <a:solidFill>
                   <a:srgbClr val="00C6FF"/>
                 </a:solidFill>
                 <a:latin typeface="Calibri"/>
               </a:rPr>
-              <a:t> ▸ </a:t>
-            </a:r>
-            <a:r>
-              <a:rPr lang="uz-UZ" altLang="en-US" sz="1100" dirty="0">
-                <a:solidFill>
-                  <a:srgbClr val="B0C4DE"/>
-                </a:solidFill>
-                <a:latin typeface="Calibri"/>
-              </a:rPr>
-              <a:t>Dark Mode + Neon effektli zamonaviy dizayn</a:t>
+              <a:t> ▸ Dark Mode dizayn</a:t>
+            </a:r>
+          </a:p>
+          <a:p>
+            <a:pPr>
+              <a:spcBef>
+                <a:spcPts val="100"/>
+              </a:spcBef>
+            </a:pPr>
+            <a:r>
+              <a:rPr lang="uz-UZ" altLang="en-US" sz="1200" dirty="0">
+                <a:solidFill>
+                  <a:srgbClr val="B0C4DE"/>
+                </a:solidFill>
+                <a:latin typeface="Calibri"/>
+              </a:rPr>
+              <a:t>    Neon effektli zamonaviy interfeys</a:t>
+            </a:r>
+          </a:p>
+          <a:p>
+            <a:pPr>
+              <a:spcBef>
+                <a:spcPts val="40"/>
+              </a:spcBef>
+            </a:pPr>
+            <a:r>
+              <a:rPr lang="uz-UZ" altLang="en-US" sz="1400" dirty="0">
+                <a:solidFill>
+                  <a:srgbClr val="FFFFFF"/>
+                </a:solidFill>
+                <a:latin typeface="Calibri"/>
+              </a:rPr>
+              <a:t/>
+            </a:r>
+          </a:p>
+          <a:p>
+            <a:pPr>
+              <a:spcBef>
+                <a:spcPts val="100"/>
+              </a:spcBef>
+            </a:pPr>
+            <a:r>
+              <a:rPr lang="uz-UZ" altLang="en-US" sz="1200" dirty="0">
+                <a:solidFill>
+                  <a:srgbClr val="00C6FF"/>
+                </a:solidFill>
+                <a:latin typeface="Calibri"/>
+              </a:rPr>
+              <a:t> ▸ Backend bilan asinxron</a:t>
+            </a:r>
+          </a:p>
+          <a:p>
+            <a:pPr>
+              <a:spcBef>
+                <a:spcPts val="100"/>
+              </a:spcBef>
+            </a:pPr>
+            <a:r>
+              <a:rPr lang="uz-UZ" altLang="en-US" sz="1200" dirty="0">
+                <a:solidFill>
+                  <a:srgbClr val="B0C4DE"/>
+                </a:solidFill>
+                <a:latin typeface="Calibri"/>
+              </a:rPr>
+              <a:t>    so'rov-javob sikli</a:t>
             </a:r>
           </a:p>
         </p:txBody>
@@ -1647,7 +1718,7 @@
 </file>
 
 <file path=ppt/slides/slide12.xml><?xml version="1.0" encoding="utf-8"?>
-<p:sld xmlns:p="http://schemas.openxmlformats.org/presentationml/2006/main" xmlns:a="http://schemas.openxmlformats.org/drawingml/2006/main" xmlns:r="http://schemas.openxmlformats.org/officeDocument/2006/relationships" xmlns:xdr="http://schemas.openxmlformats.org/drawingml/2006/spreadsheetDrawing">
+<p:sld xmlns:p="http://schemas.openxmlformats.org/presentationml/2006/main" xmlns:a="http://schemas.openxmlformats.org/drawingml/2006/main" xmlns:r="http://schemas.openxmlformats.org/officeDocument/2006/relationships">
   <p:cSld>
     <p:spTree>
       <p:nvGrpSpPr>
@@ -1709,7 +1780,7 @@
             <a:avLst/>
           </a:prstGeom>
           <a:solidFill>
-            <a:srgbClr val="0D1B2A"/>
+            <a:srgbClr val="0a1628"/>
           </a:solidFill>
           <a:ln>
             <a:noFill/>
@@ -1807,7 +1878,7 @@
                 </a:solidFill>
                 <a:latin typeface="Calibri"/>
               </a:rPr>
-              <a:t>Commitlar Tarixi — Repository Explorer</a:t>
+              <a:t>Commits Sahifasi — Repository Explorer</a:t>
             </a:r>
           </a:p>
         </p:txBody>
@@ -1859,8 +1930,8 @@
         </p:blipFill>
         <p:spPr>
           <a:xfrm>
-            <a:off x="288000" y="1080000"/>
-            <a:ext cx="7380000" cy="5220000"/>
+            <a:off x="180000" y="1044000"/>
+            <a:ext cx="7920000" cy="5220000"/>
           </a:xfrm>
           <a:prstGeom prst="rect">
             <a:avLst/>
@@ -1877,8 +1948,8 @@
         </p:nvSpPr>
         <p:spPr>
           <a:xfrm>
-            <a:off x="266400" y="1058400"/>
-            <a:ext cx="7423200" cy="21600"/>
+            <a:off x="158400" y="1022400"/>
+            <a:ext cx="7963200" cy="21600"/>
           </a:xfrm>
           <a:prstGeom prst="rect">
             <a:avLst/>
@@ -1906,8 +1977,8 @@
         </p:nvSpPr>
         <p:spPr>
           <a:xfrm>
-            <a:off x="266400" y="6300000"/>
-            <a:ext cx="7423200" cy="21600"/>
+            <a:off x="158400" y="6263999"/>
+            <a:ext cx="7963200" cy="21600"/>
           </a:xfrm>
           <a:prstGeom prst="rect">
             <a:avLst/>
@@ -1935,7 +2006,7 @@
         </p:nvSpPr>
         <p:spPr>
           <a:xfrm>
-            <a:off x="266400" y="1058400"/>
+            <a:off x="158400" y="1022400"/>
             <a:ext cx="21600" cy="5263200"/>
           </a:xfrm>
           <a:prstGeom prst="rect">
@@ -1964,7 +2035,7 @@
         </p:nvSpPr>
         <p:spPr>
           <a:xfrm>
-            <a:off x="7668000" y="1058400"/>
+            <a:off x="8100000" y="1022400"/>
             <a:ext cx="21600" cy="5263200"/>
           </a:xfrm>
           <a:prstGeom prst="rect">
@@ -1993,17 +2064,15 @@
         </p:nvSpPr>
         <p:spPr>
           <a:xfrm>
-            <a:off x="7812000" y="1080000"/>
-            <a:ext cx="4273199" cy="5220000"/>
-          </a:xfrm>
-          <a:prstGeom prst="roundRect">
-            <a:avLst>
-              <a:gd name="adj" fmla="val 15000"/>
-            </a:avLst>
-          </a:prstGeom>
-          <a:solidFill>
-            <a:srgbClr val="0D1B2A">
-              <a:alpha val="80000"/>
+            <a:off x="8352000" y="1044000"/>
+            <a:ext cx="3708000" cy="5220000"/>
+          </a:xfrm>
+          <a:prstGeom prst="rect">
+            <a:avLst/>
+          </a:prstGeom>
+          <a:solidFill>
+            <a:srgbClr val="0a1628">
+              <a:alpha val="90000"/>
             </a:srgbClr>
           </a:solidFill>
           <a:ln>
@@ -2026,8 +2095,8 @@
         </p:nvSpPr>
         <p:spPr>
           <a:xfrm>
-            <a:off x="7812000" y="1080000"/>
-            <a:ext cx="43200" cy="5220000"/>
+            <a:off x="8352000" y="1044000"/>
+            <a:ext cx="36000" cy="5220000"/>
           </a:xfrm>
           <a:prstGeom prst="rect">
             <a:avLst/>
@@ -2053,8 +2122,8 @@
         </p:nvSpPr>
         <p:spPr>
           <a:xfrm>
-            <a:off x="7902000" y="1188000"/>
-            <a:ext cx="4093199" cy="5004000"/>
+            <a:off x="8460000" y="1152000"/>
+            <a:ext cx="3528000" cy="4968000"/>
           </a:xfrm>
           <a:prstGeom prst="rect">
             <a:avLst/>
@@ -2067,126 +2136,241 @@
           <a:p>
             <a:pPr>
               <a:spcBef>
-                <a:spcPts val="120"/>
-              </a:spcBef>
-            </a:pPr>
-            <a:r>
-              <a:rPr lang="uz-UZ" altLang="en-US" sz="1100" dirty="0">
+                <a:spcPts val="100"/>
+              </a:spcBef>
+            </a:pPr>
+            <a:r>
+              <a:rPr lang="uz-UZ" altLang="en-US" sz="1200" dirty="0">
                 <a:solidFill>
                   <a:srgbClr val="00C6FF"/>
                 </a:solidFill>
                 <a:latin typeface="Calibri"/>
               </a:rPr>
-              <a:t> ▸ </a:t>
-            </a:r>
-            <a:r>
-              <a:rPr lang="uz-UZ" altLang="en-US" sz="1100" dirty="0">
-                <a:solidFill>
-                  <a:srgbClr val="B0C4DE"/>
-                </a:solidFill>
-                <a:latin typeface="Calibri"/>
-              </a:rPr>
-              <a:t>Backend klonlashdan so'ng avtomatik o'tish</a:t>
-            </a:r>
-          </a:p>
-          <a:p>
-            <a:pPr>
-              <a:spcBef>
-                <a:spcPts val="120"/>
-              </a:spcBef>
-            </a:pPr>
-            <a:r>
-              <a:rPr lang="uz-UZ" altLang="en-US" sz="1100" dirty="0">
+              <a:t> ▸ Backend klonlashdan so'ng</a:t>
+            </a:r>
+          </a:p>
+          <a:p>
+            <a:pPr>
+              <a:spcBef>
+                <a:spcPts val="100"/>
+              </a:spcBef>
+            </a:pPr>
+            <a:r>
+              <a:rPr lang="uz-UZ" altLang="en-US" sz="1200" dirty="0">
+                <a:solidFill>
+                  <a:srgbClr val="B0C4DE"/>
+                </a:solidFill>
+                <a:latin typeface="Calibri"/>
+              </a:rPr>
+              <a:t>    avtomatik o'tish</a:t>
+            </a:r>
+          </a:p>
+          <a:p>
+            <a:pPr>
+              <a:spcBef>
+                <a:spcPts val="40"/>
+              </a:spcBef>
+            </a:pPr>
+            <a:r>
+              <a:rPr lang="uz-UZ" altLang="en-US" sz="1400" dirty="0">
+                <a:solidFill>
+                  <a:srgbClr val="FFFFFF"/>
+                </a:solidFill>
+                <a:latin typeface="Calibri"/>
+              </a:rPr>
+              <a:t/>
+            </a:r>
+          </a:p>
+          <a:p>
+            <a:pPr>
+              <a:spcBef>
+                <a:spcPts val="100"/>
+              </a:spcBef>
+            </a:pPr>
+            <a:r>
+              <a:rPr lang="uz-UZ" altLang="en-US" sz="1200" dirty="0">
                 <a:solidFill>
                   <a:srgbClr val="00C6FF"/>
                 </a:solidFill>
                 <a:latin typeface="Calibri"/>
               </a:rPr>
-              <a:t> ▸ </a:t>
-            </a:r>
-            <a:r>
-              <a:rPr lang="uz-UZ" altLang="en-US" sz="1100" dirty="0">
-                <a:solidFill>
-                  <a:srgbClr val="B0C4DE"/>
-                </a:solidFill>
-                <a:latin typeface="Calibri"/>
-              </a:rPr>
-              <a:t>Commit xabar, muallif, sana bo'yicha qidiruv</a:t>
-            </a:r>
-          </a:p>
-          <a:p>
-            <a:pPr>
-              <a:spcBef>
-                <a:spcPts val="120"/>
-              </a:spcBef>
-            </a:pPr>
-            <a:r>
-              <a:rPr lang="uz-UZ" altLang="en-US" sz="1100" dirty="0">
+              <a:t> ▸ Real vaqt qidiruv:</a:t>
+            </a:r>
+          </a:p>
+          <a:p>
+            <a:pPr>
+              <a:spcBef>
+                <a:spcPts val="100"/>
+              </a:spcBef>
+            </a:pPr>
+            <a:r>
+              <a:rPr lang="uz-UZ" altLang="en-US" sz="1200" dirty="0">
+                <a:solidFill>
+                  <a:srgbClr val="B0C4DE"/>
+                </a:solidFill>
+                <a:latin typeface="Calibri"/>
+              </a:rPr>
+              <a:t>    xabar / muallif / commit ID</a:t>
+            </a:r>
+          </a:p>
+          <a:p>
+            <a:pPr>
+              <a:spcBef>
+                <a:spcPts val="40"/>
+              </a:spcBef>
+            </a:pPr>
+            <a:r>
+              <a:rPr lang="uz-UZ" altLang="en-US" sz="1400" dirty="0">
+                <a:solidFill>
+                  <a:srgbClr val="FFFFFF"/>
+                </a:solidFill>
+                <a:latin typeface="Calibri"/>
+              </a:rPr>
+              <a:t/>
+            </a:r>
+          </a:p>
+          <a:p>
+            <a:pPr>
+              <a:spcBef>
+                <a:spcPts val="100"/>
+              </a:spcBef>
+            </a:pPr>
+            <a:r>
+              <a:rPr lang="uz-UZ" altLang="en-US" sz="1200" dirty="0">
                 <a:solidFill>
                   <a:srgbClr val="00C6FF"/>
                 </a:solidFill>
                 <a:latin typeface="Calibri"/>
               </a:rPr>
-              <a:t> ▸ </a:t>
-            </a:r>
-            <a:r>
-              <a:rPr lang="uz-UZ" altLang="en-US" sz="1100" dirty="0">
-                <a:solidFill>
-                  <a:srgbClr val="B0C4DE"/>
-                </a:solidFill>
-                <a:latin typeface="Calibri"/>
-              </a:rPr>
-              <a:t>Real vaqtda 4 ta statistik kartochka</a:t>
-            </a:r>
-          </a:p>
-          <a:p>
-            <a:pPr>
-              <a:spcBef>
-                <a:spcPts val="120"/>
-              </a:spcBef>
-            </a:pPr>
-            <a:r>
-              <a:rPr lang="uz-UZ" altLang="en-US" sz="1100" dirty="0">
+              <a:t> ▸ 4 ta statistik kartochka:</a:t>
+            </a:r>
+          </a:p>
+          <a:p>
+            <a:pPr>
+              <a:spcBef>
+                <a:spcPts val="100"/>
+              </a:spcBef>
+            </a:pPr>
+            <a:r>
+              <a:rPr lang="uz-UZ" altLang="en-US" sz="1200" dirty="0">
+                <a:solidFill>
+                  <a:srgbClr val="B0C4DE"/>
+                </a:solidFill>
+                <a:latin typeface="Calibri"/>
+              </a:rPr>
+              <a:t>    commit soni, qatorlar,</a:t>
+            </a:r>
+          </a:p>
+          <a:p>
+            <a:pPr>
+              <a:spcBef>
+                <a:spcPts val="100"/>
+              </a:spcBef>
+            </a:pPr>
+            <a:r>
+              <a:rPr lang="uz-UZ" altLang="en-US" sz="1200" dirty="0">
+                <a:solidFill>
+                  <a:srgbClr val="B0C4DE"/>
+                </a:solidFill>
+                <a:latin typeface="Calibri"/>
+              </a:rPr>
+              <a:t>    mualliflar, o'zgargan fayllar</a:t>
+            </a:r>
+          </a:p>
+          <a:p>
+            <a:pPr>
+              <a:spcBef>
+                <a:spcPts val="40"/>
+              </a:spcBef>
+            </a:pPr>
+            <a:r>
+              <a:rPr lang="uz-UZ" altLang="en-US" sz="1400" dirty="0">
+                <a:solidFill>
+                  <a:srgbClr val="FFFFFF"/>
+                </a:solidFill>
+                <a:latin typeface="Calibri"/>
+              </a:rPr>
+              <a:t/>
+            </a:r>
+          </a:p>
+          <a:p>
+            <a:pPr>
+              <a:spcBef>
+                <a:spcPts val="100"/>
+              </a:spcBef>
+            </a:pPr>
+            <a:r>
+              <a:rPr lang="uz-UZ" altLang="en-US" sz="1200" dirty="0">
                 <a:solidFill>
                   <a:srgbClr val="00C6FF"/>
                 </a:solidFill>
                 <a:latin typeface="Calibri"/>
               </a:rPr>
-              <a:t> ▸ </a:t>
-            </a:r>
-            <a:r>
-              <a:rPr lang="uz-UZ" altLang="en-US" sz="1100" dirty="0">
-                <a:solidFill>
-                  <a:srgbClr val="B0C4DE"/>
-                </a:solidFill>
-                <a:latin typeface="Calibri"/>
-              </a:rPr>
-              <a:t>Commit tanlanganda — Diff sahifasiga o'tish</a:t>
-            </a:r>
-          </a:p>
-          <a:p>
-            <a:pPr>
-              <a:spcBef>
-                <a:spcPts val="120"/>
-              </a:spcBef>
-            </a:pPr>
-            <a:r>
-              <a:rPr lang="uz-UZ" altLang="en-US" sz="1100" dirty="0">
+              <a:t> ▸ Commit tanlash →</a:t>
+            </a:r>
+          </a:p>
+          <a:p>
+            <a:pPr>
+              <a:spcBef>
+                <a:spcPts val="100"/>
+              </a:spcBef>
+            </a:pPr>
+            <a:r>
+              <a:rPr lang="uz-UZ" altLang="en-US" sz="1200" dirty="0">
+                <a:solidFill>
+                  <a:srgbClr val="B0C4DE"/>
+                </a:solidFill>
+                <a:latin typeface="Calibri"/>
+              </a:rPr>
+              <a:t>    Diff sahifasiga yo'naltirish</a:t>
+            </a:r>
+          </a:p>
+          <a:p>
+            <a:pPr>
+              <a:spcBef>
+                <a:spcPts val="40"/>
+              </a:spcBef>
+            </a:pPr>
+            <a:r>
+              <a:rPr lang="uz-UZ" altLang="en-US" sz="1400" dirty="0">
+                <a:solidFill>
+                  <a:srgbClr val="FFFFFF"/>
+                </a:solidFill>
+                <a:latin typeface="Calibri"/>
+              </a:rPr>
+              <a:t/>
+            </a:r>
+          </a:p>
+          <a:p>
+            <a:pPr>
+              <a:spcBef>
+                <a:spcPts val="100"/>
+              </a:spcBef>
+            </a:pPr>
+            <a:r>
+              <a:rPr lang="uz-UZ" altLang="en-US" sz="1200" dirty="0">
                 <a:solidFill>
                   <a:srgbClr val="00C6FF"/>
                 </a:solidFill>
                 <a:latin typeface="Calibri"/>
               </a:rPr>
-              <a:t> ▸ </a:t>
-            </a:r>
-            <a:r>
-              <a:rPr lang="uz-UZ" altLang="en-US" sz="1100" dirty="0">
-                <a:solidFill>
-                  <a:srgbClr val="B0C4DE"/>
-                </a:solidFill>
-                <a:latin typeface="Calibri"/>
-              </a:rPr>
-              <a:t>Sorting va filtering imkoniyatlari</a:t>
+              <a:t> ▸ Sorting va filtering</a:t>
+            </a:r>
+          </a:p>
+          <a:p>
+            <a:pPr>
+              <a:spcBef>
+                <a:spcPts val="100"/>
+              </a:spcBef>
+            </a:pPr>
+            <a:r>
+              <a:rPr lang="uz-UZ" altLang="en-US" sz="1200" dirty="0">
+                <a:solidFill>
+                  <a:srgbClr val="B0C4DE"/>
+                </a:solidFill>
+                <a:latin typeface="Calibri"/>
+              </a:rPr>
+              <a:t>    imkoniyatlari</a:t>
             </a:r>
           </a:p>
         </p:txBody>
@@ -2200,7 +2384,7 @@
 </file>
 
 <file path=ppt/slides/slide13.xml><?xml version="1.0" encoding="utf-8"?>
-<p:sld xmlns:p="http://schemas.openxmlformats.org/presentationml/2006/main" xmlns:a="http://schemas.openxmlformats.org/drawingml/2006/main" xmlns:r="http://schemas.openxmlformats.org/officeDocument/2006/relationships" xmlns:xdr="http://schemas.openxmlformats.org/drawingml/2006/spreadsheetDrawing">
+<p:sld xmlns:p="http://schemas.openxmlformats.org/presentationml/2006/main" xmlns:a="http://schemas.openxmlformats.org/drawingml/2006/main" xmlns:r="http://schemas.openxmlformats.org/officeDocument/2006/relationships">
   <p:cSld>
     <p:spTree>
       <p:nvGrpSpPr>
@@ -2262,7 +2446,7 @@
             <a:avLst/>
           </a:prstGeom>
           <a:solidFill>
-            <a:srgbClr val="0D1B2A"/>
+            <a:srgbClr val="0a1628"/>
           </a:solidFill>
           <a:ln>
             <a:noFill/>
@@ -2430,7 +2614,7 @@
                 </a:solidFill>
                 <a:latin typeface="Calibri"/>
               </a:rPr>
-              <a:t>    ▸ ROUTER QATLAMI (routes/) — faqat endpoint va HTTP metodlar:</a:t>
+              <a:t>▸ ROUTER QATLAMI (routes/) — faqat endpoint va HTTP metodlar:</a:t>
             </a:r>
           </a:p>
           <a:p>
@@ -2494,39 +2678,39 @@
                 </a:solidFill>
                 <a:latin typeface="Calibri"/>
               </a:rPr>
-              <a:t>    ▸ CONTROLLER QATLAMI (controllers/) — biznes mantiq:</a:t>
-            </a:r>
-          </a:p>
-          <a:p>
-            <a:pPr>
-              <a:spcBef>
-                <a:spcPts val="40"/>
-              </a:spcBef>
-            </a:pPr>
-            <a:r>
-              <a:rPr lang="uz-UZ" altLang="en-US" sz="1200" dirty="0">
-                <a:solidFill>
-                  <a:srgbClr val="B0C4DE"/>
-                </a:solidFill>
-                <a:latin typeface="Calibri"/>
-              </a:rPr>
-              <a:t>   gitController.js → clone, log, diff, parse operatsiyalari</a:t>
-            </a:r>
-          </a:p>
-          <a:p>
-            <a:pPr>
-              <a:spcBef>
-                <a:spcPts val="40"/>
-              </a:spcBef>
-            </a:pPr>
-            <a:r>
-              <a:rPr lang="uz-UZ" altLang="en-US" sz="1200" dirty="0">
-                <a:solidFill>
-                  <a:srgbClr val="B0C4DE"/>
-                </a:solidFill>
-                <a:latin typeface="Calibri"/>
-              </a:rPr>
-              <a:t>   aiController.js  → Gemini API chaqiruvi, Prompt injection</a:t>
+              <a:t>▸ CONTROLLER QATLAMI (controllers/) — biznes mantiq:</a:t>
+            </a:r>
+          </a:p>
+          <a:p>
+            <a:pPr>
+              <a:spcBef>
+                <a:spcPts val="40"/>
+              </a:spcBef>
+            </a:pPr>
+            <a:r>
+              <a:rPr lang="uz-UZ" altLang="en-US" sz="1200" dirty="0">
+                <a:solidFill>
+                  <a:srgbClr val="B0C4DE"/>
+                </a:solidFill>
+                <a:latin typeface="Calibri"/>
+              </a:rPr>
+              <a:t>   gitController.js → simple-git: clone, log, diff, parse</a:t>
+            </a:r>
+          </a:p>
+          <a:p>
+            <a:pPr>
+              <a:spcBef>
+                <a:spcPts val="40"/>
+              </a:spcBef>
+            </a:pPr>
+            <a:r>
+              <a:rPr lang="uz-UZ" altLang="en-US" sz="1200" dirty="0">
+                <a:solidFill>
+                  <a:srgbClr val="B0C4DE"/>
+                </a:solidFill>
+                <a:latin typeface="Calibri"/>
+              </a:rPr>
+              <a:t>   aiController.js  → Gemini SDK: prompt injection, semantik tahlil</a:t>
             </a:r>
           </a:p>
           <a:p>
@@ -2558,23 +2742,23 @@
                 </a:solidFill>
                 <a:latin typeface="Calibri"/>
               </a:rPr>
-              <a:t>    ✅ AFZALLIK: Loose Coupling — komponentlar mustaqil</a:t>
-            </a:r>
-          </a:p>
-          <a:p>
-            <a:pPr>
-              <a:spcBef>
-                <a:spcPts val="40"/>
-              </a:spcBef>
-            </a:pPr>
-            <a:r>
-              <a:rPr lang="uz-UZ" altLang="en-US" sz="1200" dirty="0">
-                <a:solidFill>
-                  <a:srgbClr val="B0C4DE"/>
-                </a:solidFill>
-                <a:latin typeface="Calibri"/>
-              </a:rPr>
-              <a:t>   Gemini o'rniga boshqa LLM qo'shish = FAQAT 1 fayl o'zgartirish!</a:t>
+              <a:t>✅ LOOSE COUPLING — komponentlar mustaqil</a:t>
+            </a:r>
+          </a:p>
+          <a:p>
+            <a:pPr>
+              <a:spcBef>
+                <a:spcPts val="40"/>
+              </a:spcBef>
+            </a:pPr>
+            <a:r>
+              <a:rPr lang="uz-UZ" altLang="en-US" sz="1200" dirty="0">
+                <a:solidFill>
+                  <a:srgbClr val="B0C4DE"/>
+                </a:solidFill>
+                <a:latin typeface="Calibri"/>
+              </a:rPr>
+              <a:t>   Gemini o'rniga boshqa LLM = FAQAT 1 fayl o'zgartirish!</a:t>
             </a:r>
           </a:p>
           <a:p>
@@ -2606,23 +2790,39 @@
                 </a:solidFill>
                 <a:latin typeface="Calibri"/>
               </a:rPr>
-              <a:t>    ▸ Global Error Handling Middleware — try/catch barcha controllerlarda</a:t>
-            </a:r>
-          </a:p>
-          <a:p>
-            <a:pPr>
-              <a:spcBef>
-                <a:spcPts val="40"/>
-              </a:spcBef>
-            </a:pPr>
-            <a:r>
-              <a:rPr lang="uz-UZ" altLang="en-US" sz="1200" dirty="0">
-                <a:solidFill>
-                  <a:srgbClr val="B0C4DE"/>
-                </a:solidFill>
-                <a:latin typeface="Calibri"/>
-              </a:rPr>
-              <a:t>   HTTP 400 (noto'g'ri so'rov), 404 (topilmadi), 500 (server xatosi)</a:t>
+              <a:t>▸ Global Error Handling Middleware:</a:t>
+            </a:r>
+          </a:p>
+          <a:p>
+            <a:pPr>
+              <a:spcBef>
+                <a:spcPts val="40"/>
+              </a:spcBef>
+            </a:pPr>
+            <a:r>
+              <a:rPr lang="uz-UZ" altLang="en-US" sz="1200" dirty="0">
+                <a:solidFill>
+                  <a:srgbClr val="B0C4DE"/>
+                </a:solidFill>
+                <a:latin typeface="Calibri"/>
+              </a:rPr>
+              <a:t>   try/catch barcha controllerlarda</a:t>
+            </a:r>
+          </a:p>
+          <a:p>
+            <a:pPr>
+              <a:spcBef>
+                <a:spcPts val="40"/>
+              </a:spcBef>
+            </a:pPr>
+            <a:r>
+              <a:rPr lang="uz-UZ" altLang="en-US" sz="1200" dirty="0">
+                <a:solidFill>
+                  <a:srgbClr val="B0C4DE"/>
+                </a:solidFill>
+                <a:latin typeface="Calibri"/>
+              </a:rPr>
+              <a:t>   HTTP 400/404/500 + O'zbek tilida xabar</a:t>
             </a:r>
           </a:p>
           <a:p>
@@ -2654,7 +2854,23 @@
                 </a:solidFill>
                 <a:latin typeface="Calibri"/>
               </a:rPr>
-              <a:t>    📌 Non-blocking I/O: sekundiga 50+ asinxron so'rov parallel qayta ishlash</a:t>
+              <a:t>📌 Non-blocking I/O: sekundiga 50+ asinxron so'rov parallel qayta ishlash</a:t>
+            </a:r>
+          </a:p>
+          <a:p>
+            <a:pPr>
+              <a:spcBef>
+                <a:spcPts val="40"/>
+              </a:spcBef>
+            </a:pPr>
+            <a:r>
+              <a:rPr lang="uz-UZ" altLang="en-US" sz="1200" dirty="0">
+                <a:solidFill>
+                  <a:srgbClr val="B0C4DE"/>
+                </a:solidFill>
+                <a:latin typeface="Calibri"/>
+              </a:rPr>
+              <a:t>   Kesh mexanizmi: klonlangan repolar lokal saqlanadi — tezlik oshadi</a:t>
             </a:r>
           </a:p>
         </p:txBody>
@@ -2668,7 +2884,7 @@
 </file>
 
 <file path=ppt/slides/slide14.xml><?xml version="1.0" encoding="utf-8"?>
-<p:sld xmlns:p="http://schemas.openxmlformats.org/presentationml/2006/main" xmlns:a="http://schemas.openxmlformats.org/drawingml/2006/main" xmlns:r="http://schemas.openxmlformats.org/officeDocument/2006/relationships" xmlns:xdr="http://schemas.openxmlformats.org/drawingml/2006/spreadsheetDrawing">
+<p:sld xmlns:p="http://schemas.openxmlformats.org/presentationml/2006/main" xmlns:a="http://schemas.openxmlformats.org/drawingml/2006/main" xmlns:r="http://schemas.openxmlformats.org/officeDocument/2006/relationships">
   <p:cSld>
     <p:spTree>
       <p:nvGrpSpPr>
@@ -2730,7 +2946,7 @@
             <a:avLst/>
           </a:prstGeom>
           <a:solidFill>
-            <a:srgbClr val="0D1B2A"/>
+            <a:srgbClr val="0a1628"/>
           </a:solidFill>
           <a:ln>
             <a:noFill/>
@@ -2828,7 +3044,7 @@
                 </a:solidFill>
                 <a:latin typeface="Calibri"/>
               </a:rPr>
-              <a:t>Axborot Oqimlari — Mantiqiy Blok-sxema</a:t>
+              <a:t>Axborot Oqimlari — Mantiqiy Blok-Sxema</a:t>
             </a:r>
           </a:p>
         </p:txBody>
@@ -2880,8 +3096,8 @@
         </p:blipFill>
         <p:spPr>
           <a:xfrm>
-            <a:off x="288000" y="1080000"/>
-            <a:ext cx="7380000" cy="5220000"/>
+            <a:off x="360000" y="1044000"/>
+            <a:ext cx="11473200" cy="4860000"/>
           </a:xfrm>
           <a:prstGeom prst="rect">
             <a:avLst/>
@@ -2898,8 +3114,8 @@
         </p:nvSpPr>
         <p:spPr>
           <a:xfrm>
-            <a:off x="266400" y="1058400"/>
-            <a:ext cx="7423200" cy="21600"/>
+            <a:off x="360000" y="1044000"/>
+            <a:ext cx="11473200" cy="21600"/>
           </a:xfrm>
           <a:prstGeom prst="rect">
             <a:avLst/>
@@ -2927,8 +3143,8 @@
         </p:nvSpPr>
         <p:spPr>
           <a:xfrm>
-            <a:off x="266400" y="6300000"/>
-            <a:ext cx="7423200" cy="21600"/>
+            <a:off x="360000" y="5903999"/>
+            <a:ext cx="11473200" cy="21600"/>
           </a:xfrm>
           <a:prstGeom prst="rect">
             <a:avLst/>
@@ -2956,105 +3172,16 @@
         </p:nvSpPr>
         <p:spPr>
           <a:xfrm>
-            <a:off x="266400" y="1058400"/>
-            <a:ext cx="21600" cy="5263200"/>
-          </a:xfrm>
-          <a:prstGeom prst="rect">
-            <a:avLst/>
-          </a:prstGeom>
-          <a:solidFill>
-            <a:srgbClr val="00C6FF"/>
-          </a:solidFill>
-          <a:ln>
-            <a:noFill/>
-          </a:ln>
-        </p:spPr>
-        <p:txBody>
-          <a:bodyPr/>
-          <a:lstStyle/>
-          <a:p/>
-        </p:txBody>
-      </p:sp>
-      <p:sp>
-        <p:nvSpPr>
-          <p:cNvPr id="2" name="r"/>
-          <p:cNvSpPr>
-            <a:spLocks noGrp="1"/>
-          </p:cNvSpPr>
-          <p:nvPr/>
-        </p:nvSpPr>
-        <p:spPr>
-          <a:xfrm>
-            <a:off x="7668000" y="1058400"/>
-            <a:ext cx="21600" cy="5263200"/>
-          </a:xfrm>
-          <a:prstGeom prst="rect">
-            <a:avLst/>
-          </a:prstGeom>
-          <a:solidFill>
-            <a:srgbClr val="00C6FF"/>
-          </a:solidFill>
-          <a:ln>
-            <a:noFill/>
-          </a:ln>
-        </p:spPr>
-        <p:txBody>
-          <a:bodyPr/>
-          <a:lstStyle/>
-          <a:p/>
-        </p:txBody>
-      </p:sp>
-      <p:sp>
-        <p:nvSpPr>
-          <p:cNvPr id="2" name="r"/>
-          <p:cNvSpPr>
-            <a:spLocks noGrp="1"/>
-          </p:cNvSpPr>
-          <p:nvPr/>
-        </p:nvSpPr>
-        <p:spPr>
-          <a:xfrm>
-            <a:off x="7812000" y="1080000"/>
-            <a:ext cx="4273199" cy="5220000"/>
-          </a:xfrm>
-          <a:prstGeom prst="roundRect">
-            <a:avLst>
-              <a:gd name="adj" fmla="val 15000"/>
-            </a:avLst>
-          </a:prstGeom>
-          <a:solidFill>
-            <a:srgbClr val="0D1B2A">
-              <a:alpha val="80000"/>
+            <a:off x="360000" y="5940000"/>
+            <a:ext cx="11473200" cy="720000"/>
+          </a:xfrm>
+          <a:prstGeom prst="rect">
+            <a:avLst/>
+          </a:prstGeom>
+          <a:solidFill>
+            <a:srgbClr val="0a1628">
+              <a:alpha val="90000"/>
             </a:srgbClr>
-          </a:solidFill>
-          <a:ln>
-            <a:noFill/>
-          </a:ln>
-        </p:spPr>
-        <p:txBody>
-          <a:bodyPr/>
-          <a:lstStyle/>
-          <a:p/>
-        </p:txBody>
-      </p:sp>
-      <p:sp>
-        <p:nvSpPr>
-          <p:cNvPr id="2" name="r"/>
-          <p:cNvSpPr>
-            <a:spLocks noGrp="1"/>
-          </p:cNvSpPr>
-          <p:nvPr/>
-        </p:nvSpPr>
-        <p:spPr>
-          <a:xfrm>
-            <a:off x="7812000" y="1080000"/>
-            <a:ext cx="43200" cy="5220000"/>
-          </a:xfrm>
-          <a:prstGeom prst="rect">
-            <a:avLst/>
-          </a:prstGeom>
-          <a:solidFill>
-            <a:srgbClr val="00C6FF"/>
           </a:solidFill>
           <a:ln>
             <a:noFill/>
@@ -3074,8 +3201,8 @@
         </p:nvSpPr>
         <p:spPr>
           <a:xfrm>
-            <a:off x="7902000" y="1188000"/>
-            <a:ext cx="4093199" cy="5004000"/>
+            <a:off x="540000" y="5940000"/>
+            <a:ext cx="11160000" cy="720000"/>
           </a:xfrm>
           <a:prstGeom prst="rect">
             <a:avLst/>
@@ -3088,7 +3215,7 @@
           <a:p>
             <a:pPr>
               <a:spcBef>
-                <a:spcPts val="120"/>
+                <a:spcPts val="30"/>
               </a:spcBef>
             </a:pPr>
             <a:r>
@@ -3098,7 +3225,7 @@
                 </a:solidFill>
                 <a:latin typeface="Calibri"/>
               </a:rPr>
-              <a:t> ▸ </a:t>
+              <a:t>  ▸  </a:t>
             </a:r>
             <a:r>
               <a:rPr lang="uz-UZ" altLang="en-US" sz="1100" dirty="0">
@@ -3107,13 +3234,13 @@
                 </a:solidFill>
                 <a:latin typeface="Calibri"/>
               </a:rPr>
-              <a:t>React → Express.js → Git/AI yadrolari</a:t>
-            </a:r>
-          </a:p>
-          <a:p>
-            <a:pPr>
-              <a:spcBef>
-                <a:spcPts val="120"/>
+              <a:t>React Frontend → Axios so'rov → Express Router → Controller → Git/AI yadrolar → JSON Response</a:t>
+            </a:r>
+          </a:p>
+          <a:p>
+            <a:pPr>
+              <a:spcBef>
+                <a:spcPts val="30"/>
               </a:spcBef>
             </a:pPr>
             <a:r>
@@ -3123,7 +3250,7 @@
                 </a:solidFill>
                 <a:latin typeface="Calibri"/>
               </a:rPr>
-              <a:t> ▸ </a:t>
+              <a:t>  ▸  </a:t>
             </a:r>
             <a:r>
               <a:rPr lang="uz-UZ" altLang="en-US" sz="1100" dirty="0">
@@ -3132,82 +3259,7 @@
                 </a:solidFill>
                 <a:latin typeface="Calibri"/>
               </a:rPr>
-              <a:t>Parallel asinxron qayta ishlash</a:t>
-            </a:r>
-          </a:p>
-          <a:p>
-            <a:pPr>
-              <a:spcBef>
-                <a:spcPts val="120"/>
-              </a:spcBef>
-            </a:pPr>
-            <a:r>
-              <a:rPr lang="uz-UZ" altLang="en-US" sz="1100" dirty="0">
-                <a:solidFill>
-                  <a:srgbClr val="00C6FF"/>
-                </a:solidFill>
-                <a:latin typeface="Calibri"/>
-              </a:rPr>
-              <a:t> ▸ </a:t>
-            </a:r>
-            <a:r>
-              <a:rPr lang="uz-UZ" altLang="en-US" sz="1100" dirty="0">
-                <a:solidFill>
-                  <a:srgbClr val="B0C4DE"/>
-                </a:solidFill>
-                <a:latin typeface="Calibri"/>
-              </a:rPr>
-              <a:t>JSON Response → React State</a:t>
-            </a:r>
-          </a:p>
-          <a:p>
-            <a:pPr>
-              <a:spcBef>
-                <a:spcPts val="120"/>
-              </a:spcBef>
-            </a:pPr>
-            <a:r>
-              <a:rPr lang="uz-UZ" altLang="en-US" sz="1100" dirty="0">
-                <a:solidFill>
-                  <a:srgbClr val="00C6FF"/>
-                </a:solidFill>
-                <a:latin typeface="Calibri"/>
-              </a:rPr>
-              <a:t> ▸ </a:t>
-            </a:r>
-            <a:r>
-              <a:rPr lang="uz-UZ" altLang="en-US" sz="1100" dirty="0">
-                <a:solidFill>
-                  <a:srgbClr val="B0C4DE"/>
-                </a:solidFill>
-                <a:latin typeface="Calibri"/>
-              </a:rPr>
-              <a:t>SPA: sahifa qayta yuklanmaydi</a:t>
-            </a:r>
-          </a:p>
-          <a:p>
-            <a:pPr>
-              <a:spcBef>
-                <a:spcPts val="120"/>
-              </a:spcBef>
-            </a:pPr>
-            <a:r>
-              <a:rPr lang="uz-UZ" altLang="en-US" sz="1100" dirty="0">
-                <a:solidFill>
-                  <a:srgbClr val="00C6FF"/>
-                </a:solidFill>
-                <a:latin typeface="Calibri"/>
-              </a:rPr>
-              <a:t> ▸ </a:t>
-            </a:r>
-            <a:r>
-              <a:rPr lang="uz-UZ" altLang="en-US" sz="1100" dirty="0">
-                <a:solidFill>
-                  <a:srgbClr val="B0C4DE"/>
-                </a:solidFill>
-                <a:latin typeface="Calibri"/>
-              </a:rPr>
-              <a:t>Global xatolik boshqaruvi</a:t>
+              <a:t>Parallel asinxron qayta ishlash  |  Har qatlam mustaqil  |  SPA: brauzer qayta yuklanmaydi</a:t>
             </a:r>
           </a:p>
         </p:txBody>
@@ -3221,7 +3273,7 @@
 </file>
 
 <file path=ppt/slides/slide15.xml><?xml version="1.0" encoding="utf-8"?>
-<p:sld xmlns:p="http://schemas.openxmlformats.org/presentationml/2006/main" xmlns:a="http://schemas.openxmlformats.org/drawingml/2006/main" xmlns:r="http://schemas.openxmlformats.org/officeDocument/2006/relationships" xmlns:xdr="http://schemas.openxmlformats.org/drawingml/2006/spreadsheetDrawing">
+<p:sld xmlns:p="http://schemas.openxmlformats.org/presentationml/2006/main" xmlns:a="http://schemas.openxmlformats.org/drawingml/2006/main" xmlns:r="http://schemas.openxmlformats.org/officeDocument/2006/relationships">
   <p:cSld>
     <p:spTree>
       <p:nvGrpSpPr>
@@ -3283,7 +3335,7 @@
             <a:avLst/>
           </a:prstGeom>
           <a:solidFill>
-            <a:srgbClr val="0D1B2A"/>
+            <a:srgbClr val="0a1628"/>
           </a:solidFill>
           <a:ln>
             <a:noFill/>
@@ -3381,7 +3433,7 @@
                 </a:solidFill>
                 <a:latin typeface="Calibri"/>
               </a:rPr>
-              <a:t>Diff Tahlil Oynasi — Kod Vizualizatsiyasi</a:t>
+              <a:t>Diff Viewer — Kod O'zgarishlarini Vizualizatsiya</a:t>
             </a:r>
           </a:p>
         </p:txBody>
@@ -3433,8 +3485,8 @@
         </p:blipFill>
         <p:spPr>
           <a:xfrm>
-            <a:off x="288000" y="1080000"/>
-            <a:ext cx="7380000" cy="5220000"/>
+            <a:off x="180000" y="1044000"/>
+            <a:ext cx="7920000" cy="5220000"/>
           </a:xfrm>
           <a:prstGeom prst="rect">
             <a:avLst/>
@@ -3451,8 +3503,8 @@
         </p:nvSpPr>
         <p:spPr>
           <a:xfrm>
-            <a:off x="266400" y="1058400"/>
-            <a:ext cx="7423200" cy="21600"/>
+            <a:off x="158400" y="1022400"/>
+            <a:ext cx="7963200" cy="21600"/>
           </a:xfrm>
           <a:prstGeom prst="rect">
             <a:avLst/>
@@ -3480,8 +3532,8 @@
         </p:nvSpPr>
         <p:spPr>
           <a:xfrm>
-            <a:off x="266400" y="6300000"/>
-            <a:ext cx="7423200" cy="21600"/>
+            <a:off x="158400" y="6263999"/>
+            <a:ext cx="7963200" cy="21600"/>
           </a:xfrm>
           <a:prstGeom prst="rect">
             <a:avLst/>
@@ -3509,7 +3561,7 @@
         </p:nvSpPr>
         <p:spPr>
           <a:xfrm>
-            <a:off x="266400" y="1058400"/>
+            <a:off x="158400" y="1022400"/>
             <a:ext cx="21600" cy="5263200"/>
           </a:xfrm>
           <a:prstGeom prst="rect">
@@ -3538,7 +3590,7 @@
         </p:nvSpPr>
         <p:spPr>
           <a:xfrm>
-            <a:off x="7668000" y="1058400"/>
+            <a:off x="8100000" y="1022400"/>
             <a:ext cx="21600" cy="5263200"/>
           </a:xfrm>
           <a:prstGeom prst="rect">
@@ -3567,17 +3619,15 @@
         </p:nvSpPr>
         <p:spPr>
           <a:xfrm>
-            <a:off x="7812000" y="1080000"/>
-            <a:ext cx="4273199" cy="5220000"/>
-          </a:xfrm>
-          <a:prstGeom prst="roundRect">
-            <a:avLst>
-              <a:gd name="adj" fmla="val 15000"/>
-            </a:avLst>
-          </a:prstGeom>
-          <a:solidFill>
-            <a:srgbClr val="0D1B2A">
-              <a:alpha val="80000"/>
+            <a:off x="8352000" y="1044000"/>
+            <a:ext cx="3708000" cy="5220000"/>
+          </a:xfrm>
+          <a:prstGeom prst="rect">
+            <a:avLst/>
+          </a:prstGeom>
+          <a:solidFill>
+            <a:srgbClr val="0a1628">
+              <a:alpha val="90000"/>
             </a:srgbClr>
           </a:solidFill>
           <a:ln>
@@ -3600,8 +3650,8 @@
         </p:nvSpPr>
         <p:spPr>
           <a:xfrm>
-            <a:off x="7812000" y="1080000"/>
-            <a:ext cx="43200" cy="5220000"/>
+            <a:off x="8352000" y="1044000"/>
+            <a:ext cx="36000" cy="5220000"/>
           </a:xfrm>
           <a:prstGeom prst="rect">
             <a:avLst/>
@@ -3627,8 +3677,8 @@
         </p:nvSpPr>
         <p:spPr>
           <a:xfrm>
-            <a:off x="7902000" y="1188000"/>
-            <a:ext cx="4093199" cy="5004000"/>
+            <a:off x="8460000" y="1152000"/>
+            <a:ext cx="3528000" cy="4968000"/>
           </a:xfrm>
           <a:prstGeom prst="rect">
             <a:avLst/>
@@ -3641,151 +3691,257 @@
           <a:p>
             <a:pPr>
               <a:spcBef>
-                <a:spcPts val="120"/>
-              </a:spcBef>
-            </a:pPr>
-            <a:r>
-              <a:rPr lang="uz-UZ" altLang="en-US" sz="1100" dirty="0">
+                <a:spcPts val="100"/>
+              </a:spcBef>
+            </a:pPr>
+            <a:r>
+              <a:rPr lang="uz-UZ" altLang="en-US" sz="1200" dirty="0">
                 <a:solidFill>
                   <a:srgbClr val="00C6FF"/>
                 </a:solidFill>
                 <a:latin typeface="Calibri"/>
               </a:rPr>
-              <a:t> ▸ </a:t>
-            </a:r>
-            <a:r>
-              <a:rPr lang="uz-UZ" altLang="en-US" sz="1100" dirty="0">
-                <a:solidFill>
-                  <a:srgbClr val="B0C4DE"/>
-                </a:solidFill>
-                <a:latin typeface="Calibri"/>
-              </a:rPr>
-              <a:t>Commit ichidagi fayl o'zgarishlari</a:t>
-            </a:r>
-          </a:p>
-          <a:p>
-            <a:pPr>
-              <a:spcBef>
-                <a:spcPts val="120"/>
-              </a:spcBef>
-            </a:pPr>
-            <a:r>
-              <a:rPr lang="uz-UZ" altLang="en-US" sz="1100" dirty="0">
+              <a:t> ▸ Commit tanlanganda</a:t>
+            </a:r>
+          </a:p>
+          <a:p>
+            <a:pPr>
+              <a:spcBef>
+                <a:spcPts val="100"/>
+              </a:spcBef>
+            </a:pPr>
+            <a:r>
+              <a:rPr lang="uz-UZ" altLang="en-US" sz="1200" dirty="0">
+                <a:solidFill>
+                  <a:srgbClr val="B0C4DE"/>
+                </a:solidFill>
+                <a:latin typeface="Calibri"/>
+              </a:rPr>
+              <a:t>    backend bilan asinxron bog'lanish</a:t>
+            </a:r>
+          </a:p>
+          <a:p>
+            <a:pPr>
+              <a:spcBef>
+                <a:spcPts val="40"/>
+              </a:spcBef>
+            </a:pPr>
+            <a:r>
+              <a:rPr lang="uz-UZ" altLang="en-US" sz="1400" dirty="0">
+                <a:solidFill>
+                  <a:srgbClr val="FFFFFF"/>
+                </a:solidFill>
+                <a:latin typeface="Calibri"/>
+              </a:rPr>
+              <a:t/>
+            </a:r>
+          </a:p>
+          <a:p>
+            <a:pPr>
+              <a:spcBef>
+                <a:spcPts val="100"/>
+              </a:spcBef>
+            </a:pPr>
+            <a:r>
+              <a:rPr lang="uz-UZ" altLang="en-US" sz="1200" dirty="0">
                 <a:solidFill>
                   <a:srgbClr val="00C6FF"/>
                 </a:solidFill>
                 <a:latin typeface="Calibri"/>
               </a:rPr>
-              <a:t> ▸ </a:t>
-            </a:r>
-            <a:r>
-              <a:rPr lang="uz-UZ" altLang="en-US" sz="1100" dirty="0">
-                <a:solidFill>
-                  <a:srgbClr val="B0C4DE"/>
-                </a:solidFill>
-                <a:latin typeface="Calibri"/>
-              </a:rPr>
-              <a:t>Yashil satir: qo'shilgan (+)</a:t>
-            </a:r>
-          </a:p>
-          <a:p>
-            <a:pPr>
-              <a:spcBef>
-                <a:spcPts val="120"/>
-              </a:spcBef>
-            </a:pPr>
-            <a:r>
-              <a:rPr lang="uz-UZ" altLang="en-US" sz="1100" dirty="0">
+              <a:t> ▸ YASHIL satir (+):</a:t>
+            </a:r>
+          </a:p>
+          <a:p>
+            <a:pPr>
+              <a:spcBef>
+                <a:spcPts val="100"/>
+              </a:spcBef>
+            </a:pPr>
+            <a:r>
+              <a:rPr lang="uz-UZ" altLang="en-US" sz="1200" dirty="0">
+                <a:solidFill>
+                  <a:srgbClr val="B0C4DE"/>
+                </a:solidFill>
+                <a:latin typeface="Calibri"/>
+              </a:rPr>
+              <a:t>    qo'shilgan kod qatorlari</a:t>
+            </a:r>
+          </a:p>
+          <a:p>
+            <a:pPr>
+              <a:spcBef>
+                <a:spcPts val="40"/>
+              </a:spcBef>
+            </a:pPr>
+            <a:r>
+              <a:rPr lang="uz-UZ" altLang="en-US" sz="1400" dirty="0">
+                <a:solidFill>
+                  <a:srgbClr val="FFFFFF"/>
+                </a:solidFill>
+                <a:latin typeface="Calibri"/>
+              </a:rPr>
+              <a:t/>
+            </a:r>
+          </a:p>
+          <a:p>
+            <a:pPr>
+              <a:spcBef>
+                <a:spcPts val="100"/>
+              </a:spcBef>
+            </a:pPr>
+            <a:r>
+              <a:rPr lang="uz-UZ" altLang="en-US" sz="1200" dirty="0">
                 <a:solidFill>
                   <a:srgbClr val="00C6FF"/>
                 </a:solidFill>
                 <a:latin typeface="Calibri"/>
               </a:rPr>
-              <a:t> ▸ </a:t>
-            </a:r>
-            <a:r>
-              <a:rPr lang="uz-UZ" altLang="en-US" sz="1100" dirty="0">
-                <a:solidFill>
-                  <a:srgbClr val="B0C4DE"/>
-                </a:solidFill>
-                <a:latin typeface="Calibri"/>
-              </a:rPr>
-              <a:t>Qizil satir: o'chirilgan (-)</a:t>
-            </a:r>
-          </a:p>
-          <a:p>
-            <a:pPr>
-              <a:spcBef>
-                <a:spcPts val="120"/>
-              </a:spcBef>
-            </a:pPr>
-            <a:r>
-              <a:rPr lang="uz-UZ" altLang="en-US" sz="1100" dirty="0">
+              <a:t> ▸ QIZIL satir (-):</a:t>
+            </a:r>
+          </a:p>
+          <a:p>
+            <a:pPr>
+              <a:spcBef>
+                <a:spcPts val="100"/>
+              </a:spcBef>
+            </a:pPr>
+            <a:r>
+              <a:rPr lang="uz-UZ" altLang="en-US" sz="1200" dirty="0">
+                <a:solidFill>
+                  <a:srgbClr val="B0C4DE"/>
+                </a:solidFill>
+                <a:latin typeface="Calibri"/>
+              </a:rPr>
+              <a:t>    o'chirilgan kod qatorlari</a:t>
+            </a:r>
+          </a:p>
+          <a:p>
+            <a:pPr>
+              <a:spcBef>
+                <a:spcPts val="40"/>
+              </a:spcBef>
+            </a:pPr>
+            <a:r>
+              <a:rPr lang="uz-UZ" altLang="en-US" sz="1400" dirty="0">
+                <a:solidFill>
+                  <a:srgbClr val="FFFFFF"/>
+                </a:solidFill>
+                <a:latin typeface="Calibri"/>
+              </a:rPr>
+              <a:t/>
+            </a:r>
+          </a:p>
+          <a:p>
+            <a:pPr>
+              <a:spcBef>
+                <a:spcPts val="100"/>
+              </a:spcBef>
+            </a:pPr>
+            <a:r>
+              <a:rPr lang="uz-UZ" altLang="en-US" sz="1200" dirty="0">
                 <a:solidFill>
                   <a:srgbClr val="00C6FF"/>
                 </a:solidFill>
                 <a:latin typeface="Calibri"/>
               </a:rPr>
-              <a:t> ▸ </a:t>
-            </a:r>
-            <a:r>
-              <a:rPr lang="uz-UZ" altLang="en-US" sz="1100" dirty="0">
-                <a:solidFill>
-                  <a:srgbClr val="B0C4DE"/>
-                </a:solidFill>
-                <a:latin typeface="Calibri"/>
-              </a:rPr>
-              <a:t>Chap panel: fayllar ro'yxati</a:t>
-            </a:r>
-          </a:p>
-          <a:p>
-            <a:pPr>
-              <a:spcBef>
-                <a:spcPts val="120"/>
-              </a:spcBef>
-            </a:pPr>
-            <a:r>
-              <a:rPr lang="uz-UZ" altLang="en-US" sz="1100" dirty="0">
+              <a:t> ▸ Chap panel:</a:t>
+            </a:r>
+          </a:p>
+          <a:p>
+            <a:pPr>
+              <a:spcBef>
+                <a:spcPts val="100"/>
+              </a:spcBef>
+            </a:pPr>
+            <a:r>
+              <a:rPr lang="uz-UZ" altLang="en-US" sz="1200" dirty="0">
+                <a:solidFill>
+                  <a:srgbClr val="B0C4DE"/>
+                </a:solidFill>
+                <a:latin typeface="Calibri"/>
+              </a:rPr>
+              <a:t>    o'zgargan fayllar ro'yxati</a:t>
+            </a:r>
+          </a:p>
+          <a:p>
+            <a:pPr>
+              <a:spcBef>
+                <a:spcPts val="40"/>
+              </a:spcBef>
+            </a:pPr>
+            <a:r>
+              <a:rPr lang="uz-UZ" altLang="en-US" sz="1400" dirty="0">
+                <a:solidFill>
+                  <a:srgbClr val="FFFFFF"/>
+                </a:solidFill>
+                <a:latin typeface="Calibri"/>
+              </a:rPr>
+              <a:t/>
+            </a:r>
+          </a:p>
+          <a:p>
+            <a:pPr>
+              <a:spcBef>
+                <a:spcPts val="100"/>
+              </a:spcBef>
+            </a:pPr>
+            <a:r>
+              <a:rPr lang="uz-UZ" altLang="en-US" sz="1200" dirty="0">
                 <a:solidFill>
                   <a:srgbClr val="00C6FF"/>
                 </a:solidFill>
                 <a:latin typeface="Calibri"/>
               </a:rPr>
-              <a:t> ▸ </a:t>
-            </a:r>
-            <a:r>
-              <a:rPr lang="uz-UZ" altLang="en-US" sz="1100" dirty="0">
-                <a:solidFill>
-                  <a:srgbClr val="B0C4DE"/>
-                </a:solidFill>
-                <a:latin typeface="Calibri"/>
-              </a:rPr>
-              <a:t>O'ng: diff viewer oynasi</a:t>
-            </a:r>
-          </a:p>
-          <a:p>
-            <a:pPr>
-              <a:spcBef>
-                <a:spcPts val="120"/>
-              </a:spcBef>
-            </a:pPr>
-            <a:r>
-              <a:rPr lang="uz-UZ" altLang="en-US" sz="1100" dirty="0">
+              <a:t> ▸ O'ng panel: diff viewer</a:t>
+            </a:r>
+          </a:p>
+          <a:p>
+            <a:pPr>
+              <a:spcBef>
+                <a:spcPts val="40"/>
+              </a:spcBef>
+            </a:pPr>
+            <a:r>
+              <a:rPr lang="uz-UZ" altLang="en-US" sz="1400" dirty="0">
+                <a:solidFill>
+                  <a:srgbClr val="FFFFFF"/>
+                </a:solidFill>
+                <a:latin typeface="Calibri"/>
+              </a:rPr>
+              <a:t/>
+            </a:r>
+          </a:p>
+          <a:p>
+            <a:pPr>
+              <a:spcBef>
+                <a:spcPts val="100"/>
+              </a:spcBef>
+            </a:pPr>
+            <a:r>
+              <a:rPr lang="uz-UZ" altLang="en-US" sz="1200" dirty="0">
                 <a:solidFill>
                   <a:srgbClr val="00C6FF"/>
                 </a:solidFill>
                 <a:latin typeface="Calibri"/>
               </a:rPr>
-              <a:t> ▸ </a:t>
-            </a:r>
-            <a:r>
-              <a:rPr lang="uz-UZ" altLang="en-US" sz="1100" dirty="0">
-                <a:solidFill>
-                  <a:srgbClr val="B0C4DE"/>
-                </a:solidFill>
-                <a:latin typeface="Calibri"/>
-              </a:rPr>
-              <a:t>'AI izohi' tugmasi — Gemini tahlili</a:t>
+              <a:t> ▸ 'AI izohi' tugmasi →</a:t>
+            </a:r>
+          </a:p>
+          <a:p>
+            <a:pPr>
+              <a:spcBef>
+                <a:spcPts val="100"/>
+              </a:spcBef>
+            </a:pPr>
+            <a:r>
+              <a:rPr lang="uz-UZ" altLang="en-US" sz="1200" dirty="0">
+                <a:solidFill>
+                  <a:srgbClr val="B0C4DE"/>
+                </a:solidFill>
+                <a:latin typeface="Calibri"/>
+              </a:rPr>
+              <a:t>    Gemini tahlilini boshlash</a:t>
             </a:r>
           </a:p>
         </p:txBody>
@@ -3799,7 +3955,7 @@
 </file>
 
 <file path=ppt/slides/slide16.xml><?xml version="1.0" encoding="utf-8"?>
-<p:sld xmlns:p="http://schemas.openxmlformats.org/presentationml/2006/main" xmlns:a="http://schemas.openxmlformats.org/drawingml/2006/main" xmlns:r="http://schemas.openxmlformats.org/officeDocument/2006/relationships" xmlns:xdr="http://schemas.openxmlformats.org/drawingml/2006/spreadsheetDrawing">
+<p:sld xmlns:p="http://schemas.openxmlformats.org/presentationml/2006/main" xmlns:a="http://schemas.openxmlformats.org/drawingml/2006/main" xmlns:r="http://schemas.openxmlformats.org/officeDocument/2006/relationships">
   <p:cSld>
     <p:spTree>
       <p:nvGrpSpPr>
@@ -3861,7 +4017,7 @@
             <a:avLst/>
           </a:prstGeom>
           <a:solidFill>
-            <a:srgbClr val="0D1B2A"/>
+            <a:srgbClr val="0a1628"/>
           </a:solidFill>
           <a:ln>
             <a:noFill/>
@@ -3959,7 +4115,7 @@
                 </a:solidFill>
                 <a:latin typeface="Calibri"/>
               </a:rPr>
-              <a:t>Frontend-Backend Integratsiyasi</a:t>
+              <a:t>Frontend-Backend Integratsiyasi — RESTful Arxitektura</a:t>
             </a:r>
           </a:p>
         </p:txBody>
@@ -4029,23 +4185,23 @@
                 </a:solidFill>
                 <a:latin typeface="Calibri"/>
               </a:rPr>
-              <a:t>    ▸ RESTful API arxitekturasi — HTTP/JSON protokoli</a:t>
-            </a:r>
-          </a:p>
-          <a:p>
-            <a:pPr>
-              <a:spcBef>
-                <a:spcPts val="40"/>
-              </a:spcBef>
-            </a:pPr>
-            <a:r>
-              <a:rPr lang="uz-UZ" altLang="en-US" sz="1200" dirty="0">
-                <a:solidFill>
-                  <a:srgbClr val="B0C4DE"/>
-                </a:solidFill>
-                <a:latin typeface="Calibri"/>
-              </a:rPr>
-              <a:t>   React → Axios asinxron so'rov → Express.js backend</a:t>
+              <a:t>▸ RESTful API arxitekturasi — HTTP/JSON protokoli</a:t>
+            </a:r>
+          </a:p>
+          <a:p>
+            <a:pPr>
+              <a:spcBef>
+                <a:spcPts val="40"/>
+              </a:spcBef>
+            </a:pPr>
+            <a:r>
+              <a:rPr lang="uz-UZ" altLang="en-US" sz="1200" dirty="0">
+                <a:solidFill>
+                  <a:srgbClr val="B0C4DE"/>
+                </a:solidFill>
+                <a:latin typeface="Calibri"/>
+              </a:rPr>
+              <a:t>   React → Axios asinxron so'rov → Express.js backend → JSON javob</a:t>
             </a:r>
           </a:p>
           <a:p>
@@ -4077,7 +4233,7 @@
                 </a:solidFill>
                 <a:latin typeface="Calibri"/>
               </a:rPr>
-              <a:t>    ▸ CORS xavfsizlik sozlamasi:</a:t>
+              <a:t>▸ CORS xavfsizlik sozlamasi:</a:t>
             </a:r>
           </a:p>
           <a:p>
@@ -4109,7 +4265,7 @@
                 </a:solidFill>
                 <a:latin typeface="Calibri"/>
               </a:rPr>
-              <a:t>   Kross-sayt so'rov qalbakishtirish (CSRF) oldini olish</a:t>
+              <a:t>   CSRF hujumlarining oldini olish — birinchi himoya qatlami</a:t>
             </a:r>
           </a:p>
           <a:p>
@@ -4141,23 +4297,23 @@
                 </a:solidFill>
                 <a:latin typeface="Calibri"/>
               </a:rPr>
-              <a:t>    ▸ 3 qatlamli axborot oqimi:</a:t>
-            </a:r>
-          </a:p>
-          <a:p>
-            <a:pPr>
-              <a:spcBef>
-                <a:spcPts val="40"/>
-              </a:spcBef>
-            </a:pPr>
-            <a:r>
-              <a:rPr lang="uz-UZ" altLang="en-US" sz="1200" dirty="0">
-                <a:solidFill>
-                  <a:srgbClr val="B0C4DE"/>
-                </a:solidFill>
-                <a:latin typeface="Calibri"/>
-              </a:rPr>
-              <a:t>   1) React: so'rov yuborish + yuklanish animatsiyasi</a:t>
+              <a:t>▸ 3 qatlamli axborot oqimi:</a:t>
+            </a:r>
+          </a:p>
+          <a:p>
+            <a:pPr>
+              <a:spcBef>
+                <a:spcPts val="40"/>
+              </a:spcBef>
+            </a:pPr>
+            <a:r>
+              <a:rPr lang="uz-UZ" altLang="en-US" sz="1200" dirty="0">
+                <a:solidFill>
+                  <a:srgbClr val="B0C4DE"/>
+                </a:solidFill>
+                <a:latin typeface="Calibri"/>
+              </a:rPr>
+              <a:t>   1) React: so'rov + yuklanish animatsiyasi</a:t>
             </a:r>
           </a:p>
           <a:p>
@@ -4189,7 +4345,7 @@
                 </a:solidFill>
                 <a:latin typeface="Calibri"/>
               </a:rPr>
-              <a:t>   3) JSON javob → React state yangilanish → DOM qayta chizish</a:t>
+              <a:t>   3) JSON javob → React state → DOM qayta chizish</a:t>
             </a:r>
           </a:p>
           <a:p>
@@ -4221,7 +4377,7 @@
                 </a:solidFill>
                 <a:latin typeface="Calibri"/>
               </a:rPr>
-              <a:t>    ▸ Global holat boshqaruvi (State Management):</a:t>
+              <a:t>▸ Global holat boshqaruvi (State Management):</a:t>
             </a:r>
           </a:p>
           <a:p>
@@ -4269,23 +4425,23 @@
                 </a:solidFill>
                 <a:latin typeface="Calibri"/>
               </a:rPr>
-              <a:t>    ✅ Kesh mexanizmi: klonlangan repolar lokal diskda saqlanadi</a:t>
-            </a:r>
-          </a:p>
-          <a:p>
-            <a:pPr>
-              <a:spcBef>
-                <a:spcPts val="40"/>
-              </a:spcBef>
-            </a:pPr>
-            <a:r>
-              <a:rPr lang="uz-UZ" altLang="en-US" sz="1200" dirty="0">
-                <a:solidFill>
-                  <a:srgbClr val="B0C4DE"/>
-                </a:solidFill>
-                <a:latin typeface="Calibri"/>
-              </a:rPr>
-              <a:t>   Qayta so'rovda internet sarflanmaydi — tezlik oshadi</a:t>
+              <a:t>✅ Kesh mexanizmi: klonlangan repolar lokal — qayta so'rovda internet yo'q</a:t>
+            </a:r>
+          </a:p>
+          <a:p>
+            <a:pPr>
+              <a:spcBef>
+                <a:spcPts val="40"/>
+              </a:spcBef>
+            </a:pPr>
+            <a:r>
+              <a:rPr lang="uz-UZ" altLang="en-US" sz="1300" b="1" dirty="0">
+                <a:solidFill>
+                  <a:srgbClr val="00E676"/>
+                </a:solidFill>
+                <a:latin typeface="Calibri"/>
+              </a:rPr>
+              <a:t>📌 API kalitlar: dotenv — GitHub'ga tasodifan tushib qolmaslik kafolati</a:t>
             </a:r>
           </a:p>
         </p:txBody>
@@ -4299,7 +4455,7 @@
 </file>
 
 <file path=ppt/slides/slide17.xml><?xml version="1.0" encoding="utf-8"?>
-<p:sld xmlns:p="http://schemas.openxmlformats.org/presentationml/2006/main" xmlns:a="http://schemas.openxmlformats.org/drawingml/2006/main" xmlns:r="http://schemas.openxmlformats.org/officeDocument/2006/relationships" xmlns:xdr="http://schemas.openxmlformats.org/drawingml/2006/spreadsheetDrawing">
+<p:sld xmlns:p="http://schemas.openxmlformats.org/presentationml/2006/main" xmlns:a="http://schemas.openxmlformats.org/drawingml/2006/main" xmlns:r="http://schemas.openxmlformats.org/officeDocument/2006/relationships">
   <p:cSld>
     <p:spTree>
       <p:nvGrpSpPr>
@@ -4413,15 +4569,15 @@
         <p:spPr>
           <a:xfrm>
             <a:off x="540000" y="1260000"/>
-            <a:ext cx="1800000" cy="1800000"/>
-          </a:xfrm>
-          <a:prstGeom prst="roundRect">
-            <a:avLst>
-              <a:gd name="adj" fmla="val 20000"/>
-            </a:avLst>
-          </a:prstGeom>
-          <a:solidFill>
-            <a:srgbClr val="0F2547"/>
+            <a:ext cx="1800000" cy="1980000"/>
+          </a:xfrm>
+          <a:prstGeom prst="rect">
+            <a:avLst/>
+          </a:prstGeom>
+          <a:solidFill>
+            <a:srgbClr val="0F2547">
+              <a:alpha val="80000"/>
+            </a:srgbClr>
           </a:solidFill>
           <a:ln>
             <a:noFill/>
@@ -4442,7 +4598,7 @@
         <p:spPr>
           <a:xfrm>
             <a:off x="540000" y="1260000"/>
-            <a:ext cx="1800000" cy="1800000"/>
+            <a:ext cx="1800000" cy="1980000"/>
           </a:xfrm>
           <a:prstGeom prst="rect">
             <a:avLst/>
@@ -4455,7 +4611,7 @@
           <a:p>
             <a:pPr algn="ctr"/>
             <a:r>
-              <a:rPr lang="uz-UZ" altLang="en-US" sz="6000" b="1" dirty="0">
+              <a:rPr lang="uz-UZ" altLang="en-US" sz="5800" b="1" dirty="0">
                 <a:solidFill>
                   <a:srgbClr val="00C6FF"/>
                 </a:solidFill>
@@ -4477,12 +4633,10 @@
         <p:spPr>
           <a:xfrm>
             <a:off x="2520000" y="1440000"/>
-            <a:ext cx="8640000" cy="1440000"/>
-          </a:xfrm>
-          <a:prstGeom prst="roundRect">
-            <a:avLst>
-              <a:gd name="adj" fmla="val 15000"/>
-            </a:avLst>
+            <a:ext cx="8640000" cy="1620000"/>
+          </a:xfrm>
+          <a:prstGeom prst="rect">
+            <a:avLst/>
           </a:prstGeom>
           <a:solidFill>
             <a:srgbClr val="0F2547">
@@ -4510,7 +4664,7 @@
         <p:spPr>
           <a:xfrm>
             <a:off x="2520000" y="1440000"/>
-            <a:ext cx="8640000" cy="28800"/>
+            <a:ext cx="8640000" cy="36000"/>
           </a:xfrm>
           <a:prstGeom prst="rect">
             <a:avLst/>
@@ -4536,8 +4690,8 @@
         </p:nvSpPr>
         <p:spPr>
           <a:xfrm>
-            <a:off x="2628000" y="1584000"/>
-            <a:ext cx="8424000" cy="1152000"/>
+            <a:off x="2628000" y="1620000"/>
+            <a:ext cx="8424000" cy="1260000"/>
           </a:xfrm>
           <a:prstGeom prst="rect">
             <a:avLst/>
@@ -4550,46 +4704,44 @@
           <a:p>
             <a:pPr/>
             <a:r>
-              <a:rPr lang="uz-UZ" altLang="en-US" sz="2000" b="1" dirty="0">
+              <a:rPr lang="uz-UZ" altLang="en-US" sz="2200" b="1" dirty="0">
                 <a:solidFill>
                   <a:srgbClr val="FFFFFF"/>
                 </a:solidFill>
                 <a:latin typeface="Calibri"/>
               </a:rPr>
-              <a:t>BOB:</a:t>
+              <a:t>BOB: AMALIY REALIZATSIYA</a:t>
             </a:r>
           </a:p>
           <a:p>
             <a:pPr/>
             <a:r>
-              <a:rPr lang="uz-UZ" altLang="en-US" sz="2000" b="1" dirty="0">
+              <a:rPr lang="uz-UZ" altLang="en-US" sz="2200" b="1" dirty="0">
                 <a:solidFill>
                   <a:srgbClr val="FFFFFF"/>
                 </a:solidFill>
                 <a:latin typeface="Calibri"/>
               </a:rPr>
-              <a:t>AMALIY REALIZATSIYA</a:t>
-            </a:r>
-          </a:p>
-        </p:txBody>
-      </p:sp>
-      <p:sp>
-        <p:nvSpPr>
-          <p:cNvPr id="2" name="r"/>
-          <p:cNvSpPr>
-            <a:spLocks noGrp="1"/>
-          </p:cNvSpPr>
-          <p:nvPr/>
-        </p:nvSpPr>
-        <p:spPr>
-          <a:xfrm>
-            <a:off x="540000" y="3420000"/>
-            <a:ext cx="11160000" cy="3060000"/>
-          </a:xfrm>
-          <a:prstGeom prst="roundRect">
-            <a:avLst>
-              <a:gd name="adj" fmla="val 10000"/>
-            </a:avLst>
+              <a:t>VA SINOV NATIJALARI</a:t>
+            </a:r>
+          </a:p>
+        </p:txBody>
+      </p:sp>
+      <p:sp>
+        <p:nvSpPr>
+          <p:cNvPr id="2" name="r"/>
+          <p:cNvSpPr>
+            <a:spLocks noGrp="1"/>
+          </p:cNvSpPr>
+          <p:nvPr/>
+        </p:nvSpPr>
+        <p:spPr>
+          <a:xfrm>
+            <a:off x="540000" y="3600000"/>
+            <a:ext cx="11160000" cy="2880000"/>
+          </a:xfrm>
+          <a:prstGeom prst="rect">
+            <a:avLst/>
           </a:prstGeom>
           <a:solidFill>
             <a:srgbClr val="0F2547">
@@ -4614,7 +4766,7 @@
         </p:nvSpPr>
         <p:spPr>
           <a:xfrm>
-            <a:off x="720000" y="3600000"/>
+            <a:off x="720000" y="3780000"/>
             <a:ext cx="10800000" cy="2700000"/>
           </a:xfrm>
           <a:prstGeom prst="rect">
@@ -4672,7 +4824,7 @@
                 </a:solidFill>
                 <a:latin typeface="Calibri"/>
               </a:rPr>
-              <a:t>3.2 — React SPA frontend: sahifalararo ma'lumotlar zanjiri</a:t>
+              <a:t>3.2 — React SPA frontend: 5 sahifali ma'lumotlar zanjiri</a:t>
             </a:r>
           </a:p>
           <a:p>
@@ -4697,7 +4849,7 @@
                 </a:solidFill>
                 <a:latin typeface="Calibri"/>
               </a:rPr>
-              <a:t>3.3 — Real repozitoriyalarda sinov va AI hisobot natijalari tahlili</a:t>
+              <a:t>3.3 — Real repozitoriyalarda sinov va AI semantik hisobotlar tahlili</a:t>
             </a:r>
           </a:p>
         </p:txBody>
@@ -4711,7 +4863,7 @@
 </file>
 
 <file path=ppt/slides/slide18.xml><?xml version="1.0" encoding="utf-8"?>
-<p:sld xmlns:p="http://schemas.openxmlformats.org/presentationml/2006/main" xmlns:a="http://schemas.openxmlformats.org/drawingml/2006/main" xmlns:r="http://schemas.openxmlformats.org/officeDocument/2006/relationships" xmlns:xdr="http://schemas.openxmlformats.org/drawingml/2006/spreadsheetDrawing">
+<p:sld xmlns:p="http://schemas.openxmlformats.org/presentationml/2006/main" xmlns:a="http://schemas.openxmlformats.org/drawingml/2006/main" xmlns:r="http://schemas.openxmlformats.org/officeDocument/2006/relationships">
   <p:cSld>
     <p:spTree>
       <p:nvGrpSpPr>
@@ -4773,7 +4925,7 @@
             <a:avLst/>
           </a:prstGeom>
           <a:solidFill>
-            <a:srgbClr val="0D1B2A"/>
+            <a:srgbClr val="0a1628"/>
           </a:solidFill>
           <a:ln>
             <a:noFill/>
@@ -4941,23 +5093,23 @@
                 </a:solidFill>
                 <a:latin typeface="Calibri"/>
               </a:rPr>
-              <a:t>    ▸ Node.js — asinxron non-blocking I/O muhiti</a:t>
-            </a:r>
-          </a:p>
-          <a:p>
-            <a:pPr>
-              <a:spcBef>
-                <a:spcPts val="40"/>
-              </a:spcBef>
-            </a:pPr>
-            <a:r>
-              <a:rPr lang="uz-UZ" altLang="en-US" sz="1200" dirty="0">
-                <a:solidFill>
-                  <a:srgbClr val="B0C4DE"/>
-                </a:solidFill>
-                <a:latin typeface="Calibri"/>
-              </a:rPr>
-              <a:t>   EventLoop: server yadrosini bloklamasdan parallel so'rovlar</a:t>
+              <a:t>▸ Node.js — asinxron non-blocking I/O muhiti</a:t>
+            </a:r>
+          </a:p>
+          <a:p>
+            <a:pPr>
+              <a:spcBef>
+                <a:spcPts val="40"/>
+              </a:spcBef>
+            </a:pPr>
+            <a:r>
+              <a:rPr lang="uz-UZ" altLang="en-US" sz="1200" dirty="0">
+                <a:solidFill>
+                  <a:srgbClr val="B0C4DE"/>
+                </a:solidFill>
+                <a:latin typeface="Calibri"/>
+              </a:rPr>
+              <a:t>   EventLoop: server yadrosini bloklamasdan parallel so'rovlar qayta ishlash</a:t>
             </a:r>
           </a:p>
           <a:p>
@@ -4989,7 +5141,7 @@
                 </a:solidFill>
                 <a:latin typeface="Calibri"/>
               </a:rPr>
-              <a:t>    ▸ Express.js — Router-Controller andoza</a:t>
+              <a:t>▸ Express.js — Router-Controller andoza</a:t>
             </a:r>
           </a:p>
           <a:p>
@@ -5005,7 +5157,23 @@
                 </a:solidFill>
                 <a:latin typeface="Calibri"/>
               </a:rPr>
-              <a:t>    ▸ simple-git — Git operatsiyalari: clone, log, diff, pull</a:t>
+              <a:t>▸ simple-git — Git operatsiyalari: clone, log, diff, pull</a:t>
+            </a:r>
+          </a:p>
+          <a:p>
+            <a:pPr>
+              <a:spcBef>
+                <a:spcPts val="40"/>
+              </a:spcBef>
+            </a:pPr>
+            <a:r>
+              <a:rPr lang="uz-UZ" altLang="en-US" sz="1200" dirty="0">
+                <a:solidFill>
+                  <a:srgbClr val="B0C4DE"/>
+                </a:solidFill>
+                <a:latin typeface="Calibri"/>
+              </a:rPr>
+              <a:t>   URL sanitizatsiya → unikal klonlash jildi → diff generatsiya</a:t>
             </a:r>
           </a:p>
           <a:p>
@@ -5021,7 +5189,7 @@
                 </a:solidFill>
                 <a:latin typeface="Calibri"/>
               </a:rPr>
-              <a:t>    ▸ jsdiff — Mayers diff algoritmi, JSON parsing</a:t>
+              <a:t>▸ jsdiff — Mayers diff algoritmi, structured JSON parsing</a:t>
             </a:r>
           </a:p>
           <a:p>
@@ -5037,7 +5205,7 @@
                 </a:solidFill>
                 <a:latin typeface="Calibri"/>
               </a:rPr>
-              <a:t>    ▸ @google/generative-ai — Gemini SDK</a:t>
+              <a:t>▸ @google/generative-ai — Gemini 2.5 Flash SDK</a:t>
             </a:r>
           </a:p>
           <a:p>
@@ -5053,7 +5221,7 @@
                 </a:solidFill>
                 <a:latin typeface="Calibri"/>
               </a:rPr>
-              <a:t>    ▸ dotenv — API kalitlar muhit o'zgaruvchilari (xavfsizlik)</a:t>
+              <a:t>▸ dotenv — API kalitlar muhit o'zgaruvchilari (xavfsizlik)</a:t>
             </a:r>
           </a:p>
           <a:p>
@@ -5069,7 +5237,7 @@
                 </a:solidFill>
                 <a:latin typeface="Calibri"/>
               </a:rPr>
-              <a:t>    ▸ cors — Cross-Origin xavfsizlik protokoli</a:t>
+              <a:t>▸ cors — Cross-Origin xavfsizlik protokoli</a:t>
             </a:r>
           </a:p>
           <a:p>
@@ -5101,23 +5269,23 @@
                 </a:solidFill>
                 <a:latin typeface="Calibri"/>
               </a:rPr>
-              <a:t>    ✅ Kesh mexanizmi: Klonlangan repolar lokal saqlanadi</a:t>
-            </a:r>
-          </a:p>
-          <a:p>
-            <a:pPr>
-              <a:spcBef>
-                <a:spcPts val="40"/>
-              </a:spcBef>
-            </a:pPr>
-            <a:r>
-              <a:rPr lang="uz-UZ" altLang="en-US" sz="1200" dirty="0">
-                <a:solidFill>
-                  <a:srgbClr val="B0C4DE"/>
-                </a:solidFill>
-                <a:latin typeface="Calibri"/>
-              </a:rPr>
-              <a:t>   Qayta yuklab o'tirmasdan tezroq javob berish</a:t>
+              <a:t>✅ Klonlash optimizatsiyasi:</a:t>
+            </a:r>
+          </a:p>
+          <a:p>
+            <a:pPr>
+              <a:spcBef>
+                <a:spcPts val="40"/>
+              </a:spcBef>
+            </a:pPr>
+            <a:r>
+              <a:rPr lang="uz-UZ" altLang="en-US" sz="1200" dirty="0">
+                <a:solidFill>
+                  <a:srgbClr val="B0C4DE"/>
+                </a:solidFill>
+                <a:latin typeface="Calibri"/>
+              </a:rPr>
+              <a:t>   Agar repo lokal mavjud → qayta yuklamasdan pull bilan yangilash</a:t>
             </a:r>
           </a:p>
           <a:p>
@@ -5149,23 +5317,39 @@
                 </a:solidFill>
                 <a:latin typeface="Calibri"/>
               </a:rPr>
-              <a:t>    ✅ Xatolik boshqaruvi: try/catch + Global Middleware</a:t>
-            </a:r>
-          </a:p>
-          <a:p>
-            <a:pPr>
-              <a:spcBef>
-                <a:spcPts val="40"/>
-              </a:spcBef>
-            </a:pPr>
-            <a:r>
-              <a:rPr lang="uz-UZ" altLang="en-US" sz="1200" dirty="0">
-                <a:solidFill>
-                  <a:srgbClr val="B0C4DE"/>
-                </a:solidFill>
-                <a:latin typeface="Calibri"/>
-              </a:rPr>
-              <a:t>   HTTP 400/404/500 + O'zbek tilida xabar</a:t>
+              <a:t>✅ Xatolik boshqaruvi: try/catch + Global Middleware</a:t>
+            </a:r>
+          </a:p>
+          <a:p>
+            <a:pPr>
+              <a:spcBef>
+                <a:spcPts val="40"/>
+              </a:spcBef>
+            </a:pPr>
+            <a:r>
+              <a:rPr lang="uz-UZ" altLang="en-US" sz="1200" dirty="0">
+                <a:solidFill>
+                  <a:srgbClr val="B0C4DE"/>
+                </a:solidFill>
+                <a:latin typeface="Calibri"/>
+              </a:rPr>
+              <a:t>   HTTP 400 (noto'g'ri so'rov) | 404 (topilmadi) | 500 (server xatosi)</a:t>
+            </a:r>
+          </a:p>
+          <a:p>
+            <a:pPr>
+              <a:spcBef>
+                <a:spcPts val="40"/>
+              </a:spcBef>
+            </a:pPr>
+            <a:r>
+              <a:rPr lang="uz-UZ" altLang="en-US" sz="1300" b="1" dirty="0">
+                <a:solidFill>
+                  <a:srgbClr val="00E676"/>
+                </a:solidFill>
+                <a:latin typeface="Calibri"/>
+              </a:rPr>
+              <a:t>📌 Barcha xatoliklar o'zbek tilida foydalanuvchiga tushunarli xabar</a:t>
             </a:r>
           </a:p>
         </p:txBody>
@@ -5179,7 +5363,7 @@
 </file>
 
 <file path=ppt/slides/slide19.xml><?xml version="1.0" encoding="utf-8"?>
-<p:sld xmlns:p="http://schemas.openxmlformats.org/presentationml/2006/main" xmlns:a="http://schemas.openxmlformats.org/drawingml/2006/main" xmlns:r="http://schemas.openxmlformats.org/officeDocument/2006/relationships" xmlns:xdr="http://schemas.openxmlformats.org/drawingml/2006/spreadsheetDrawing">
+<p:sld xmlns:p="http://schemas.openxmlformats.org/presentationml/2006/main" xmlns:a="http://schemas.openxmlformats.org/drawingml/2006/main" xmlns:r="http://schemas.openxmlformats.org/officeDocument/2006/relationships">
   <p:cSld>
     <p:spTree>
       <p:nvGrpSpPr>
@@ -5241,7 +5425,7 @@
             <a:avLst/>
           </a:prstGeom>
           <a:solidFill>
-            <a:srgbClr val="0D1B2A"/>
+            <a:srgbClr val="0a1628"/>
           </a:solidFill>
           <a:ln>
             <a:noFill/>
@@ -5409,23 +5593,23 @@
                 </a:solidFill>
                 <a:latin typeface="Calibri"/>
               </a:rPr>
-              <a:t>    ▸ React 18 — komponentli SPA arxitektura</a:t>
-            </a:r>
-          </a:p>
-          <a:p>
-            <a:pPr>
-              <a:spcBef>
-                <a:spcPts val="40"/>
-              </a:spcBef>
-            </a:pPr>
-            <a:r>
-              <a:rPr lang="uz-UZ" altLang="en-US" sz="1200" dirty="0">
-                <a:solidFill>
-                  <a:srgbClr val="B0C4DE"/>
-                </a:solidFill>
-                <a:latin typeface="Calibri"/>
-              </a:rPr>
-              <a:t>   Virtual DOM: faqat o'zgargan komponent qayta chiziladi</a:t>
+              <a:t>▸ React 18 — komponentli SPA arxitektura</a:t>
+            </a:r>
+          </a:p>
+          <a:p>
+            <a:pPr>
+              <a:spcBef>
+                <a:spcPts val="40"/>
+              </a:spcBef>
+            </a:pPr>
+            <a:r>
+              <a:rPr lang="uz-UZ" altLang="en-US" sz="1200" dirty="0">
+                <a:solidFill>
+                  <a:srgbClr val="B0C4DE"/>
+                </a:solidFill>
+                <a:latin typeface="Calibri"/>
+              </a:rPr>
+              <a:t>   Virtual DOM: FAQAT o'zgargan komponent qayta chiziladi — tezlik</a:t>
             </a:r>
           </a:p>
           <a:p>
@@ -5457,23 +5641,39 @@
                 </a:solidFill>
                 <a:latin typeface="Calibri"/>
               </a:rPr>
-              <a:t>    ▸ useState + useEffect — holat boshqaruvi</a:t>
-            </a:r>
-          </a:p>
-          <a:p>
-            <a:pPr>
-              <a:spcBef>
-                <a:spcPts val="40"/>
-              </a:spcBef>
-            </a:pPr>
-            <a:r>
-              <a:rPr lang="uz-UZ" altLang="en-US" sz="1200" dirty="0">
-                <a:solidFill>
-                  <a:srgbClr val="B0C4DE"/>
-                </a:solidFill>
-                <a:latin typeface="Calibri"/>
-              </a:rPr>
-              <a:t>   App.jsx — markaziy xotira, 5 sahifaga prop drilling</a:t>
+              <a:t>▸ useState + useEffect — holat boshqaruvi</a:t>
+            </a:r>
+          </a:p>
+          <a:p>
+            <a:pPr>
+              <a:spcBef>
+                <a:spcPts val="40"/>
+              </a:spcBef>
+            </a:pPr>
+            <a:r>
+              <a:rPr lang="uz-UZ" altLang="en-US" sz="1200" dirty="0">
+                <a:solidFill>
+                  <a:srgbClr val="B0C4DE"/>
+                </a:solidFill>
+                <a:latin typeface="Calibri"/>
+              </a:rPr>
+              <a:t>   App.jsx markaziy xotira → 5 sahifaga prop drilling</a:t>
+            </a:r>
+          </a:p>
+          <a:p>
+            <a:pPr>
+              <a:spcBef>
+                <a:spcPts val="40"/>
+              </a:spcBef>
+            </a:pPr>
+            <a:r>
+              <a:rPr lang="uz-UZ" altLang="en-US" sz="1200" dirty="0">
+                <a:solidFill>
+                  <a:srgbClr val="B0C4DE"/>
+                </a:solidFill>
+                <a:latin typeface="Calibri"/>
+              </a:rPr>
+              <a:t>   history.pushState — URL yo'llari dinamik yangilanadi</a:t>
             </a:r>
           </a:p>
           <a:p>
@@ -5505,23 +5705,39 @@
                 </a:solidFill>
                 <a:latin typeface="Calibri"/>
               </a:rPr>
-              <a:t>    ▸ Axios — HTTP interceptors, asinxron so'rovlar</a:t>
-            </a:r>
-          </a:p>
-          <a:p>
-            <a:pPr>
-              <a:spcBef>
-                <a:spcPts val="40"/>
-              </a:spcBef>
-            </a:pPr>
-            <a:r>
-              <a:rPr lang="uz-UZ" altLang="en-US" sz="1200" dirty="0">
-                <a:solidFill>
-                  <a:srgbClr val="B0C4DE"/>
-                </a:solidFill>
-                <a:latin typeface="Calibri"/>
-              </a:rPr>
-              <a:t>   Global baseURL, so'rov/javob interceptorlari</a:t>
+              <a:t>▸ Axios — HTTP interceptors, asinxron so'rovlar</a:t>
+            </a:r>
+          </a:p>
+          <a:p>
+            <a:pPr>
+              <a:spcBef>
+                <a:spcPts val="40"/>
+              </a:spcBef>
+            </a:pPr>
+            <a:r>
+              <a:rPr lang="uz-UZ" altLang="en-US" sz="1200" dirty="0">
+                <a:solidFill>
+                  <a:srgbClr val="B0C4DE"/>
+                </a:solidFill>
+                <a:latin typeface="Calibri"/>
+              </a:rPr>
+              <a:t>   Global baseURL + so'rov/javob interceptorlari</a:t>
+            </a:r>
+          </a:p>
+          <a:p>
+            <a:pPr>
+              <a:spcBef>
+                <a:spcPts val="40"/>
+              </a:spcBef>
+            </a:pPr>
+            <a:r>
+              <a:rPr lang="uz-UZ" altLang="en-US" sz="1200" dirty="0">
+                <a:solidFill>
+                  <a:srgbClr val="B0C4DE"/>
+                </a:solidFill>
+                <a:latin typeface="Calibri"/>
+              </a:rPr>
+              <a:t>   Double-submit xatolarining oldini olish (loading state)</a:t>
             </a:r>
           </a:p>
           <a:p>
@@ -5553,23 +5769,23 @@
                 </a:solidFill>
                 <a:latin typeface="Calibri"/>
               </a:rPr>
-              <a:t>    ▸ ReactMarkdown — AI hisobotini render qilish</a:t>
-            </a:r>
-          </a:p>
-          <a:p>
-            <a:pPr>
-              <a:spcBef>
-                <a:spcPts val="40"/>
-              </a:spcBef>
-            </a:pPr>
-            <a:r>
-              <a:rPr lang="uz-UZ" altLang="en-US" sz="1200" dirty="0">
-                <a:solidFill>
-                  <a:srgbClr val="B0C4DE"/>
-                </a:solidFill>
-                <a:latin typeface="Calibri"/>
-              </a:rPr>
-              <a:t>   Markdown → chiroyli formatlangan tahlil matni</a:t>
+              <a:t>▸ ReactMarkdown — AI hisobotini render qilish</a:t>
+            </a:r>
+          </a:p>
+          <a:p>
+            <a:pPr>
+              <a:spcBef>
+                <a:spcPts val="40"/>
+              </a:spcBef>
+            </a:pPr>
+            <a:r>
+              <a:rPr lang="uz-UZ" altLang="en-US" sz="1200" dirty="0">
+                <a:solidFill>
+                  <a:srgbClr val="B0C4DE"/>
+                </a:solidFill>
+                <a:latin typeface="Calibri"/>
+              </a:rPr>
+              <a:t>   Markdown → chiroyli formatlangan professional tahlil</a:t>
             </a:r>
           </a:p>
           <a:p>
@@ -5601,23 +5817,7 @@
                 </a:solidFill>
                 <a:latin typeface="Calibri"/>
               </a:rPr>
-              <a:t>    ▸ CSS Dark Mode — Neon effektlar, animatsiyalar</a:t>
-            </a:r>
-          </a:p>
-          <a:p>
-            <a:pPr>
-              <a:spcBef>
-                <a:spcPts val="40"/>
-              </a:spcBef>
-            </a:pPr>
-            <a:r>
-              <a:rPr lang="uz-UZ" altLang="en-US" sz="1200" dirty="0">
-                <a:solidFill>
-                  <a:srgbClr val="B0C4DE"/>
-                </a:solidFill>
-                <a:latin typeface="Calibri"/>
-              </a:rPr>
-              <a:t>   history.pushState — URL yo'llari dinamik yangilanadi</a:t>
+              <a:t>▸ CSS Dark Mode — Neon effektlar, progress animatsiyalari</a:t>
             </a:r>
           </a:p>
           <a:p>
@@ -5649,23 +5849,23 @@
                 </a:solidFill>
                 <a:latin typeface="Calibri"/>
               </a:rPr>
-              <a:t>    📌 Loading states: spinner va progress-bar animatsiyalari</a:t>
-            </a:r>
-          </a:p>
-          <a:p>
-            <a:pPr>
-              <a:spcBef>
-                <a:spcPts val="40"/>
-              </a:spcBef>
-            </a:pPr>
-            <a:r>
-              <a:rPr lang="uz-UZ" altLang="en-US" sz="1200" dirty="0">
-                <a:solidFill>
-                  <a:srgbClr val="B0C4DE"/>
-                </a:solidFill>
-                <a:latin typeface="Calibri"/>
-              </a:rPr>
-              <a:t>   Double-submit xatolarining oldini olish</a:t>
+              <a:t>📌 Virtual Scrolling: 10000+ qatorli diff-ni brauzer muzlatmasdan ko'rsatish</a:t>
+            </a:r>
+          </a:p>
+          <a:p>
+            <a:pPr>
+              <a:spcBef>
+                <a:spcPts val="40"/>
+              </a:spcBef>
+            </a:pPr>
+            <a:r>
+              <a:rPr lang="uz-UZ" altLang="en-US" sz="1300" b="1" dirty="0">
+                <a:solidFill>
+                  <a:srgbClr val="00E676"/>
+                </a:solidFill>
+                <a:latin typeface="Calibri"/>
+              </a:rPr>
+              <a:t>📌 Exponential Backoff Retry: API nosozligida avtomatik qayta urinish</a:t>
             </a:r>
           </a:p>
         </p:txBody>
@@ -5679,7 +5879,7 @@
 </file>
 
 <file path=ppt/slides/slide2.xml><?xml version="1.0" encoding="utf-8"?>
-<p:sld xmlns:p="http://schemas.openxmlformats.org/presentationml/2006/main" xmlns:a="http://schemas.openxmlformats.org/drawingml/2006/main" xmlns:r="http://schemas.openxmlformats.org/officeDocument/2006/relationships" xmlns:xdr="http://schemas.openxmlformats.org/drawingml/2006/spreadsheetDrawing">
+<p:sld xmlns:p="http://schemas.openxmlformats.org/presentationml/2006/main" xmlns:a="http://schemas.openxmlformats.org/drawingml/2006/main" xmlns:r="http://schemas.openxmlformats.org/officeDocument/2006/relationships">
   <p:cSld>
     <p:spTree>
       <p:nvGrpSpPr>
@@ -5793,15 +5993,15 @@
         <p:spPr>
           <a:xfrm>
             <a:off x="540000" y="1260000"/>
-            <a:ext cx="1800000" cy="1800000"/>
-          </a:xfrm>
-          <a:prstGeom prst="roundRect">
-            <a:avLst>
-              <a:gd name="adj" fmla="val 20000"/>
-            </a:avLst>
-          </a:prstGeom>
-          <a:solidFill>
-            <a:srgbClr val="0F2547"/>
+            <a:ext cx="1800000" cy="1980000"/>
+          </a:xfrm>
+          <a:prstGeom prst="rect">
+            <a:avLst/>
+          </a:prstGeom>
+          <a:solidFill>
+            <a:srgbClr val="0F2547">
+              <a:alpha val="80000"/>
+            </a:srgbClr>
           </a:solidFill>
           <a:ln>
             <a:noFill/>
@@ -5822,7 +6022,7 @@
         <p:spPr>
           <a:xfrm>
             <a:off x="540000" y="1260000"/>
-            <a:ext cx="1800000" cy="1800000"/>
+            <a:ext cx="1800000" cy="1980000"/>
           </a:xfrm>
           <a:prstGeom prst="rect">
             <a:avLst/>
@@ -5835,7 +6035,7 @@
           <a:p>
             <a:pPr algn="ctr"/>
             <a:r>
-              <a:rPr lang="uz-UZ" altLang="en-US" sz="6000" b="1" dirty="0">
+              <a:rPr lang="uz-UZ" altLang="en-US" sz="5800" b="1" dirty="0">
                 <a:solidFill>
                   <a:srgbClr val="00C6FF"/>
                 </a:solidFill>
@@ -5857,12 +6057,10 @@
         <p:spPr>
           <a:xfrm>
             <a:off x="2520000" y="1440000"/>
-            <a:ext cx="8640000" cy="1440000"/>
-          </a:xfrm>
-          <a:prstGeom prst="roundRect">
-            <a:avLst>
-              <a:gd name="adj" fmla="val 15000"/>
-            </a:avLst>
+            <a:ext cx="8640000" cy="1620000"/>
+          </a:xfrm>
+          <a:prstGeom prst="rect">
+            <a:avLst/>
           </a:prstGeom>
           <a:solidFill>
             <a:srgbClr val="0F2547">
@@ -5890,7 +6088,7 @@
         <p:spPr>
           <a:xfrm>
             <a:off x="2520000" y="1440000"/>
-            <a:ext cx="8640000" cy="28800"/>
+            <a:ext cx="8640000" cy="36000"/>
           </a:xfrm>
           <a:prstGeom prst="rect">
             <a:avLst/>
@@ -5916,8 +6114,8 @@
         </p:nvSpPr>
         <p:spPr>
           <a:xfrm>
-            <a:off x="2628000" y="1584000"/>
-            <a:ext cx="8424000" cy="1152000"/>
+            <a:off x="2628000" y="1620000"/>
+            <a:ext cx="8424000" cy="1260000"/>
           </a:xfrm>
           <a:prstGeom prst="rect">
             <a:avLst/>
@@ -5930,7 +6128,7 @@
           <a:p>
             <a:pPr/>
             <a:r>
-              <a:rPr lang="uz-UZ" altLang="en-US" sz="2000" b="1" dirty="0">
+              <a:rPr lang="uz-UZ" altLang="en-US" sz="2200" b="1" dirty="0">
                 <a:solidFill>
                   <a:srgbClr val="FFFFFF"/>
                 </a:solidFill>
@@ -5942,7 +6140,7 @@
           <a:p>
             <a:pPr/>
             <a:r>
-              <a:rPr lang="uz-UZ" altLang="en-US" sz="2000" b="1" dirty="0">
+              <a:rPr lang="uz-UZ" altLang="en-US" sz="2200" b="1" dirty="0">
                 <a:solidFill>
                   <a:srgbClr val="FFFFFF"/>
                 </a:solidFill>
@@ -5963,13 +6161,11 @@
         </p:nvSpPr>
         <p:spPr>
           <a:xfrm>
-            <a:off x="540000" y="3420000"/>
-            <a:ext cx="11160000" cy="3060000"/>
-          </a:xfrm>
-          <a:prstGeom prst="roundRect">
-            <a:avLst>
-              <a:gd name="adj" fmla="val 10000"/>
-            </a:avLst>
+            <a:off x="540000" y="3600000"/>
+            <a:ext cx="11160000" cy="2880000"/>
+          </a:xfrm>
+          <a:prstGeom prst="rect">
+            <a:avLst/>
           </a:prstGeom>
           <a:solidFill>
             <a:srgbClr val="0F2547">
@@ -5994,7 +6190,7 @@
         </p:nvSpPr>
         <p:spPr>
           <a:xfrm>
-            <a:off x="720000" y="3600000"/>
+            <a:off x="720000" y="3780000"/>
             <a:ext cx="10800000" cy="2700000"/>
           </a:xfrm>
           <a:prstGeom prst="rect">
@@ -6027,7 +6223,7 @@
                 </a:solidFill>
                 <a:latin typeface="Calibri"/>
               </a:rPr>
-              <a:t>1. Mavzuning dolzarbligi va tadqiqot maqsadi</a:t>
+              <a:t>1. Kirish — Mavzuning dolzarbligi</a:t>
             </a:r>
           </a:p>
           <a:p>
@@ -6052,7 +6248,7 @@
                 </a:solidFill>
                 <a:latin typeface="Calibri"/>
               </a:rPr>
-              <a:t>2. I Bob — Versiyalarni boshqarish tizimlari: nazariy asoslar</a:t>
+              <a:t>2. I Bob — Versiyalarni boshqarish: nazariy asoslar</a:t>
             </a:r>
           </a:p>
           <a:p>
@@ -6127,7 +6323,7 @@
                 </a:solidFill>
                 <a:latin typeface="Calibri"/>
               </a:rPr>
-              <a:t>5. Xulosa, takliflar va istiqbollar</a:t>
+              <a:t>5. Xulosa, takliflar va kelajak istiqbollari</a:t>
             </a:r>
           </a:p>
         </p:txBody>
@@ -6141,7 +6337,7 @@
 </file>
 
 <file path=ppt/slides/slide20.xml><?xml version="1.0" encoding="utf-8"?>
-<p:sld xmlns:p="http://schemas.openxmlformats.org/presentationml/2006/main" xmlns:a="http://schemas.openxmlformats.org/drawingml/2006/main" xmlns:r="http://schemas.openxmlformats.org/officeDocument/2006/relationships" xmlns:xdr="http://schemas.openxmlformats.org/drawingml/2006/spreadsheetDrawing">
+<p:sld xmlns:p="http://schemas.openxmlformats.org/presentationml/2006/main" xmlns:a="http://schemas.openxmlformats.org/drawingml/2006/main" xmlns:r="http://schemas.openxmlformats.org/officeDocument/2006/relationships">
   <p:cSld>
     <p:spTree>
       <p:nvGrpSpPr>
@@ -6203,7 +6399,7 @@
             <a:avLst/>
           </a:prstGeom>
           <a:solidFill>
-            <a:srgbClr val="0D1B2A"/>
+            <a:srgbClr val="0a1628"/>
           </a:solidFill>
           <a:ln>
             <a:noFill/>
@@ -6353,8 +6549,8 @@
         </p:blipFill>
         <p:spPr>
           <a:xfrm>
-            <a:off x="288000" y="1080000"/>
-            <a:ext cx="7380000" cy="5220000"/>
+            <a:off x="180000" y="1044000"/>
+            <a:ext cx="7920000" cy="5220000"/>
           </a:xfrm>
           <a:prstGeom prst="rect">
             <a:avLst/>
@@ -6371,8 +6567,8 @@
         </p:nvSpPr>
         <p:spPr>
           <a:xfrm>
-            <a:off x="266400" y="1058400"/>
-            <a:ext cx="7423200" cy="21600"/>
+            <a:off x="158400" y="1022400"/>
+            <a:ext cx="7963200" cy="21600"/>
           </a:xfrm>
           <a:prstGeom prst="rect">
             <a:avLst/>
@@ -6400,8 +6596,8 @@
         </p:nvSpPr>
         <p:spPr>
           <a:xfrm>
-            <a:off x="266400" y="6300000"/>
-            <a:ext cx="7423200" cy="21600"/>
+            <a:off x="158400" y="6263999"/>
+            <a:ext cx="7963200" cy="21600"/>
           </a:xfrm>
           <a:prstGeom prst="rect">
             <a:avLst/>
@@ -6429,7 +6625,7 @@
         </p:nvSpPr>
         <p:spPr>
           <a:xfrm>
-            <a:off x="266400" y="1058400"/>
+            <a:off x="158400" y="1022400"/>
             <a:ext cx="21600" cy="5263200"/>
           </a:xfrm>
           <a:prstGeom prst="rect">
@@ -6458,7 +6654,7 @@
         </p:nvSpPr>
         <p:spPr>
           <a:xfrm>
-            <a:off x="7668000" y="1058400"/>
+            <a:off x="8100000" y="1022400"/>
             <a:ext cx="21600" cy="5263200"/>
           </a:xfrm>
           <a:prstGeom prst="rect">
@@ -6487,17 +6683,15 @@
         </p:nvSpPr>
         <p:spPr>
           <a:xfrm>
-            <a:off x="7812000" y="1080000"/>
-            <a:ext cx="4273199" cy="5220000"/>
-          </a:xfrm>
-          <a:prstGeom prst="roundRect">
-            <a:avLst>
-              <a:gd name="adj" fmla="val 15000"/>
-            </a:avLst>
-          </a:prstGeom>
-          <a:solidFill>
-            <a:srgbClr val="0D1B2A">
-              <a:alpha val="80000"/>
+            <a:off x="8352000" y="1044000"/>
+            <a:ext cx="3708000" cy="5220000"/>
+          </a:xfrm>
+          <a:prstGeom prst="rect">
+            <a:avLst/>
+          </a:prstGeom>
+          <a:solidFill>
+            <a:srgbClr val="0a1628">
+              <a:alpha val="90000"/>
             </a:srgbClr>
           </a:solidFill>
           <a:ln>
@@ -6520,8 +6714,8 @@
         </p:nvSpPr>
         <p:spPr>
           <a:xfrm>
-            <a:off x="7812000" y="1080000"/>
-            <a:ext cx="43200" cy="5220000"/>
+            <a:off x="8352000" y="1044000"/>
+            <a:ext cx="36000" cy="5220000"/>
           </a:xfrm>
           <a:prstGeom prst="rect">
             <a:avLst/>
@@ -6547,8 +6741,8 @@
         </p:nvSpPr>
         <p:spPr>
           <a:xfrm>
-            <a:off x="7902000" y="1188000"/>
-            <a:ext cx="4093199" cy="5004000"/>
+            <a:off x="8460000" y="1152000"/>
+            <a:ext cx="3528000" cy="4968000"/>
           </a:xfrm>
           <a:prstGeom prst="rect">
             <a:avLst/>
@@ -6561,126 +6755,273 @@
           <a:p>
             <a:pPr>
               <a:spcBef>
-                <a:spcPts val="120"/>
-              </a:spcBef>
-            </a:pPr>
-            <a:r>
-              <a:rPr lang="uz-UZ" altLang="en-US" sz="1100" dirty="0">
+                <a:spcPts val="100"/>
+              </a:spcBef>
+            </a:pPr>
+            <a:r>
+              <a:rPr lang="uz-UZ" altLang="en-US" sz="1200" dirty="0">
                 <a:solidFill>
                   <a:srgbClr val="00C6FF"/>
                 </a:solidFill>
                 <a:latin typeface="Calibri"/>
               </a:rPr>
-              <a:t> ▸ </a:t>
-            </a:r>
-            <a:r>
-              <a:rPr lang="uz-UZ" altLang="en-US" sz="1100" dirty="0">
-                <a:solidFill>
-                  <a:srgbClr val="B0C4DE"/>
-                </a:solidFill>
-                <a:latin typeface="Calibri"/>
-              </a:rPr>
-              <a:t>O'zbek tilida professional tahlil</a:t>
-            </a:r>
-          </a:p>
-          <a:p>
-            <a:pPr>
-              <a:spcBef>
-                <a:spcPts val="120"/>
-              </a:spcBef>
-            </a:pPr>
-            <a:r>
-              <a:rPr lang="uz-UZ" altLang="en-US" sz="1100" dirty="0">
+              <a:t> ▸ O'zbek tilida</a:t>
+            </a:r>
+          </a:p>
+          <a:p>
+            <a:pPr>
+              <a:spcBef>
+                <a:spcPts val="100"/>
+              </a:spcBef>
+            </a:pPr>
+            <a:r>
+              <a:rPr lang="uz-UZ" altLang="en-US" sz="1200" dirty="0">
+                <a:solidFill>
+                  <a:srgbClr val="B0C4DE"/>
+                </a:solidFill>
+                <a:latin typeface="Calibri"/>
+              </a:rPr>
+              <a:t>    professional tahlil</a:t>
+            </a:r>
+          </a:p>
+          <a:p>
+            <a:pPr>
+              <a:spcBef>
+                <a:spcPts val="40"/>
+              </a:spcBef>
+            </a:pPr>
+            <a:r>
+              <a:rPr lang="uz-UZ" altLang="en-US" sz="1400" dirty="0">
+                <a:solidFill>
+                  <a:srgbClr val="FFFFFF"/>
+                </a:solidFill>
+                <a:latin typeface="Calibri"/>
+              </a:rPr>
+              <a:t/>
+            </a:r>
+          </a:p>
+          <a:p>
+            <a:pPr>
+              <a:spcBef>
+                <a:spcPts val="100"/>
+              </a:spcBef>
+            </a:pPr>
+            <a:r>
+              <a:rPr lang="uz-UZ" altLang="en-US" sz="1200" dirty="0">
                 <a:solidFill>
                   <a:srgbClr val="00C6FF"/>
                 </a:solidFill>
                 <a:latin typeface="Calibri"/>
               </a:rPr>
-              <a:t> ▸ </a:t>
-            </a:r>
-            <a:r>
-              <a:rPr lang="uz-UZ" altLang="en-US" sz="1100" dirty="0">
-                <a:solidFill>
-                  <a:srgbClr val="B0C4DE"/>
-                </a:solidFill>
-                <a:latin typeface="Calibri"/>
-              </a:rPr>
-              <a:t>Sintaktik o'zgarishlar tavsifi</a:t>
-            </a:r>
-          </a:p>
-          <a:p>
-            <a:pPr>
-              <a:spcBef>
-                <a:spcPts val="120"/>
-              </a:spcBef>
-            </a:pPr>
-            <a:r>
-              <a:rPr lang="uz-UZ" altLang="en-US" sz="1100" dirty="0">
+              <a:t> ▸ Sintaktik o'zgarishlar:</a:t>
+            </a:r>
+          </a:p>
+          <a:p>
+            <a:pPr>
+              <a:spcBef>
+                <a:spcPts val="100"/>
+              </a:spcBef>
+            </a:pPr>
+            <a:r>
+              <a:rPr lang="uz-UZ" altLang="en-US" sz="1200" dirty="0">
+                <a:solidFill>
+                  <a:srgbClr val="B0C4DE"/>
+                </a:solidFill>
+                <a:latin typeface="Calibri"/>
+              </a:rPr>
+              <a:t>    nima o'zgargan</a:t>
+            </a:r>
+          </a:p>
+          <a:p>
+            <a:pPr>
+              <a:spcBef>
+                <a:spcPts val="40"/>
+              </a:spcBef>
+            </a:pPr>
+            <a:r>
+              <a:rPr lang="uz-UZ" altLang="en-US" sz="1400" dirty="0">
+                <a:solidFill>
+                  <a:srgbClr val="FFFFFF"/>
+                </a:solidFill>
+                <a:latin typeface="Calibri"/>
+              </a:rPr>
+              <a:t/>
+            </a:r>
+          </a:p>
+          <a:p>
+            <a:pPr>
+              <a:spcBef>
+                <a:spcPts val="100"/>
+              </a:spcBef>
+            </a:pPr>
+            <a:r>
+              <a:rPr lang="uz-UZ" altLang="en-US" sz="1200" dirty="0">
                 <a:solidFill>
                   <a:srgbClr val="00C6FF"/>
                 </a:solidFill>
                 <a:latin typeface="Calibri"/>
               </a:rPr>
-              <a:t> ▸ </a:t>
-            </a:r>
-            <a:r>
-              <a:rPr lang="uz-UZ" altLang="en-US" sz="1100" dirty="0">
-                <a:solidFill>
-                  <a:srgbClr val="B0C4DE"/>
-                </a:solidFill>
-                <a:latin typeface="Calibri"/>
-              </a:rPr>
-              <a:t>Xavfsizlik va mantiq tahlili</a:t>
-            </a:r>
-          </a:p>
-          <a:p>
-            <a:pPr>
-              <a:spcBef>
-                <a:spcPts val="120"/>
-              </a:spcBef>
-            </a:pPr>
-            <a:r>
-              <a:rPr lang="uz-UZ" altLang="en-US" sz="1100" dirty="0">
+              <a:t> ▸ Biznes/Xavfsizlik:</a:t>
+            </a:r>
+          </a:p>
+          <a:p>
+            <a:pPr>
+              <a:spcBef>
+                <a:spcPts val="100"/>
+              </a:spcBef>
+            </a:pPr>
+            <a:r>
+              <a:rPr lang="uz-UZ" altLang="en-US" sz="1200" dirty="0">
+                <a:solidFill>
+                  <a:srgbClr val="B0C4DE"/>
+                </a:solidFill>
+                <a:latin typeface="Calibri"/>
+              </a:rPr>
+              <a:t>    nima uchun o'zgargan</a:t>
+            </a:r>
+          </a:p>
+          <a:p>
+            <a:pPr>
+              <a:spcBef>
+                <a:spcPts val="40"/>
+              </a:spcBef>
+            </a:pPr>
+            <a:r>
+              <a:rPr lang="uz-UZ" altLang="en-US" sz="1400" dirty="0">
+                <a:solidFill>
+                  <a:srgbClr val="FFFFFF"/>
+                </a:solidFill>
+                <a:latin typeface="Calibri"/>
+              </a:rPr>
+              <a:t/>
+            </a:r>
+          </a:p>
+          <a:p>
+            <a:pPr>
+              <a:spcBef>
+                <a:spcPts val="100"/>
+              </a:spcBef>
+            </a:pPr>
+            <a:r>
+              <a:rPr lang="uz-UZ" altLang="en-US" sz="1200" dirty="0">
                 <a:solidFill>
                   <a:srgbClr val="00C6FF"/>
                 </a:solidFill>
                 <a:latin typeface="Calibri"/>
               </a:rPr>
-              <a:t> ▸ </a:t>
-            </a:r>
-            <a:r>
-              <a:rPr lang="uz-UZ" altLang="en-US" sz="1100" dirty="0">
-                <a:solidFill>
-                  <a:srgbClr val="B0C4DE"/>
-                </a:solidFill>
-                <a:latin typeface="Calibri"/>
-              </a:rPr>
-              <a:t>Auto-fix tayyor kod namunalari</a:t>
-            </a:r>
-          </a:p>
-          <a:p>
-            <a:pPr>
-              <a:spcBef>
-                <a:spcPts val="120"/>
-              </a:spcBef>
-            </a:pPr>
-            <a:r>
-              <a:rPr lang="uz-UZ" altLang="en-US" sz="1100" dirty="0">
+              <a:t> ▸ Auto-fix tavsiyalar:</a:t>
+            </a:r>
+          </a:p>
+          <a:p>
+            <a:pPr>
+              <a:spcBef>
+                <a:spcPts val="100"/>
+              </a:spcBef>
+            </a:pPr>
+            <a:r>
+              <a:rPr lang="uz-UZ" altLang="en-US" sz="1200" dirty="0">
+                <a:solidFill>
+                  <a:srgbClr val="B0C4DE"/>
+                </a:solidFill>
+                <a:latin typeface="Calibri"/>
+              </a:rPr>
+              <a:t>    tayyor kod namunalari</a:t>
+            </a:r>
+          </a:p>
+          <a:p>
+            <a:pPr>
+              <a:spcBef>
+                <a:spcPts val="40"/>
+              </a:spcBef>
+            </a:pPr>
+            <a:r>
+              <a:rPr lang="uz-UZ" altLang="en-US" sz="1400" dirty="0">
+                <a:solidFill>
+                  <a:srgbClr val="FFFFFF"/>
+                </a:solidFill>
+                <a:latin typeface="Calibri"/>
+              </a:rPr>
+              <a:t/>
+            </a:r>
+          </a:p>
+          <a:p>
+            <a:pPr>
+              <a:spcBef>
+                <a:spcPts val="100"/>
+              </a:spcBef>
+            </a:pPr>
+            <a:r>
+              <a:rPr lang="uz-UZ" altLang="en-US" sz="1200" dirty="0">
                 <a:solidFill>
                   <a:srgbClr val="00C6FF"/>
                 </a:solidFill>
                 <a:latin typeface="Calibri"/>
               </a:rPr>
-              <a:t> ▸ </a:t>
-            </a:r>
-            <a:r>
-              <a:rPr lang="uz-UZ" altLang="en-US" sz="1100" dirty="0">
-                <a:solidFill>
-                  <a:srgbClr val="B0C4DE"/>
-                </a:solidFill>
-                <a:latin typeface="Calibri"/>
-              </a:rPr>
-              <a:t>Markdown formatida render</a:t>
+              <a:t> ▸ Markdown formatida</a:t>
+            </a:r>
+          </a:p>
+          <a:p>
+            <a:pPr>
+              <a:spcBef>
+                <a:spcPts val="100"/>
+              </a:spcBef>
+            </a:pPr>
+            <a:r>
+              <a:rPr lang="uz-UZ" altLang="en-US" sz="1200" dirty="0">
+                <a:solidFill>
+                  <a:srgbClr val="B0C4DE"/>
+                </a:solidFill>
+                <a:latin typeface="Calibri"/>
+              </a:rPr>
+              <a:t>    render qilinadi</a:t>
+            </a:r>
+          </a:p>
+          <a:p>
+            <a:pPr>
+              <a:spcBef>
+                <a:spcPts val="40"/>
+              </a:spcBef>
+            </a:pPr>
+            <a:r>
+              <a:rPr lang="uz-UZ" altLang="en-US" sz="1400" dirty="0">
+                <a:solidFill>
+                  <a:srgbClr val="FFFFFF"/>
+                </a:solidFill>
+                <a:latin typeface="Calibri"/>
+              </a:rPr>
+              <a:t/>
+            </a:r>
+          </a:p>
+          <a:p>
+            <a:pPr>
+              <a:spcBef>
+                <a:spcPts val="100"/>
+              </a:spcBef>
+            </a:pPr>
+            <a:r>
+              <a:rPr lang="uz-UZ" altLang="en-US" sz="1200" dirty="0">
+                <a:solidFill>
+                  <a:srgbClr val="00C6FF"/>
+                </a:solidFill>
+                <a:latin typeface="Calibri"/>
+              </a:rPr>
+              <a:t> ▸ Hallucination kamaytirish:</a:t>
+            </a:r>
+          </a:p>
+          <a:p>
+            <a:pPr>
+              <a:spcBef>
+                <a:spcPts val="100"/>
+              </a:spcBef>
+            </a:pPr>
+            <a:r>
+              <a:rPr lang="uz-UZ" altLang="en-US" sz="1200" dirty="0">
+                <a:solidFill>
+                  <a:srgbClr val="B0C4DE"/>
+                </a:solidFill>
+                <a:latin typeface="Calibri"/>
+              </a:rPr>
+              <a:t>    faqat diff asosida</a:t>
             </a:r>
           </a:p>
         </p:txBody>
@@ -6694,7 +7035,7 @@
 </file>
 
 <file path=ppt/slides/slide21.xml><?xml version="1.0" encoding="utf-8"?>
-<p:sld xmlns:p="http://schemas.openxmlformats.org/presentationml/2006/main" xmlns:a="http://schemas.openxmlformats.org/drawingml/2006/main" xmlns:r="http://schemas.openxmlformats.org/officeDocument/2006/relationships" xmlns:xdr="http://schemas.openxmlformats.org/drawingml/2006/spreadsheetDrawing">
+<p:sld xmlns:p="http://schemas.openxmlformats.org/presentationml/2006/main" xmlns:a="http://schemas.openxmlformats.org/drawingml/2006/main" xmlns:r="http://schemas.openxmlformats.org/officeDocument/2006/relationships">
   <p:cSld>
     <p:spTree>
       <p:nvGrpSpPr>
@@ -6756,7 +7097,7 @@
             <a:avLst/>
           </a:prstGeom>
           <a:solidFill>
-            <a:srgbClr val="0D1B2A"/>
+            <a:srgbClr val="0a1628"/>
           </a:solidFill>
           <a:ln>
             <a:noFill/>
@@ -6854,7 +7195,7 @@
                 </a:solidFill>
                 <a:latin typeface="Calibri"/>
               </a:rPr>
-              <a:t>Dashboard — Loyiha Analitikasi</a:t>
+              <a:t>Dashboard — Loyiha Analitikasi va Monitoring</a:t>
             </a:r>
           </a:p>
         </p:txBody>
@@ -6906,8 +7247,8 @@
         </p:blipFill>
         <p:spPr>
           <a:xfrm>
-            <a:off x="288000" y="1080000"/>
-            <a:ext cx="7380000" cy="5220000"/>
+            <a:off x="180000" y="1044000"/>
+            <a:ext cx="7920000" cy="5220000"/>
           </a:xfrm>
           <a:prstGeom prst="rect">
             <a:avLst/>
@@ -6924,8 +7265,8 @@
         </p:nvSpPr>
         <p:spPr>
           <a:xfrm>
-            <a:off x="266400" y="1058400"/>
-            <a:ext cx="7423200" cy="21600"/>
+            <a:off x="158400" y="1022400"/>
+            <a:ext cx="7963200" cy="21600"/>
           </a:xfrm>
           <a:prstGeom prst="rect">
             <a:avLst/>
@@ -6953,8 +7294,8 @@
         </p:nvSpPr>
         <p:spPr>
           <a:xfrm>
-            <a:off x="266400" y="6300000"/>
-            <a:ext cx="7423200" cy="21600"/>
+            <a:off x="158400" y="6263999"/>
+            <a:ext cx="7963200" cy="21600"/>
           </a:xfrm>
           <a:prstGeom prst="rect">
             <a:avLst/>
@@ -6982,7 +7323,7 @@
         </p:nvSpPr>
         <p:spPr>
           <a:xfrm>
-            <a:off x="266400" y="1058400"/>
+            <a:off x="158400" y="1022400"/>
             <a:ext cx="21600" cy="5263200"/>
           </a:xfrm>
           <a:prstGeom prst="rect">
@@ -7011,7 +7352,7 @@
         </p:nvSpPr>
         <p:spPr>
           <a:xfrm>
-            <a:off x="7668000" y="1058400"/>
+            <a:off x="8100000" y="1022400"/>
             <a:ext cx="21600" cy="5263200"/>
           </a:xfrm>
           <a:prstGeom prst="rect">
@@ -7040,17 +7381,15 @@
         </p:nvSpPr>
         <p:spPr>
           <a:xfrm>
-            <a:off x="7812000" y="1080000"/>
-            <a:ext cx="4273199" cy="5220000"/>
-          </a:xfrm>
-          <a:prstGeom prst="roundRect">
-            <a:avLst>
-              <a:gd name="adj" fmla="val 15000"/>
-            </a:avLst>
-          </a:prstGeom>
-          <a:solidFill>
-            <a:srgbClr val="0D1B2A">
-              <a:alpha val="80000"/>
+            <a:off x="8352000" y="1044000"/>
+            <a:ext cx="3708000" cy="5220000"/>
+          </a:xfrm>
+          <a:prstGeom prst="rect">
+            <a:avLst/>
+          </a:prstGeom>
+          <a:solidFill>
+            <a:srgbClr val="0a1628">
+              <a:alpha val="90000"/>
             </a:srgbClr>
           </a:solidFill>
           <a:ln>
@@ -7073,8 +7412,8 @@
         </p:nvSpPr>
         <p:spPr>
           <a:xfrm>
-            <a:off x="7812000" y="1080000"/>
-            <a:ext cx="43200" cy="5220000"/>
+            <a:off x="8352000" y="1044000"/>
+            <a:ext cx="36000" cy="5220000"/>
           </a:xfrm>
           <a:prstGeom prst="rect">
             <a:avLst/>
@@ -7100,8 +7439,8 @@
         </p:nvSpPr>
         <p:spPr>
           <a:xfrm>
-            <a:off x="7902000" y="1188000"/>
-            <a:ext cx="4093199" cy="5004000"/>
+            <a:off x="8460000" y="1152000"/>
+            <a:ext cx="3528000" cy="4968000"/>
           </a:xfrm>
           <a:prstGeom prst="rect">
             <a:avLst/>
@@ -7114,126 +7453,257 @@
           <a:p>
             <a:pPr>
               <a:spcBef>
-                <a:spcPts val="120"/>
-              </a:spcBef>
-            </a:pPr>
-            <a:r>
-              <a:rPr lang="uz-UZ" altLang="en-US" sz="1100" dirty="0">
+                <a:spcPts val="100"/>
+              </a:spcBef>
+            </a:pPr>
+            <a:r>
+              <a:rPr lang="uz-UZ" altLang="en-US" sz="1200" dirty="0">
                 <a:solidFill>
                   <a:srgbClr val="00C6FF"/>
                 </a:solidFill>
                 <a:latin typeface="Calibri"/>
               </a:rPr>
-              <a:t> ▸ </a:t>
-            </a:r>
-            <a:r>
-              <a:rPr lang="uz-UZ" altLang="en-US" sz="1100" dirty="0">
-                <a:solidFill>
-                  <a:srgbClr val="B0C4DE"/>
-                </a:solidFill>
-                <a:latin typeface="Calibri"/>
-              </a:rPr>
-              <a:t>Eng ko'p o'zgargan top fayllar</a:t>
-            </a:r>
-          </a:p>
-          <a:p>
-            <a:pPr>
-              <a:spcBef>
-                <a:spcPts val="120"/>
-              </a:spcBef>
-            </a:pPr>
-            <a:r>
-              <a:rPr lang="uz-UZ" altLang="en-US" sz="1100" dirty="0">
+              <a:t> ▸ Umumiy statistika:</a:t>
+            </a:r>
+          </a:p>
+          <a:p>
+            <a:pPr>
+              <a:spcBef>
+                <a:spcPts val="100"/>
+              </a:spcBef>
+            </a:pPr>
+            <a:r>
+              <a:rPr lang="uz-UZ" altLang="en-US" sz="1200" dirty="0">
+                <a:solidFill>
+                  <a:srgbClr val="B0C4DE"/>
+                </a:solidFill>
+                <a:latin typeface="Calibri"/>
+              </a:rPr>
+              <a:t>    commitlar, qatorlar,</a:t>
+            </a:r>
+          </a:p>
+          <a:p>
+            <a:pPr>
+              <a:spcBef>
+                <a:spcPts val="100"/>
+              </a:spcBef>
+            </a:pPr>
+            <a:r>
+              <a:rPr lang="uz-UZ" altLang="en-US" sz="1200" dirty="0">
+                <a:solidFill>
+                  <a:srgbClr val="B0C4DE"/>
+                </a:solidFill>
+                <a:latin typeface="Calibri"/>
+              </a:rPr>
+              <a:t>    mualliflar soni</a:t>
+            </a:r>
+          </a:p>
+          <a:p>
+            <a:pPr>
+              <a:spcBef>
+                <a:spcPts val="40"/>
+              </a:spcBef>
+            </a:pPr>
+            <a:r>
+              <a:rPr lang="uz-UZ" altLang="en-US" sz="1400" dirty="0">
+                <a:solidFill>
+                  <a:srgbClr val="FFFFFF"/>
+                </a:solidFill>
+                <a:latin typeface="Calibri"/>
+              </a:rPr>
+              <a:t/>
+            </a:r>
+          </a:p>
+          <a:p>
+            <a:pPr>
+              <a:spcBef>
+                <a:spcPts val="100"/>
+              </a:spcBef>
+            </a:pPr>
+            <a:r>
+              <a:rPr lang="uz-UZ" altLang="en-US" sz="1200" dirty="0">
                 <a:solidFill>
                   <a:srgbClr val="00C6FF"/>
                 </a:solidFill>
                 <a:latin typeface="Calibri"/>
               </a:rPr>
-              <a:t> ▸ </a:t>
-            </a:r>
-            <a:r>
-              <a:rPr lang="uz-UZ" altLang="en-US" sz="1100" dirty="0">
-                <a:solidFill>
-                  <a:srgbClr val="B0C4DE"/>
-                </a:solidFill>
-                <a:latin typeface="Calibri"/>
-              </a:rPr>
-              <a:t>Progress-bar animatsiyali grafik</a:t>
-            </a:r>
-          </a:p>
-          <a:p>
-            <a:pPr>
-              <a:spcBef>
-                <a:spcPts val="120"/>
-              </a:spcBef>
-            </a:pPr>
-            <a:r>
-              <a:rPr lang="uz-UZ" altLang="en-US" sz="1100" dirty="0">
+              <a:t> ▸ Top fayllar grafigi:</a:t>
+            </a:r>
+          </a:p>
+          <a:p>
+            <a:pPr>
+              <a:spcBef>
+                <a:spcPts val="100"/>
+              </a:spcBef>
+            </a:pPr>
+            <a:r>
+              <a:rPr lang="uz-UZ" altLang="en-US" sz="1200" dirty="0">
+                <a:solidFill>
+                  <a:srgbClr val="B0C4DE"/>
+                </a:solidFill>
+                <a:latin typeface="Calibri"/>
+              </a:rPr>
+              <a:t>    progress-bar animatsiya</a:t>
+            </a:r>
+          </a:p>
+          <a:p>
+            <a:pPr>
+              <a:spcBef>
+                <a:spcPts val="100"/>
+              </a:spcBef>
+            </a:pPr>
+            <a:r>
+              <a:rPr lang="uz-UZ" altLang="en-US" sz="1200" dirty="0">
+                <a:solidFill>
+                  <a:srgbClr val="B0C4DE"/>
+                </a:solidFill>
+                <a:latin typeface="Calibri"/>
+              </a:rPr>
+              <a:t>    (binafsha-yashil ranglar)</a:t>
+            </a:r>
+          </a:p>
+          <a:p>
+            <a:pPr>
+              <a:spcBef>
+                <a:spcPts val="40"/>
+              </a:spcBef>
+            </a:pPr>
+            <a:r>
+              <a:rPr lang="uz-UZ" altLang="en-US" sz="1400" dirty="0">
+                <a:solidFill>
+                  <a:srgbClr val="FFFFFF"/>
+                </a:solidFill>
+                <a:latin typeface="Calibri"/>
+              </a:rPr>
+              <a:t/>
+            </a:r>
+          </a:p>
+          <a:p>
+            <a:pPr>
+              <a:spcBef>
+                <a:spcPts val="100"/>
+              </a:spcBef>
+            </a:pPr>
+            <a:r>
+              <a:rPr lang="uz-UZ" altLang="en-US" sz="1200" dirty="0">
                 <a:solidFill>
                   <a:srgbClr val="00C6FF"/>
                 </a:solidFill>
                 <a:latin typeface="Calibri"/>
               </a:rPr>
-              <a:t> ▸ </a:t>
-            </a:r>
-            <a:r>
-              <a:rPr lang="uz-UZ" altLang="en-US" sz="1100" dirty="0">
-                <a:solidFill>
-                  <a:srgbClr val="B0C4DE"/>
-                </a:solidFill>
-                <a:latin typeface="Calibri"/>
-              </a:rPr>
-              <a:t>Dasturchilar faolligi reytingi</a:t>
-            </a:r>
-          </a:p>
-          <a:p>
-            <a:pPr>
-              <a:spcBef>
-                <a:spcPts val="120"/>
-              </a:spcBef>
-            </a:pPr>
-            <a:r>
-              <a:rPr lang="uz-UZ" altLang="en-US" sz="1100" dirty="0">
+              <a:t> ▸ Dasturchilar reytingi:</a:t>
+            </a:r>
+          </a:p>
+          <a:p>
+            <a:pPr>
+              <a:spcBef>
+                <a:spcPts val="100"/>
+              </a:spcBef>
+            </a:pPr>
+            <a:r>
+              <a:rPr lang="uz-UZ" altLang="en-US" sz="1200" dirty="0">
+                <a:solidFill>
+                  <a:srgbClr val="B0C4DE"/>
+                </a:solidFill>
+                <a:latin typeface="Calibri"/>
+              </a:rPr>
+              <a:t>    Leaderboard — eng faol</a:t>
+            </a:r>
+          </a:p>
+          <a:p>
+            <a:pPr>
+              <a:spcBef>
+                <a:spcPts val="100"/>
+              </a:spcBef>
+            </a:pPr>
+            <a:r>
+              <a:rPr lang="uz-UZ" altLang="en-US" sz="1200" dirty="0">
+                <a:solidFill>
+                  <a:srgbClr val="B0C4DE"/>
+                </a:solidFill>
+                <a:latin typeface="Calibri"/>
+              </a:rPr>
+              <a:t>    jamoa a'zolari</a:t>
+            </a:r>
+          </a:p>
+          <a:p>
+            <a:pPr>
+              <a:spcBef>
+                <a:spcPts val="40"/>
+              </a:spcBef>
+            </a:pPr>
+            <a:r>
+              <a:rPr lang="uz-UZ" altLang="en-US" sz="1400" dirty="0">
+                <a:solidFill>
+                  <a:srgbClr val="FFFFFF"/>
+                </a:solidFill>
+                <a:latin typeface="Calibri"/>
+              </a:rPr>
+              <a:t/>
+            </a:r>
+          </a:p>
+          <a:p>
+            <a:pPr>
+              <a:spcBef>
+                <a:spcPts val="100"/>
+              </a:spcBef>
+            </a:pPr>
+            <a:r>
+              <a:rPr lang="uz-UZ" altLang="en-US" sz="1200" dirty="0">
                 <a:solidFill>
                   <a:srgbClr val="00C6FF"/>
                 </a:solidFill>
                 <a:latin typeface="Calibri"/>
               </a:rPr>
-              <a:t> ▸ </a:t>
-            </a:r>
-            <a:r>
-              <a:rPr lang="uz-UZ" altLang="en-US" sz="1100" dirty="0">
-                <a:solidFill>
-                  <a:srgbClr val="B0C4DE"/>
-                </a:solidFill>
-                <a:latin typeface="Calibri"/>
-              </a:rPr>
-              <a:t>Umumiy statistika kartochkalari</a:t>
-            </a:r>
-          </a:p>
-          <a:p>
-            <a:pPr>
-              <a:spcBef>
-                <a:spcPts val="120"/>
-              </a:spcBef>
-            </a:pPr>
-            <a:r>
-              <a:rPr lang="uz-UZ" altLang="en-US" sz="1100" dirty="0">
+              <a:t> ▸ Real vaqtda hisoblash</a:t>
+            </a:r>
+          </a:p>
+          <a:p>
+            <a:pPr>
+              <a:spcBef>
+                <a:spcPts val="40"/>
+              </a:spcBef>
+            </a:pPr>
+            <a:r>
+              <a:rPr lang="uz-UZ" altLang="en-US" sz="1400" dirty="0">
+                <a:solidFill>
+                  <a:srgbClr val="FFFFFF"/>
+                </a:solidFill>
+                <a:latin typeface="Calibri"/>
+              </a:rPr>
+              <a:t/>
+            </a:r>
+          </a:p>
+          <a:p>
+            <a:pPr>
+              <a:spcBef>
+                <a:spcPts val="100"/>
+              </a:spcBef>
+            </a:pPr>
+            <a:r>
+              <a:rPr lang="uz-UZ" altLang="en-US" sz="1200" dirty="0">
                 <a:solidFill>
                   <a:srgbClr val="00C6FF"/>
                 </a:solidFill>
                 <a:latin typeface="Calibri"/>
               </a:rPr>
-              <a:t> ▸ </a:t>
-            </a:r>
-            <a:r>
-              <a:rPr lang="uz-UZ" altLang="en-US" sz="1100" dirty="0">
-                <a:solidFill>
-                  <a:srgbClr val="B0C4DE"/>
-                </a:solidFill>
-                <a:latin typeface="Calibri"/>
-              </a:rPr>
-              <a:t>Real vaqtda hisoblash</a:t>
+              <a:t> ▸ Loyiha audit uchun</a:t>
+            </a:r>
+          </a:p>
+          <a:p>
+            <a:pPr>
+              <a:spcBef>
+                <a:spcPts val="100"/>
+              </a:spcBef>
+            </a:pPr>
+            <a:r>
+              <a:rPr lang="uz-UZ" altLang="en-US" sz="1200" dirty="0">
+                <a:solidFill>
+                  <a:srgbClr val="B0C4DE"/>
+                </a:solidFill>
+                <a:latin typeface="Calibri"/>
+              </a:rPr>
+              <a:t>    monitoring vositasi</a:t>
             </a:r>
           </a:p>
         </p:txBody>
@@ -7247,7 +7717,7 @@
 </file>
 
 <file path=ppt/slides/slide22.xml><?xml version="1.0" encoding="utf-8"?>
-<p:sld xmlns:p="http://schemas.openxmlformats.org/presentationml/2006/main" xmlns:a="http://schemas.openxmlformats.org/drawingml/2006/main" xmlns:r="http://schemas.openxmlformats.org/officeDocument/2006/relationships" xmlns:xdr="http://schemas.openxmlformats.org/drawingml/2006/spreadsheetDrawing">
+<p:sld xmlns:p="http://schemas.openxmlformats.org/presentationml/2006/main" xmlns:a="http://schemas.openxmlformats.org/drawingml/2006/main" xmlns:r="http://schemas.openxmlformats.org/officeDocument/2006/relationships">
   <p:cSld>
     <p:spTree>
       <p:nvGrpSpPr>
@@ -7309,7 +7779,7 @@
             <a:avLst/>
           </a:prstGeom>
           <a:solidFill>
-            <a:srgbClr val="0D1B2A"/>
+            <a:srgbClr val="0a1628"/>
           </a:solidFill>
           <a:ln>
             <a:noFill/>
@@ -7477,23 +7947,7 @@
                 </a:solidFill>
                 <a:latin typeface="Calibri"/>
               </a:rPr>
-              <a:t>    ▸ Real GitHub repozitoriyalari ustida sinov o'tkazildi</a:t>
-            </a:r>
-          </a:p>
-          <a:p>
-            <a:pPr>
-              <a:spcBef>
-                <a:spcPts val="40"/>
-              </a:spcBef>
-            </a:pPr>
-            <a:r>
-              <a:rPr lang="uz-UZ" altLang="en-US" sz="1200" dirty="0">
-                <a:solidFill>
-                  <a:srgbClr val="B0C4DE"/>
-                </a:solidFill>
-                <a:latin typeface="Calibri"/>
-              </a:rPr>
-              <a:t>   JavaScript ekotizimida yozilgan murakkab loyihalar</a:t>
+              <a:t>▸ Real GitHub repozitoriyalari ustida sinov: JavaScript ekotizimi, murakkab loyihalar</a:t>
             </a:r>
           </a:p>
           <a:p>
@@ -7525,7 +7979,7 @@
                 </a:solidFill>
                 <a:latin typeface="Calibri"/>
               </a:rPr>
-              <a:t>    ✅ Barcha 5 modul muvaffaqiyatli ishladi</a:t>
+              <a:t>✅ Barcha 5 modul muvaffaqiyatli ishladi</a:t>
             </a:r>
           </a:p>
           <a:p>
@@ -7541,7 +7995,7 @@
                 </a:solidFill>
                 <a:latin typeface="Calibri"/>
               </a:rPr>
-              <a:t>    ✅ AI o'zbek tilida professional semantik hisobot berdi</a:t>
+              <a:t>✅ AI o'zbek tilida professional semantik hisobot berdi</a:t>
             </a:r>
           </a:p>
           <a:p>
@@ -7557,7 +8011,7 @@
                 </a:solidFill>
                 <a:latin typeface="Calibri"/>
               </a:rPr>
-              <a:t>    ✅ Kiberxavfsizlik kamchiliklari avtomatik aniqlandi</a:t>
+              <a:t>✅ Kiberxavfsizlik kamchiliklari avtomatik aniqlandi</a:t>
             </a:r>
           </a:p>
           <a:p>
@@ -7573,7 +8027,7 @@
                 </a:solidFill>
                 <a:latin typeface="Calibri"/>
               </a:rPr>
-              <a:t>    ✅ Auto-fix tavsiyalari bilan tayyor kod namunalari berildi</a:t>
+              <a:t>✅ Auto-fix: tayyor optimallashtirilgan kod namunalari generatsiya qilindi</a:t>
             </a:r>
           </a:p>
           <a:p>
@@ -7605,55 +8059,7 @@
                 </a:solidFill>
                 <a:latin typeface="Calibri"/>
               </a:rPr>
-              <a:t>    📌 ASOSIY NATIJALAR:</a:t>
-            </a:r>
-          </a:p>
-          <a:p>
-            <a:pPr>
-              <a:spcBef>
-                <a:spcPts val="40"/>
-              </a:spcBef>
-            </a:pPr>
-            <a:r>
-              <a:rPr lang="uz-UZ" altLang="en-US" sz="1200" dirty="0">
-                <a:solidFill>
-                  <a:srgbClr val="B0C4DE"/>
-                </a:solidFill>
-                <a:latin typeface="Calibri"/>
-              </a:rPr>
-              <a:t>  ✅ Code Review vaqti 40-50% qisqardi</a:t>
-            </a:r>
-          </a:p>
-          <a:p>
-            <a:pPr>
-              <a:spcBef>
-                <a:spcPts val="40"/>
-              </a:spcBef>
-            </a:pPr>
-            <a:r>
-              <a:rPr lang="uz-UZ" altLang="en-US" sz="1200" dirty="0">
-                <a:solidFill>
-                  <a:srgbClr val="B0C4DE"/>
-                </a:solidFill>
-                <a:latin typeface="Calibri"/>
-              </a:rPr>
-              <a:t>  ✅ Mantiqiy xatolarni aniqlash aniqligi sezilarli oshdi</a:t>
-            </a:r>
-          </a:p>
-          <a:p>
-            <a:pPr>
-              <a:spcBef>
-                <a:spcPts val="40"/>
-              </a:spcBef>
-            </a:pPr>
-            <a:r>
-              <a:rPr lang="uz-UZ" altLang="en-US" sz="1200" dirty="0">
-                <a:solidFill>
-                  <a:srgbClr val="B0C4DE"/>
-                </a:solidFill>
-                <a:latin typeface="Calibri"/>
-              </a:rPr>
-              <a:t>  ✅ AI modeli hallucination kamaytirildi (qat'iy diff-based prompt)</a:t>
+              <a:t>📌 ASOSIY O'LCHOVLI NATIJALAR:</a:t>
             </a:r>
           </a:p>
           <a:p>
@@ -7679,13 +8085,141 @@
               </a:spcBef>
             </a:pPr>
             <a:r>
+              <a:rPr lang="uz-UZ" altLang="en-US" sz="1200" dirty="0">
+                <a:solidFill>
+                  <a:srgbClr val="B0C4DE"/>
+                </a:solidFill>
+                <a:latin typeface="Calibri"/>
+              </a:rPr>
+              <a:t>   Code Review vaqti 40-50% qisqardi</a:t>
+            </a:r>
+          </a:p>
+          <a:p>
+            <a:pPr>
+              <a:spcBef>
+                <a:spcPts val="40"/>
+              </a:spcBef>
+            </a:pPr>
+            <a:r>
+              <a:rPr lang="uz-UZ" altLang="en-US" sz="1200" dirty="0">
+                <a:solidFill>
+                  <a:srgbClr val="B0C4DE"/>
+                </a:solidFill>
+                <a:latin typeface="Calibri"/>
+              </a:rPr>
+              <a:t>   Mantiqiy xatolarni aniqlash aniqligi sezilarli oshdi</a:t>
+            </a:r>
+          </a:p>
+          <a:p>
+            <a:pPr>
+              <a:spcBef>
+                <a:spcPts val="40"/>
+              </a:spcBef>
+            </a:pPr>
+            <a:r>
+              <a:rPr lang="uz-UZ" altLang="en-US" sz="1200" dirty="0">
+                <a:solidFill>
+                  <a:srgbClr val="B0C4DE"/>
+                </a:solidFill>
+                <a:latin typeface="Calibri"/>
+              </a:rPr>
+              <a:t>   AI hallucination kamaytirish samarali ishladi</a:t>
+            </a:r>
+          </a:p>
+          <a:p>
+            <a:pPr>
+              <a:spcBef>
+                <a:spcPts val="40"/>
+              </a:spcBef>
+            </a:pPr>
+            <a:r>
+              <a:rPr lang="uz-UZ" altLang="en-US" sz="1200" dirty="0">
+                <a:solidFill>
+                  <a:srgbClr val="B0C4DE"/>
+                </a:solidFill>
+                <a:latin typeface="Calibri"/>
+              </a:rPr>
+              <a:t>   Dashboard: commitlar, qatorlar, mualliflar statistikasi real vaqtda</a:t>
+            </a:r>
+          </a:p>
+          <a:p>
+            <a:pPr>
+              <a:spcBef>
+                <a:spcPts val="20"/>
+              </a:spcBef>
+            </a:pPr>
+            <a:r>
+              <a:rPr lang="uz-UZ" altLang="en-US" sz="1400" dirty="0">
+                <a:solidFill>
+                  <a:srgbClr val="FFFFFF"/>
+                </a:solidFill>
+                <a:latin typeface="Calibri"/>
+              </a:rPr>
+              <a:t/>
+            </a:r>
+          </a:p>
+          <a:p>
+            <a:pPr>
+              <a:spcBef>
+                <a:spcPts val="40"/>
+              </a:spcBef>
+            </a:pPr>
+            <a:r>
               <a:rPr lang="uz-UZ" altLang="en-US" sz="1300" b="1" dirty="0">
                 <a:solidFill>
-                  <a:srgbClr val="00C6FF"/>
-                </a:solidFill>
-                <a:latin typeface="Calibri"/>
-              </a:rPr>
-              <a:t>    ▸ Dashboard: commitlar, qatorlar, mualliflar statistikasi real vaqtda</a:t>
+                  <a:srgbClr val="00E676"/>
+                </a:solidFill>
+                <a:latin typeface="Calibri"/>
+              </a:rPr>
+              <a:t>📌 Nofunksional talablar bajarildi:</a:t>
+            </a:r>
+          </a:p>
+          <a:p>
+            <a:pPr>
+              <a:spcBef>
+                <a:spcPts val="40"/>
+              </a:spcBef>
+            </a:pPr>
+            <a:r>
+              <a:rPr lang="uz-UZ" altLang="en-US" sz="1200" dirty="0">
+                <a:solidFill>
+                  <a:srgbClr val="B0C4DE"/>
+                </a:solidFill>
+                <a:latin typeface="Calibri"/>
+              </a:rPr>
+              <a:t>   Ishlash tezligi: oddiy API so'rovlar &lt; 200ms</a:t>
+            </a:r>
+          </a:p>
+          <a:p>
+            <a:pPr>
+              <a:spcBef>
+                <a:spcPts val="40"/>
+              </a:spcBef>
+            </a:pPr>
+            <a:r>
+              <a:rPr lang="uz-UZ" altLang="en-US" sz="1200" dirty="0">
+                <a:solidFill>
+                  <a:srgbClr val="B0C4DE"/>
+                </a:solidFill>
+                <a:latin typeface="Calibri"/>
+              </a:rPr>
+              <a:t>   Ishonchlilik: Global Error Handling + Retry mexanizmi</a:t>
+            </a:r>
+          </a:p>
+          <a:p>
+            <a:pPr>
+              <a:spcBef>
+                <a:spcPts val="40"/>
+              </a:spcBef>
+            </a:pPr>
+            <a:r>
+              <a:rPr lang="uz-UZ" altLang="en-US" sz="1200" dirty="0">
+                <a:solidFill>
+                  <a:srgbClr val="B0C4DE"/>
+                </a:solidFill>
+                <a:latin typeface="Calibri"/>
+              </a:rPr>
+              <a:t>   Xavfsizlik: Regex validatsiya + CORS + dotenv API kalit himoyasi</a:t>
             </a:r>
           </a:p>
         </p:txBody>
@@ -7699,7 +8233,7 @@
 </file>
 
 <file path=ppt/slides/slide23.xml><?xml version="1.0" encoding="utf-8"?>
-<p:sld xmlns:p="http://schemas.openxmlformats.org/presentationml/2006/main" xmlns:a="http://schemas.openxmlformats.org/drawingml/2006/main" xmlns:r="http://schemas.openxmlformats.org/officeDocument/2006/relationships" xmlns:xdr="http://schemas.openxmlformats.org/drawingml/2006/spreadsheetDrawing">
+<p:sld xmlns:p="http://schemas.openxmlformats.org/presentationml/2006/main" xmlns:a="http://schemas.openxmlformats.org/drawingml/2006/main" xmlns:r="http://schemas.openxmlformats.org/officeDocument/2006/relationships">
   <p:cSld>
     <p:spTree>
       <p:nvGrpSpPr>
@@ -7761,7 +8295,7 @@
             <a:avLst/>
           </a:prstGeom>
           <a:solidFill>
-            <a:srgbClr val="0D1B2A"/>
+            <a:srgbClr val="0a1628"/>
           </a:solidFill>
           <a:ln>
             <a:noFill/>
@@ -7929,39 +8463,39 @@
                 </a:solidFill>
                 <a:latin typeface="Calibri"/>
               </a:rPr>
-              <a:t>    ▸ ILMIY YANGILIK:</a:t>
-            </a:r>
-          </a:p>
-          <a:p>
-            <a:pPr>
-              <a:spcBef>
-                <a:spcPts val="40"/>
-              </a:spcBef>
-            </a:pPr>
-            <a:r>
-              <a:rPr lang="uz-UZ" altLang="en-US" sz="1200" dirty="0">
-                <a:solidFill>
-                  <a:srgbClr val="B0C4DE"/>
-                </a:solidFill>
-                <a:latin typeface="Calibri"/>
-              </a:rPr>
-              <a:t>   Kod o'zgarishlarini LLM yordamida o'zbek tilida semantik tahlil qilishning</a:t>
-            </a:r>
-          </a:p>
-          <a:p>
-            <a:pPr>
-              <a:spcBef>
-                <a:spcPts val="40"/>
-              </a:spcBef>
-            </a:pPr>
-            <a:r>
-              <a:rPr lang="uz-UZ" altLang="en-US" sz="1200" dirty="0">
-                <a:solidFill>
-                  <a:srgbClr val="B0C4DE"/>
-                </a:solidFill>
-                <a:latin typeface="Calibri"/>
-              </a:rPr>
-              <a:t>   integratsiyalashgan mantiqiy-arxitekturaviy modeli BIRINCHI MARTA ishlab chiqildi</a:t>
+              <a:t>▸ ILMIY YANGILIK:</a:t>
+            </a:r>
+          </a:p>
+          <a:p>
+            <a:pPr>
+              <a:spcBef>
+                <a:spcPts val="40"/>
+              </a:spcBef>
+            </a:pPr>
+            <a:r>
+              <a:rPr lang="uz-UZ" altLang="en-US" sz="1200" dirty="0">
+                <a:solidFill>
+                  <a:srgbClr val="B0C4DE"/>
+                </a:solidFill>
+                <a:latin typeface="Calibri"/>
+              </a:rPr>
+              <a:t>   Kod o'zgarishlarini LLM yordamida o'ZBEK TILIDA semantik tahlil qilishning</a:t>
+            </a:r>
+          </a:p>
+          <a:p>
+            <a:pPr>
+              <a:spcBef>
+                <a:spcPts val="40"/>
+              </a:spcBef>
+            </a:pPr>
+            <a:r>
+              <a:rPr lang="uz-UZ" altLang="en-US" sz="1200" dirty="0">
+                <a:solidFill>
+                  <a:srgbClr val="B0C4DE"/>
+                </a:solidFill>
+                <a:latin typeface="Calibri"/>
+              </a:rPr>
+              <a:t>   integratsiyalashgan mantiqiy-arxitekturaviy modeli birinchi marta ishlab chiqildi</a:t>
             </a:r>
           </a:p>
           <a:p>
@@ -7993,71 +8527,71 @@
                 </a:solidFill>
                 <a:latin typeface="Calibri"/>
               </a:rPr>
-              <a:t>    ▸ AMALIY AHAMIYAT:</a:t>
-            </a:r>
-          </a:p>
-          <a:p>
-            <a:pPr>
-              <a:spcBef>
-                <a:spcPts val="40"/>
-              </a:spcBef>
-            </a:pPr>
-            <a:r>
-              <a:rPr lang="uz-UZ" altLang="en-US" sz="1200" dirty="0">
-                <a:solidFill>
-                  <a:srgbClr val="B0C4DE"/>
-                </a:solidFill>
-                <a:latin typeface="Calibri"/>
-              </a:rPr>
-              <a:t>  ✅ IT kompaniyalar uchun Code Review avtomatizatsiyasi</a:t>
-            </a:r>
-          </a:p>
-          <a:p>
-            <a:pPr>
-              <a:spcBef>
-                <a:spcPts val="40"/>
-              </a:spcBef>
-            </a:pPr>
-            <a:r>
-              <a:rPr lang="uz-UZ" altLang="en-US" sz="1200" dirty="0">
-                <a:solidFill>
-                  <a:srgbClr val="B0C4DE"/>
-                </a:solidFill>
-                <a:latin typeface="Calibri"/>
-              </a:rPr>
-              <a:t>  ✅ Loyiha audit va monitoring tizimi — real vaqt</a:t>
-            </a:r>
-          </a:p>
-          <a:p>
-            <a:pPr>
-              <a:spcBef>
-                <a:spcPts val="40"/>
-              </a:spcBef>
-            </a:pPr>
-            <a:r>
-              <a:rPr lang="uz-UZ" altLang="en-US" sz="1200" dirty="0">
-                <a:solidFill>
-                  <a:srgbClr val="B0C4DE"/>
-                </a:solidFill>
-                <a:latin typeface="Calibri"/>
-              </a:rPr>
-              <a:t>  ✅ Jamoa faolligini kuzatish (Dashboard + Leaderboard)</a:t>
-            </a:r>
-          </a:p>
-          <a:p>
-            <a:pPr>
-              <a:spcBef>
-                <a:spcPts val="40"/>
-              </a:spcBef>
-            </a:pPr>
-            <a:r>
-              <a:rPr lang="uz-UZ" altLang="en-US" sz="1200" dirty="0">
-                <a:solidFill>
-                  <a:srgbClr val="B0C4DE"/>
-                </a:solidFill>
-                <a:latin typeface="Calibri"/>
-              </a:rPr>
-              <a:t>  ✅ Dasturiy xavfsizlikni ta'minlash vositasi</a:t>
+              <a:t>▸ AMALIY AHAMIYAT:</a:t>
+            </a:r>
+          </a:p>
+          <a:p>
+            <a:pPr>
+              <a:spcBef>
+                <a:spcPts val="40"/>
+              </a:spcBef>
+            </a:pPr>
+            <a:r>
+              <a:rPr lang="uz-UZ" altLang="en-US" sz="1200" dirty="0">
+                <a:solidFill>
+                  <a:srgbClr val="B0C4DE"/>
+                </a:solidFill>
+                <a:latin typeface="Calibri"/>
+              </a:rPr>
+              <a:t>   ✅ IT kompaniyalar uchun Code Review avtomatizatsiyasi</a:t>
+            </a:r>
+          </a:p>
+          <a:p>
+            <a:pPr>
+              <a:spcBef>
+                <a:spcPts val="40"/>
+              </a:spcBef>
+            </a:pPr>
+            <a:r>
+              <a:rPr lang="uz-UZ" altLang="en-US" sz="1200" dirty="0">
+                <a:solidFill>
+                  <a:srgbClr val="B0C4DE"/>
+                </a:solidFill>
+                <a:latin typeface="Calibri"/>
+              </a:rPr>
+              <a:t>   ✅ Loyiha audit va monitoring tizimi — real vaqt</a:t>
+            </a:r>
+          </a:p>
+          <a:p>
+            <a:pPr>
+              <a:spcBef>
+                <a:spcPts val="40"/>
+              </a:spcBef>
+            </a:pPr>
+            <a:r>
+              <a:rPr lang="uz-UZ" altLang="en-US" sz="1200" dirty="0">
+                <a:solidFill>
+                  <a:srgbClr val="B0C4DE"/>
+                </a:solidFill>
+                <a:latin typeface="Calibri"/>
+              </a:rPr>
+              <a:t>   ✅ Jamoa faolligini kuzatish (Dashboard + Leaderboard)</a:t>
+            </a:r>
+          </a:p>
+          <a:p>
+            <a:pPr>
+              <a:spcBef>
+                <a:spcPts val="40"/>
+              </a:spcBef>
+            </a:pPr>
+            <a:r>
+              <a:rPr lang="uz-UZ" altLang="en-US" sz="1200" dirty="0">
+                <a:solidFill>
+                  <a:srgbClr val="B0C4DE"/>
+                </a:solidFill>
+                <a:latin typeface="Calibri"/>
+              </a:rPr>
+              <a:t>   ✅ Dasturiy xavfsizlikni ta'minlash vositasi</a:t>
             </a:r>
           </a:p>
           <a:p>
@@ -8089,55 +8623,103 @@
                 </a:solidFill>
                 <a:latin typeface="Calibri"/>
               </a:rPr>
-              <a:t>    ▸ Nofunksional talablar bajarildi:</a:t>
-            </a:r>
-          </a:p>
-          <a:p>
-            <a:pPr>
-              <a:spcBef>
-                <a:spcPts val="40"/>
-              </a:spcBef>
-            </a:pPr>
-            <a:r>
-              <a:rPr lang="uz-UZ" altLang="en-US" sz="1200" dirty="0">
-                <a:solidFill>
-                  <a:srgbClr val="B0C4DE"/>
-                </a:solidFill>
-                <a:latin typeface="Calibri"/>
-              </a:rPr>
-              <a:t>   Ishlash tezligi: oddiy API so'rovlar &lt; 200ms</a:t>
-            </a:r>
-          </a:p>
-          <a:p>
-            <a:pPr>
-              <a:spcBef>
-                <a:spcPts val="40"/>
-              </a:spcBef>
-            </a:pPr>
-            <a:r>
-              <a:rPr lang="uz-UZ" altLang="en-US" sz="1200" dirty="0">
-                <a:solidFill>
-                  <a:srgbClr val="B0C4DE"/>
-                </a:solidFill>
-                <a:latin typeface="Calibri"/>
-              </a:rPr>
-              <a:t>   Ishonchlilik: Global Error Handling + Retry mexanizmi</a:t>
-            </a:r>
-          </a:p>
-          <a:p>
-            <a:pPr>
-              <a:spcBef>
-                <a:spcPts val="40"/>
-              </a:spcBef>
-            </a:pPr>
-            <a:r>
-              <a:rPr lang="uz-UZ" altLang="en-US" sz="1200" dirty="0">
-                <a:solidFill>
-                  <a:srgbClr val="B0C4DE"/>
-                </a:solidFill>
-                <a:latin typeface="Calibri"/>
-              </a:rPr>
-              <a:t>   Xavfsizlik: Regex validatsiya + CORS + dotenv API kalit</a:t>
+              <a:t>▸ KELAJAKDAGI CHEKLOVLAR:</a:t>
+            </a:r>
+          </a:p>
+          <a:p>
+            <a:pPr>
+              <a:spcBef>
+                <a:spcPts val="40"/>
+              </a:spcBef>
+            </a:pPr>
+            <a:r>
+              <a:rPr lang="uz-UZ" altLang="en-US" sz="1200" dirty="0">
+                <a:solidFill>
+                  <a:srgbClr val="B0C4DE"/>
+                </a:solidFill>
+                <a:latin typeface="Calibri"/>
+              </a:rPr>
+              <a:t>   Tashqi bulutli API — ma'lumotlar xavfsizligi masalasi</a:t>
+            </a:r>
+          </a:p>
+          <a:p>
+            <a:pPr>
+              <a:spcBef>
+                <a:spcPts val="40"/>
+              </a:spcBef>
+            </a:pPr>
+            <a:r>
+              <a:rPr lang="uz-UZ" altLang="en-US" sz="1200" dirty="0">
+                <a:solidFill>
+                  <a:srgbClr val="B0C4DE"/>
+                </a:solidFill>
+                <a:latin typeface="Calibri"/>
+              </a:rPr>
+              <a:t>   Lokal LLM modeli zarur (Llama-3, CodeLlama, DeepSeek-Coder)</a:t>
+            </a:r>
+          </a:p>
+          <a:p>
+            <a:pPr>
+              <a:spcBef>
+                <a:spcPts val="20"/>
+              </a:spcBef>
+            </a:pPr>
+            <a:r>
+              <a:rPr lang="uz-UZ" altLang="en-US" sz="1400" dirty="0">
+                <a:solidFill>
+                  <a:srgbClr val="FFFFFF"/>
+                </a:solidFill>
+                <a:latin typeface="Calibri"/>
+              </a:rPr>
+              <a:t/>
+            </a:r>
+          </a:p>
+          <a:p>
+            <a:pPr>
+              <a:spcBef>
+                <a:spcPts val="40"/>
+              </a:spcBef>
+            </a:pPr>
+            <a:r>
+              <a:rPr lang="uz-UZ" altLang="en-US" sz="1300" b="1" dirty="0">
+                <a:solidFill>
+                  <a:srgbClr val="00E676"/>
+                </a:solidFill>
+                <a:latin typeface="Calibri"/>
+              </a:rPr>
+              <a:t>📌 IQTISODIY AHAMIYAT:</a:t>
+            </a:r>
+          </a:p>
+          <a:p>
+            <a:pPr>
+              <a:spcBef>
+                <a:spcPts val="40"/>
+              </a:spcBef>
+            </a:pPr>
+            <a:r>
+              <a:rPr lang="uz-UZ" altLang="en-US" sz="1200" dirty="0">
+                <a:solidFill>
+                  <a:srgbClr val="B0C4DE"/>
+                </a:solidFill>
+                <a:latin typeface="Calibri"/>
+              </a:rPr>
+              <a:t>   Adapter Pattern orqali tashqi + lokal LLM ga moslashtirilgan</a:t>
+            </a:r>
+          </a:p>
+          <a:p>
+            <a:pPr>
+              <a:spcBef>
+                <a:spcPts val="40"/>
+              </a:spcBef>
+            </a:pPr>
+            <a:r>
+              <a:rPr lang="uz-UZ" altLang="en-US" sz="1200" dirty="0">
+                <a:solidFill>
+                  <a:srgbClr val="B0C4DE"/>
+                </a:solidFill>
+                <a:latin typeface="Calibri"/>
+              </a:rPr>
+              <a:t>   Korporativ NDAs va GDPR talablariga javob bera oladi</a:t>
             </a:r>
           </a:p>
         </p:txBody>
@@ -8151,7 +8733,7 @@
 </file>
 
 <file path=ppt/slides/slide24.xml><?xml version="1.0" encoding="utf-8"?>
-<p:sld xmlns:p="http://schemas.openxmlformats.org/presentationml/2006/main" xmlns:a="http://schemas.openxmlformats.org/drawingml/2006/main" xmlns:r="http://schemas.openxmlformats.org/officeDocument/2006/relationships" xmlns:xdr="http://schemas.openxmlformats.org/drawingml/2006/spreadsheetDrawing">
+<p:sld xmlns:p="http://schemas.openxmlformats.org/presentationml/2006/main" xmlns:a="http://schemas.openxmlformats.org/drawingml/2006/main" xmlns:r="http://schemas.openxmlformats.org/officeDocument/2006/relationships">
   <p:cSld>
     <p:spTree>
       <p:nvGrpSpPr>
@@ -8213,7 +8795,7 @@
             <a:avLst/>
           </a:prstGeom>
           <a:solidFill>
-            <a:srgbClr val="0D1B2A"/>
+            <a:srgbClr val="0a1628"/>
           </a:solidFill>
           <a:ln>
             <a:noFill/>
@@ -8381,7 +8963,7 @@
                 </a:solidFill>
                 <a:latin typeface="Calibri"/>
               </a:rPr>
-              <a:t>    1️⃣  An'anaviy diff vositalari sintaktik darajada qoladi</a:t>
+              <a:t>1️⃣  An'anaviy diff vositalari faqat sintaktik darajada qoladi</a:t>
             </a:r>
           </a:p>
           <a:p>
@@ -8429,7 +9011,7 @@
                 </a:solidFill>
                 <a:latin typeface="Calibri"/>
               </a:rPr>
-              <a:t>    2️⃣  Router-Controller + React SPA arxitekturasi</a:t>
+              <a:t>2️⃣  Router-Controller + React SPA arxitekturasi</a:t>
             </a:r>
           </a:p>
           <a:p>
@@ -8477,23 +9059,23 @@
                 </a:solidFill>
                 <a:latin typeface="Calibri"/>
               </a:rPr>
-              <a:t>    3️⃣  Gemini 2.5 Flash: o'zbek tilida professional semantik hisobot</a:t>
-            </a:r>
-          </a:p>
-          <a:p>
-            <a:pPr>
-              <a:spcBef>
-                <a:spcPts val="40"/>
-              </a:spcBef>
-            </a:pPr>
-            <a:r>
-              <a:rPr lang="uz-UZ" altLang="en-US" sz="1200" dirty="0">
-                <a:solidFill>
-                  <a:srgbClr val="B0C4DE"/>
-                </a:solidFill>
-                <a:latin typeface="Calibri"/>
-              </a:rPr>
-              <a:t>    Prompt Engineering 3 qatlamli tuzilmasi muvaffaqiyatli ishladi</a:t>
+              <a:t>3️⃣  Gemini 2.5 Flash: o'zbek tilida professional semantik hisobot</a:t>
+            </a:r>
+          </a:p>
+          <a:p>
+            <a:pPr>
+              <a:spcBef>
+                <a:spcPts val="40"/>
+              </a:spcBef>
+            </a:pPr>
+            <a:r>
+              <a:rPr lang="uz-UZ" altLang="en-US" sz="1200" dirty="0">
+                <a:solidFill>
+                  <a:srgbClr val="B0C4DE"/>
+                </a:solidFill>
+                <a:latin typeface="Calibri"/>
+              </a:rPr>
+              <a:t>    3 qatlamli Prompt Engineering tuzilmasi muvaffaqiyatli ishladi</a:t>
             </a:r>
           </a:p>
           <a:p>
@@ -8525,7 +9107,7 @@
                 </a:solidFill>
                 <a:latin typeface="Calibri"/>
               </a:rPr>
-              <a:t>    4️⃣  Real sinov natijasi:</a:t>
+              <a:t>4️⃣  Real sinov natijalari:</a:t>
             </a:r>
           </a:p>
           <a:p>
@@ -8589,7 +9171,7 @@
                 </a:solidFill>
                 <a:latin typeface="Calibri"/>
               </a:rPr>
-              <a:t>    📌 Ishlab chiqilgan SPA veb-platforma IT kompaniyalar uchun</a:t>
+              <a:t>📌 Ishlab chiqilgan SPA veb-platforma IT kompaniyalar uchun</a:t>
             </a:r>
           </a:p>
           <a:p>
@@ -8619,7 +9201,7 @@
 </file>
 
 <file path=ppt/slides/slide25.xml><?xml version="1.0" encoding="utf-8"?>
-<p:sld xmlns:p="http://schemas.openxmlformats.org/presentationml/2006/main" xmlns:a="http://schemas.openxmlformats.org/drawingml/2006/main" xmlns:r="http://schemas.openxmlformats.org/officeDocument/2006/relationships" xmlns:xdr="http://schemas.openxmlformats.org/drawingml/2006/spreadsheetDrawing">
+<p:sld xmlns:p="http://schemas.openxmlformats.org/presentationml/2006/main" xmlns:a="http://schemas.openxmlformats.org/drawingml/2006/main" xmlns:r="http://schemas.openxmlformats.org/officeDocument/2006/relationships">
   <p:cSld>
     <p:spTree>
       <p:nvGrpSpPr>
@@ -8681,7 +9263,7 @@
             <a:avLst/>
           </a:prstGeom>
           <a:solidFill>
-            <a:srgbClr val="0D1B2A"/>
+            <a:srgbClr val="0a1628"/>
           </a:solidFill>
           <a:ln>
             <a:noFill/>
@@ -8849,23 +9431,23 @@
                 </a:solidFill>
                 <a:latin typeface="Calibri"/>
               </a:rPr>
-              <a:t>    🔷 CI/CD Integratsiya (GitHub Actions plugin)</a:t>
-            </a:r>
-          </a:p>
-          <a:p>
-            <a:pPr>
-              <a:spcBef>
-                <a:spcPts val="40"/>
-              </a:spcBef>
-            </a:pPr>
-            <a:r>
-              <a:rPr lang="uz-UZ" altLang="en-US" sz="1200" dirty="0">
-                <a:solidFill>
-                  <a:srgbClr val="B0C4DE"/>
-                </a:solidFill>
-                <a:latin typeface="Calibri"/>
-              </a:rPr>
-              <a:t>   Har commit da — avtomatik AI tahlil, dasturchiga ogohlantirish</a:t>
+              <a:t>🔷 CI/CD Integratsiya — GitHub Actions/GitLab CI plagin</a:t>
+            </a:r>
+          </a:p>
+          <a:p>
+            <a:pPr>
+              <a:spcBef>
+                <a:spcPts val="40"/>
+              </a:spcBef>
+            </a:pPr>
+            <a:r>
+              <a:rPr lang="uz-UZ" altLang="en-US" sz="1200" dirty="0">
+                <a:solidFill>
+                  <a:srgbClr val="B0C4DE"/>
+                </a:solidFill>
+                <a:latin typeface="Calibri"/>
+              </a:rPr>
+              <a:t>   Har commitda avtomatik AI tahlil → dasturchi ogohlantirish oladi</a:t>
             </a:r>
           </a:p>
           <a:p>
@@ -8897,7 +9479,7 @@
                 </a:solidFill>
                 <a:latin typeface="Calibri"/>
               </a:rPr>
-              <a:t>    🔷 Lokal LLM modeli (Llama-3, CodeLlama, DeepSeek-Coder)</a:t>
+              <a:t>🔷 Lokal LLM modeli — Llama-3, CodeLlama, DeepSeek-Coder</a:t>
             </a:r>
           </a:p>
           <a:p>
@@ -8945,7 +9527,7 @@
                 </a:solidFill>
                 <a:latin typeface="Calibri"/>
               </a:rPr>
-              <a:t>    🔷 Shaxsiylashtirilgan Prompt Sozlash Paneli</a:t>
+              <a:t>🔷 Shaxsiylashtirilgan Prompt Sozlash Paneli</a:t>
             </a:r>
           </a:p>
           <a:p>
@@ -8993,7 +9575,7 @@
                 </a:solidFill>
                 <a:latin typeface="Calibri"/>
               </a:rPr>
-              <a:t>    🔷 Interaktiv Vizualizatsiya</a:t>
+              <a:t>🔷 Interaktiv Vizualizatsiya</a:t>
             </a:r>
           </a:p>
           <a:p>
@@ -9041,7 +9623,7 @@
                 </a:solidFill>
                 <a:latin typeface="Calibri"/>
               </a:rPr>
-              <a:t>    🔷 Ko'p tillik qo'llab-quvvatlash</a:t>
+              <a:t>🔷 Ko'p tillik qo'llab-quvvatlash</a:t>
             </a:r>
           </a:p>
           <a:p>
@@ -9089,7 +9671,23 @@
                 </a:solidFill>
                 <a:latin typeface="Calibri"/>
               </a:rPr>
-              <a:t>    🔷 Korporativ Dashboard — Jamoa samaradorligi va audit tizimi</a:t>
+              <a:t>🔷 Korporativ Dashboard — Jamoa samaradorligi monitoring tizimi</a:t>
+            </a:r>
+          </a:p>
+          <a:p>
+            <a:pPr>
+              <a:spcBef>
+                <a:spcPts val="40"/>
+              </a:spcBef>
+            </a:pPr>
+            <a:r>
+              <a:rPr lang="uz-UZ" altLang="en-US" sz="1200" dirty="0">
+                <a:solidFill>
+                  <a:srgbClr val="B0C4DE"/>
+                </a:solidFill>
+                <a:latin typeface="Calibri"/>
+              </a:rPr>
+              <a:t>   SonarQube + LLM kombinatsiyasi — to'liq kod sifat portali</a:t>
             </a:r>
           </a:p>
         </p:txBody>
@@ -9103,7 +9701,7 @@
 </file>
 
 <file path=ppt/slides/slide26.xml><?xml version="1.0" encoding="utf-8"?>
-<p:sld xmlns:p="http://schemas.openxmlformats.org/presentationml/2006/main" xmlns:a="http://schemas.openxmlformats.org/drawingml/2006/main" xmlns:r="http://schemas.openxmlformats.org/officeDocument/2006/relationships" xmlns:xdr="http://schemas.openxmlformats.org/drawingml/2006/spreadsheetDrawing">
+<p:sld xmlns:p="http://schemas.openxmlformats.org/presentationml/2006/main" xmlns:a="http://schemas.openxmlformats.org/drawingml/2006/main" xmlns:r="http://schemas.openxmlformats.org/officeDocument/2006/relationships">
   <p:cSld>
     <p:spTree>
       <p:nvGrpSpPr>
@@ -9219,10 +9817,8 @@
             <a:off x="1080000" y="900000"/>
             <a:ext cx="10033200" cy="5040000"/>
           </a:xfrm>
-          <a:prstGeom prst="roundRect">
-            <a:avLst>
-              <a:gd name="adj" fmla="val 20000"/>
-            </a:avLst>
+          <a:prstGeom prst="rect">
+            <a:avLst/>
           </a:prstGeom>
           <a:solidFill>
             <a:srgbClr val="0F2547"/>
@@ -9329,7 +9925,7 @@
           <a:p>
             <a:pPr algn="ctr"/>
             <a:r>
-              <a:rPr lang="uz-UZ" altLang="en-US" sz="3200" b="1" dirty="0">
+              <a:rPr lang="uz-UZ" altLang="en-US" sz="3400" b="1" dirty="0">
                 <a:solidFill>
                   <a:srgbClr val="FFFFFF"/>
                 </a:solidFill>
@@ -9378,7 +9974,7 @@
         <p:spPr>
           <a:xfrm>
             <a:off x="1080000" y="2412000"/>
-            <a:ext cx="10033200" cy="2880000"/>
+            <a:ext cx="10033200" cy="3240000"/>
           </a:xfrm>
           <a:prstGeom prst="rect">
             <a:avLst/>
@@ -9391,23 +9987,23 @@
           <a:p>
             <a:pPr algn="ctr">
               <a:spcBef>
-                <a:spcPts val="150"/>
-              </a:spcBef>
-            </a:pPr>
-            <a:r>
-              <a:rPr lang="uz-UZ" altLang="en-US" sz="1500" i="1" dirty="0">
-                <a:solidFill>
-                  <a:srgbClr val="B0C4DE"/>
-                </a:solidFill>
-                <a:latin typeface="Calibri"/>
-              </a:rPr>
-              <a:t>Dasturiy versiyalar tahlil tizimi</a:t>
+                <a:spcPts val="120"/>
+              </a:spcBef>
+            </a:pPr>
+            <a:r>
+              <a:rPr lang="uz-UZ" altLang="en-US" sz="1400" i="1" dirty="0">
+                <a:solidFill>
+                  <a:srgbClr val="B0C4DE"/>
+                </a:solidFill>
+                <a:latin typeface="Calibri"/>
+              </a:rPr>
+              <a:t>Dasturiy versiyalar tahlil tizimi (SPA veb-platforma)</a:t>
             </a:r>
           </a:p>
           <a:p>
             <a:pPr algn="ctr">
               <a:spcBef>
-                <a:spcPts val="80"/>
+                <a:spcPts val="60"/>
               </a:spcBef>
             </a:pPr>
             <a:r>
@@ -9417,13 +10013,13 @@
                 </a:solidFill>
                 <a:latin typeface="Calibri"/>
               </a:rPr>
-              <a:t>─────────────────────────────────────────</a:t>
+              <a:t>─────────────────────────────────────</a:t>
             </a:r>
           </a:p>
           <a:p>
             <a:pPr algn="ctr">
               <a:spcBef>
-                <a:spcPts val="150"/>
+                <a:spcPts val="130"/>
               </a:spcBef>
             </a:pPr>
             <a:r>
@@ -9439,7 +10035,7 @@
           <a:p>
             <a:pPr algn="ctr">
               <a:spcBef>
-                <a:spcPts val="120"/>
+                <a:spcPts val="110"/>
               </a:spcBef>
             </a:pPr>
             <a:r>
@@ -9455,7 +10051,7 @@
           <a:p>
             <a:pPr algn="ctr">
               <a:spcBef>
-                <a:spcPts val="120"/>
+                <a:spcPts val="110"/>
               </a:spcBef>
             </a:pPr>
             <a:r>
@@ -9471,7 +10067,7 @@
           <a:p>
             <a:pPr algn="ctr">
               <a:spcBef>
-                <a:spcPts val="80"/>
+                <a:spcPts val="60"/>
               </a:spcBef>
             </a:pPr>
             <a:r>
@@ -9481,13 +10077,13 @@
                 </a:solidFill>
                 <a:latin typeface="Calibri"/>
               </a:rPr>
-              <a:t>─────────────────────────────────────────</a:t>
+              <a:t>─────────────────────────────────────</a:t>
             </a:r>
           </a:p>
           <a:p>
             <a:pPr algn="ctr">
               <a:spcBef>
-                <a:spcPts val="150"/>
+                <a:spcPts val="130"/>
               </a:spcBef>
             </a:pPr>
             <a:r>
@@ -9503,7 +10099,7 @@
           <a:p>
             <a:pPr algn="ctr">
               <a:spcBef>
-                <a:spcPts val="150"/>
+                <a:spcPts val="130"/>
               </a:spcBef>
             </a:pPr>
             <a:r>
@@ -9523,13 +10119,13 @@
               </a:spcBef>
             </a:pPr>
             <a:r>
-              <a:rPr lang="uz-UZ" altLang="en-US" sz="1500" b="1" dirty="0">
+              <a:rPr lang="uz-UZ" altLang="en-US" sz="1600" b="1" dirty="0">
                 <a:solidFill>
                   <a:srgbClr val="00E676"/>
                 </a:solidFill>
                 <a:latin typeface="Calibri"/>
               </a:rPr>
-              <a:t>Savollar uchun tayyorman!</a:t>
+              <a:t>💬  Savollar uchun tayyorman!</a:t>
             </a:r>
           </a:p>
         </p:txBody>
@@ -9543,7 +10139,7 @@
 </file>
 
 <file path=ppt/slides/slide3.xml><?xml version="1.0" encoding="utf-8"?>
-<p:sld xmlns:p="http://schemas.openxmlformats.org/presentationml/2006/main" xmlns:a="http://schemas.openxmlformats.org/drawingml/2006/main" xmlns:r="http://schemas.openxmlformats.org/officeDocument/2006/relationships" xmlns:xdr="http://schemas.openxmlformats.org/drawingml/2006/spreadsheetDrawing">
+<p:sld xmlns:p="http://schemas.openxmlformats.org/presentationml/2006/main" xmlns:a="http://schemas.openxmlformats.org/drawingml/2006/main" xmlns:r="http://schemas.openxmlformats.org/officeDocument/2006/relationships">
   <p:cSld>
     <p:spTree>
       <p:nvGrpSpPr>
@@ -9605,7 +10201,7 @@
             <a:avLst/>
           </a:prstGeom>
           <a:solidFill>
-            <a:srgbClr val="0D1B2A"/>
+            <a:srgbClr val="0a1628"/>
           </a:solidFill>
           <a:ln>
             <a:noFill/>
@@ -9773,7 +10369,7 @@
                 </a:solidFill>
                 <a:latin typeface="Calibri"/>
               </a:rPr>
-              <a:t>    ▸ Zamonaviy dasturiy mahsulotlar o'ta murakkab va ko'p qatlamli arxitekturaga ega</a:t>
+              <a:t>▸ Zamonaviy dasturiy mahsulotlar o'ta murakkab, ko'p qatlamli arxitekturaga ega</a:t>
             </a:r>
           </a:p>
           <a:p>
@@ -9789,7 +10385,7 @@
                 </a:solidFill>
                 <a:latin typeface="Calibri"/>
               </a:rPr>
-              <a:t>    ▸ Jamoaviy ishlashda minglab o'zgarishlar (commit) kiritiladi — nazorat zarur</a:t>
+              <a:t>▸ Jamoaviy ishlashda minglab commit (o'zgarish) kiritiladi — nazorat zarur</a:t>
             </a:r>
           </a:p>
           <a:p>
@@ -9817,59 +10413,59 @@
             <a:r>
               <a:rPr lang="uz-UZ" altLang="en-US" sz="1300" dirty="0">
                 <a:solidFill>
-                  <a:srgbClr val="FF4444"/>
-                </a:solidFill>
-                <a:latin typeface="Calibri"/>
-              </a:rPr>
-              <a:t>    ⚠ Muammo: An'anaviy Diff vositalari FAQAT sintaktik farqlarni ko'rsatadi</a:t>
-            </a:r>
-          </a:p>
-          <a:p>
-            <a:pPr>
-              <a:spcBef>
-                <a:spcPts val="40"/>
-              </a:spcBef>
-            </a:pPr>
-            <a:r>
-              <a:rPr lang="uz-UZ" altLang="en-US" sz="1200" dirty="0">
-                <a:solidFill>
-                  <a:srgbClr val="B0C4DE"/>
-                </a:solidFill>
-                <a:latin typeface="Calibri"/>
-              </a:rPr>
-              <a:t>  • Mantiqiy ma'no va xavfsizlikka ta'sir aniqlanmaydi</a:t>
-            </a:r>
-          </a:p>
-          <a:p>
-            <a:pPr>
-              <a:spcBef>
-                <a:spcPts val="40"/>
-              </a:spcBef>
-            </a:pPr>
-            <a:r>
-              <a:rPr lang="uz-UZ" altLang="en-US" sz="1200" dirty="0">
-                <a:solidFill>
-                  <a:srgbClr val="B0C4DE"/>
-                </a:solidFill>
-                <a:latin typeface="Calibri"/>
-              </a:rPr>
-              <a:t>  • Kodi qayta ko'rib chiqish (Code Review) inson resursini ko'p talab qiladi</a:t>
-            </a:r>
-          </a:p>
-          <a:p>
-            <a:pPr>
-              <a:spcBef>
-                <a:spcPts val="40"/>
-              </a:spcBef>
-            </a:pPr>
-            <a:r>
-              <a:rPr lang="uz-UZ" altLang="en-US" sz="1200" dirty="0">
-                <a:solidFill>
-                  <a:srgbClr val="B0C4DE"/>
-                </a:solidFill>
-                <a:latin typeface="Calibri"/>
-              </a:rPr>
-              <a:t>  • Yirik loyihalarda xatolar o'tkazib yuboriladi — xavfli!</a:t>
+                  <a:srgbClr val="FF5252"/>
+                </a:solidFill>
+                <a:latin typeface="Calibri"/>
+              </a:rPr>
+              <a:t>⚠ Asosiy MUAMMO: An'anaviy Diff vositalari FAQAT sintaktik tahlil qiladi</a:t>
+            </a:r>
+          </a:p>
+          <a:p>
+            <a:pPr>
+              <a:spcBef>
+                <a:spcPts val="40"/>
+              </a:spcBef>
+            </a:pPr>
+            <a:r>
+              <a:rPr lang="uz-UZ" altLang="en-US" sz="1200" dirty="0">
+                <a:solidFill>
+                  <a:srgbClr val="B0C4DE"/>
+                </a:solidFill>
+                <a:latin typeface="Calibri"/>
+              </a:rPr>
+              <a:t>   • Qizil/yashil qatorlar — nima o'zgarganini KO'RSATADI</a:t>
+            </a:r>
+          </a:p>
+          <a:p>
+            <a:pPr>
+              <a:spcBef>
+                <a:spcPts val="40"/>
+              </a:spcBef>
+            </a:pPr>
+            <a:r>
+              <a:rPr lang="uz-UZ" altLang="en-US" sz="1200" dirty="0">
+                <a:solidFill>
+                  <a:srgbClr val="B0C4DE"/>
+                </a:solidFill>
+                <a:latin typeface="Calibri"/>
+              </a:rPr>
+              <a:t>   • Lekin NIMA UCHUN o'zgardi? — hech qachon tushuntirib BERMAYDI</a:t>
+            </a:r>
+          </a:p>
+          <a:p>
+            <a:pPr>
+              <a:spcBef>
+                <a:spcPts val="40"/>
+              </a:spcBef>
+            </a:pPr>
+            <a:r>
+              <a:rPr lang="uz-UZ" altLang="en-US" sz="1200" dirty="0">
+                <a:solidFill>
+                  <a:srgbClr val="B0C4DE"/>
+                </a:solidFill>
+                <a:latin typeface="Calibri"/>
+              </a:rPr>
+              <a:t>   • Kiberxavfsizlik xatarlari, mantiqiy muammolar aniqlanmaydi</a:t>
             </a:r>
           </a:p>
           <a:p>
@@ -9901,7 +10497,7 @@
                 </a:solidFill>
                 <a:latin typeface="Calibri"/>
               </a:rPr>
-              <a:t>    ✅ Yechim: LLM (Large Language Models) texnologiyasini integratsiya qilish</a:t>
+              <a:t>✅ Yechim: LLM (Large Language Models) texnologiyasi</a:t>
             </a:r>
           </a:p>
           <a:p>
@@ -9917,7 +10513,7 @@
                 </a:solidFill>
                 <a:latin typeface="Calibri"/>
               </a:rPr>
-              <a:t>    ▸ Google Gemini 2.5 Flash — o'zbek tilida semantik tahlil</a:t>
+              <a:t>▸ Google Gemini 2.5 Flash — o'zbek tilida semantik tahlil</a:t>
             </a:r>
           </a:p>
           <a:p>
@@ -9933,7 +10529,23 @@
                 </a:solidFill>
                 <a:latin typeface="Calibri"/>
               </a:rPr>
-              <a:t>    ▸ React + Node.js + Express.js — zamonaviy SPA veb-platforma</a:t>
+              <a:t>▸ React + Node.js + Express.js — zamonaviy SPA veb-platforma</a:t>
+            </a:r>
+          </a:p>
+          <a:p>
+            <a:pPr>
+              <a:spcBef>
+                <a:spcPts val="40"/>
+              </a:spcBef>
+            </a:pPr>
+            <a:r>
+              <a:rPr lang="uz-UZ" altLang="en-US" sz="1300" b="1" dirty="0">
+                <a:solidFill>
+                  <a:srgbClr val="00C6FF"/>
+                </a:solidFill>
+                <a:latin typeface="Calibri"/>
+              </a:rPr>
+              <a:t>▸ Natija: Code Review vaqti 40-50% qisqaradi</a:t>
             </a:r>
           </a:p>
         </p:txBody>
@@ -9947,7 +10559,7 @@
 </file>
 
 <file path=ppt/slides/slide4.xml><?xml version="1.0" encoding="utf-8"?>
-<p:sld xmlns:p="http://schemas.openxmlformats.org/presentationml/2006/main" xmlns:a="http://schemas.openxmlformats.org/drawingml/2006/main" xmlns:r="http://schemas.openxmlformats.org/officeDocument/2006/relationships" xmlns:xdr="http://schemas.openxmlformats.org/drawingml/2006/spreadsheetDrawing">
+<p:sld xmlns:p="http://schemas.openxmlformats.org/presentationml/2006/main" xmlns:a="http://schemas.openxmlformats.org/drawingml/2006/main" xmlns:r="http://schemas.openxmlformats.org/officeDocument/2006/relationships">
   <p:cSld>
     <p:spTree>
       <p:nvGrpSpPr>
@@ -10009,7 +10621,7 @@
             <a:avLst/>
           </a:prstGeom>
           <a:solidFill>
-            <a:srgbClr val="0D1B2A"/>
+            <a:srgbClr val="0a1628"/>
           </a:solidFill>
           <a:ln>
             <a:noFill/>
@@ -10177,23 +10789,39 @@
                 </a:solidFill>
                 <a:latin typeface="Calibri"/>
               </a:rPr>
-              <a:t>    📌 MAQSAD: Versiyalar o'zgarishlarini tahlil qiluvchi SPA veb-platforma yaratish</a:t>
-            </a:r>
-          </a:p>
-          <a:p>
-            <a:pPr>
-              <a:spcBef>
-                <a:spcPts val="40"/>
-              </a:spcBef>
-            </a:pPr>
-            <a:r>
-              <a:rPr lang="uz-UZ" altLang="en-US" sz="1200" dirty="0">
-                <a:solidFill>
-                  <a:srgbClr val="B0C4DE"/>
-                </a:solidFill>
-                <a:latin typeface="Calibri"/>
-              </a:rPr>
-              <a:t>   Dasturiy kod o'zgarishlarini qatorlar darajasida aniqlash va AI bilan izohlash</a:t>
+              <a:t>📌 ASOSIY MAQSAD:</a:t>
+            </a:r>
+          </a:p>
+          <a:p>
+            <a:pPr>
+              <a:spcBef>
+                <a:spcPts val="40"/>
+              </a:spcBef>
+            </a:pPr>
+            <a:r>
+              <a:rPr lang="uz-UZ" altLang="en-US" sz="1200" dirty="0">
+                <a:solidFill>
+                  <a:srgbClr val="B0C4DE"/>
+                </a:solidFill>
+                <a:latin typeface="Calibri"/>
+              </a:rPr>
+              <a:t>   Versiyalar orasidagi o'zgarishlarni qatorlar darajasida aniqlash,</a:t>
+            </a:r>
+          </a:p>
+          <a:p>
+            <a:pPr>
+              <a:spcBef>
+                <a:spcPts val="40"/>
+              </a:spcBef>
+            </a:pPr>
+            <a:r>
+              <a:rPr lang="uz-UZ" altLang="en-US" sz="1200" dirty="0">
+                <a:solidFill>
+                  <a:srgbClr val="B0C4DE"/>
+                </a:solidFill>
+                <a:latin typeface="Calibri"/>
+              </a:rPr>
+              <a:t>   AI yordamida o'zbek tilida semantik tahlil qiluvchi SPA platforma yaratish</a:t>
             </a:r>
           </a:p>
           <a:p>
@@ -10225,7 +10853,7 @@
                 </a:solidFill>
                 <a:latin typeface="Calibri"/>
               </a:rPr>
-              <a:t>    ▸ Git va VCS nazariy asoslarini o'rganish</a:t>
+              <a:t>▸ Git va VCS nazariy asoslarini o'rganish</a:t>
             </a:r>
           </a:p>
           <a:p>
@@ -10241,7 +10869,7 @@
                 </a:solidFill>
                 <a:latin typeface="Calibri"/>
               </a:rPr>
-              <a:t>    ▸ LLM API integratsiya imkoniyatlarini tadqiq etish</a:t>
+              <a:t>▸ jsdiff kutubxonasi va LLM API integratsiyasini tadqiq etish</a:t>
             </a:r>
           </a:p>
           <a:p>
@@ -10257,7 +10885,7 @@
                 </a:solidFill>
                 <a:latin typeface="Calibri"/>
               </a:rPr>
-              <a:t>    ▸ 5 oynali mantiqiy-funksional model ishlab chiqish</a:t>
+              <a:t>▸ 5 oynali mantiqiy-funksional model ishlab chiqish</a:t>
             </a:r>
           </a:p>
           <a:p>
@@ -10273,7 +10901,7 @@
                 </a:solidFill>
                 <a:latin typeface="Calibri"/>
               </a:rPr>
-              <a:t>    ▸ Router-Controller andozasida backend loyihalash</a:t>
+              <a:t>▸ Router-Controller andozasida backend arxitekturasi yaratish</a:t>
             </a:r>
           </a:p>
           <a:p>
@@ -10289,7 +10917,7 @@
                 </a:solidFill>
                 <a:latin typeface="Calibri"/>
               </a:rPr>
-              <a:t>    ▸ Prompt Engineering modeli yaratish (o'zbek tilida)</a:t>
+              <a:t>▸ Prompt Engineering — 3 qatlamli model (o'zbek tilida)</a:t>
             </a:r>
           </a:p>
           <a:p>
@@ -10305,7 +10933,7 @@
                 </a:solidFill>
                 <a:latin typeface="Calibri"/>
               </a:rPr>
-              <a:t>    ▸ React SPA interfeysi amalga oshirish</a:t>
+              <a:t>▸ React SPA — sahifalararo ma'lumotlar zanjiri amalga oshirish</a:t>
             </a:r>
           </a:p>
           <a:p>
@@ -10337,7 +10965,7 @@
                 </a:solidFill>
                 <a:latin typeface="Calibri"/>
               </a:rPr>
-              <a:t>    📌 Tadqiqot obyekti: DT hayotiy sikli, versiyalarni boshqarish jarayonlari</a:t>
+              <a:t>📌 Tadqiqot predmeti: Diff algoritmlari + LLM semantik tahlil metodlari</a:t>
             </a:r>
           </a:p>
           <a:p>
@@ -10353,7 +10981,7 @@
                 </a:solidFill>
                 <a:latin typeface="Calibri"/>
               </a:rPr>
-              <a:t>    📌 Predmeti: Diff algoritmlari, JS asinxron metodlar, LLM semantik tahlil</a:t>
+              <a:t>📌 Metodlar: OOD, Router-Controller, Prompt Engineering, Git oqimlari</a:t>
             </a:r>
           </a:p>
         </p:txBody>
@@ -10367,7 +10995,7 @@
 </file>
 
 <file path=ppt/slides/slide5.xml><?xml version="1.0" encoding="utf-8"?>
-<p:sld xmlns:p="http://schemas.openxmlformats.org/presentationml/2006/main" xmlns:a="http://schemas.openxmlformats.org/drawingml/2006/main" xmlns:r="http://schemas.openxmlformats.org/officeDocument/2006/relationships" xmlns:xdr="http://schemas.openxmlformats.org/drawingml/2006/spreadsheetDrawing">
+<p:sld xmlns:p="http://schemas.openxmlformats.org/presentationml/2006/main" xmlns:a="http://schemas.openxmlformats.org/drawingml/2006/main" xmlns:r="http://schemas.openxmlformats.org/officeDocument/2006/relationships">
   <p:cSld>
     <p:spTree>
       <p:nvGrpSpPr>
@@ -10481,15 +11109,15 @@
         <p:spPr>
           <a:xfrm>
             <a:off x="540000" y="1260000"/>
-            <a:ext cx="1800000" cy="1800000"/>
-          </a:xfrm>
-          <a:prstGeom prst="roundRect">
-            <a:avLst>
-              <a:gd name="adj" fmla="val 20000"/>
-            </a:avLst>
-          </a:prstGeom>
-          <a:solidFill>
-            <a:srgbClr val="0F2547"/>
+            <a:ext cx="1800000" cy="1980000"/>
+          </a:xfrm>
+          <a:prstGeom prst="rect">
+            <a:avLst/>
+          </a:prstGeom>
+          <a:solidFill>
+            <a:srgbClr val="0F2547">
+              <a:alpha val="80000"/>
+            </a:srgbClr>
           </a:solidFill>
           <a:ln>
             <a:noFill/>
@@ -10510,7 +11138,7 @@
         <p:spPr>
           <a:xfrm>
             <a:off x="540000" y="1260000"/>
-            <a:ext cx="1800000" cy="1800000"/>
+            <a:ext cx="1800000" cy="1980000"/>
           </a:xfrm>
           <a:prstGeom prst="rect">
             <a:avLst/>
@@ -10523,7 +11151,7 @@
           <a:p>
             <a:pPr algn="ctr"/>
             <a:r>
-              <a:rPr lang="uz-UZ" altLang="en-US" sz="6000" b="1" dirty="0">
+              <a:rPr lang="uz-UZ" altLang="en-US" sz="5800" b="1" dirty="0">
                 <a:solidFill>
                   <a:srgbClr val="00C6FF"/>
                 </a:solidFill>
@@ -10545,12 +11173,10 @@
         <p:spPr>
           <a:xfrm>
             <a:off x="2520000" y="1440000"/>
-            <a:ext cx="8640000" cy="1440000"/>
-          </a:xfrm>
-          <a:prstGeom prst="roundRect">
-            <a:avLst>
-              <a:gd name="adj" fmla="val 15000"/>
-            </a:avLst>
+            <a:ext cx="8640000" cy="1620000"/>
+          </a:xfrm>
+          <a:prstGeom prst="rect">
+            <a:avLst/>
           </a:prstGeom>
           <a:solidFill>
             <a:srgbClr val="0F2547">
@@ -10578,7 +11204,7 @@
         <p:spPr>
           <a:xfrm>
             <a:off x="2520000" y="1440000"/>
-            <a:ext cx="8640000" cy="28800"/>
+            <a:ext cx="8640000" cy="36000"/>
           </a:xfrm>
           <a:prstGeom prst="rect">
             <a:avLst/>
@@ -10604,8 +11230,8 @@
         </p:nvSpPr>
         <p:spPr>
           <a:xfrm>
-            <a:off x="2628000" y="1584000"/>
-            <a:ext cx="8424000" cy="1152000"/>
+            <a:off x="2628000" y="1620000"/>
+            <a:ext cx="8424000" cy="1260000"/>
           </a:xfrm>
           <a:prstGeom prst="rect">
             <a:avLst/>
@@ -10618,46 +11244,44 @@
           <a:p>
             <a:pPr/>
             <a:r>
-              <a:rPr lang="uz-UZ" altLang="en-US" sz="2000" b="1" dirty="0">
+              <a:rPr lang="uz-UZ" altLang="en-US" sz="2200" b="1" dirty="0">
                 <a:solidFill>
                   <a:srgbClr val="FFFFFF"/>
                 </a:solidFill>
                 <a:latin typeface="Calibri"/>
               </a:rPr>
-              <a:t>BOB:</a:t>
+              <a:t>BOB: VERSIYALARNI BOSHQARISH</a:t>
             </a:r>
           </a:p>
           <a:p>
             <a:pPr/>
             <a:r>
-              <a:rPr lang="uz-UZ" altLang="en-US" sz="2000" b="1" dirty="0">
+              <a:rPr lang="uz-UZ" altLang="en-US" sz="2200" b="1" dirty="0">
                 <a:solidFill>
                   <a:srgbClr val="FFFFFF"/>
                 </a:solidFill>
                 <a:latin typeface="Calibri"/>
               </a:rPr>
-              <a:t>NAZARIY ASOSLAR</a:t>
-            </a:r>
-          </a:p>
-        </p:txBody>
-      </p:sp>
-      <p:sp>
-        <p:nvSpPr>
-          <p:cNvPr id="2" name="r"/>
-          <p:cNvSpPr>
-            <a:spLocks noGrp="1"/>
-          </p:cNvSpPr>
-          <p:nvPr/>
-        </p:nvSpPr>
-        <p:spPr>
-          <a:xfrm>
-            <a:off x="540000" y="3420000"/>
-            <a:ext cx="11160000" cy="3060000"/>
-          </a:xfrm>
-          <a:prstGeom prst="roundRect">
-            <a:avLst>
-              <a:gd name="adj" fmla="val 10000"/>
-            </a:avLst>
+              <a:t>TIZIMLARINING NAZARIY ASOSLARI</a:t>
+            </a:r>
+          </a:p>
+        </p:txBody>
+      </p:sp>
+      <p:sp>
+        <p:nvSpPr>
+          <p:cNvPr id="2" name="r"/>
+          <p:cNvSpPr>
+            <a:spLocks noGrp="1"/>
+          </p:cNvSpPr>
+          <p:nvPr/>
+        </p:nvSpPr>
+        <p:spPr>
+          <a:xfrm>
+            <a:off x="540000" y="3600000"/>
+            <a:ext cx="11160000" cy="2880000"/>
+          </a:xfrm>
+          <a:prstGeom prst="rect">
+            <a:avLst/>
           </a:prstGeom>
           <a:solidFill>
             <a:srgbClr val="0F2547">
@@ -10682,7 +11306,7 @@
         </p:nvSpPr>
         <p:spPr>
           <a:xfrm>
-            <a:off x="720000" y="3600000"/>
+            <a:off x="720000" y="3780000"/>
             <a:ext cx="10800000" cy="2700000"/>
           </a:xfrm>
           <a:prstGeom prst="rect">
@@ -10715,7 +11339,7 @@
                 </a:solidFill>
                 <a:latin typeface="Calibri"/>
               </a:rPr>
-              <a:t>1.1 — Versiyalarni boshqarish tizimlari (VCS) tarixi va ahamiyati</a:t>
+              <a:t>1.1 — VCS tarixi: Lokal, Markazlashtirilgan, Taqsimlangan tizimlar</a:t>
             </a:r>
           </a:p>
           <a:p>
@@ -10740,7 +11364,7 @@
                 </a:solidFill>
                 <a:latin typeface="Calibri"/>
               </a:rPr>
-              <a:t>1.2 — Diff tahlil metodologiyasi va mavjud dasturiy vositalar sharhi</a:t>
+              <a:t>1.2 — Diff tahlil metodologiyasi: Mayers, Patience, Histogram algoritmlari</a:t>
             </a:r>
           </a:p>
           <a:p>
@@ -10779,7 +11403,7 @@
 </file>
 
 <file path=ppt/slides/slide6.xml><?xml version="1.0" encoding="utf-8"?>
-<p:sld xmlns:p="http://schemas.openxmlformats.org/presentationml/2006/main" xmlns:a="http://schemas.openxmlformats.org/drawingml/2006/main" xmlns:r="http://schemas.openxmlformats.org/officeDocument/2006/relationships" xmlns:xdr="http://schemas.openxmlformats.org/drawingml/2006/spreadsheetDrawing">
+<p:sld xmlns:p="http://schemas.openxmlformats.org/presentationml/2006/main" xmlns:a="http://schemas.openxmlformats.org/drawingml/2006/main" xmlns:r="http://schemas.openxmlformats.org/officeDocument/2006/relationships">
   <p:cSld>
     <p:spTree>
       <p:nvGrpSpPr>
@@ -10841,7 +11465,7 @@
             <a:avLst/>
           </a:prstGeom>
           <a:solidFill>
-            <a:srgbClr val="0D1B2A"/>
+            <a:srgbClr val="0a1628"/>
           </a:solidFill>
           <a:ln>
             <a:noFill/>
@@ -10939,7 +11563,7 @@
                 </a:solidFill>
                 <a:latin typeface="Calibri"/>
               </a:rPr>
-              <a:t>Versiyalarni Boshqarish Tizimlari (VCS)</a:t>
+              <a:t>Versiyalarni Boshqarish Tizimlari (VCS) Tarixiy Tahlili</a:t>
             </a:r>
           </a:p>
         </p:txBody>
@@ -11009,23 +11633,23 @@
                 </a:solidFill>
                 <a:latin typeface="Calibri"/>
               </a:rPr>
-              <a:t>    ▸ LOKAL VCS — fayllar faqat shaxsiy kompyuterda saqlangan</a:t>
-            </a:r>
-          </a:p>
-          <a:p>
-            <a:pPr>
-              <a:spcBef>
-                <a:spcPts val="40"/>
-              </a:spcBef>
-            </a:pPr>
-            <a:r>
-              <a:rPr lang="uz-UZ" altLang="en-US" sz="1200" dirty="0">
-                <a:solidFill>
-                  <a:srgbClr val="B0C4DE"/>
-                </a:solidFill>
-                <a:latin typeface="Calibri"/>
-              </a:rPr>
-              <a:t>   Kamchiligi: boshqa dasturchilarga uzatish imkoni yo'q</a:t>
+              <a:t>▸ LOKAL VCS — fayllar faqat shaxsiy kompyuterda</a:t>
+            </a:r>
+          </a:p>
+          <a:p>
+            <a:pPr>
+              <a:spcBef>
+                <a:spcPts val="40"/>
+              </a:spcBef>
+            </a:pPr>
+            <a:r>
+              <a:rPr lang="uz-UZ" altLang="en-US" sz="1200" dirty="0">
+                <a:solidFill>
+                  <a:srgbClr val="B0C4DE"/>
+                </a:solidFill>
+                <a:latin typeface="Calibri"/>
+              </a:rPr>
+              <a:t>   Kamchiligi: jamoaviy ishlash MUMKIN EMAS, server o'chsa tarix yo'qoladi</a:t>
             </a:r>
           </a:p>
           <a:p>
@@ -11057,23 +11681,23 @@
                 </a:solidFill>
                 <a:latin typeface="Calibri"/>
               </a:rPr>
-              <a:t>    ▸ MARKAZLASHTIRILGAN (CVCS) — SVN, CVS tizimlar</a:t>
-            </a:r>
-          </a:p>
-          <a:p>
-            <a:pPr>
-              <a:spcBef>
-                <a:spcPts val="40"/>
-              </a:spcBef>
-            </a:pPr>
-            <a:r>
-              <a:rPr lang="uz-UZ" altLang="en-US" sz="1200" dirty="0">
-                <a:solidFill>
-                  <a:srgbClr val="B0C4DE"/>
-                </a:solidFill>
-                <a:latin typeface="Calibri"/>
-              </a:rPr>
-              <a:t>   Yagona server — server o'chsa, butun loyiha tarixi yo'qoladi ⚠</a:t>
+              <a:t>▸ MARKAZLASHTIRILGAN (CVCS) — SVN, CVS (bitta server)</a:t>
+            </a:r>
+          </a:p>
+          <a:p>
+            <a:pPr>
+              <a:spcBef>
+                <a:spcPts val="40"/>
+              </a:spcBef>
+            </a:pPr>
+            <a:r>
+              <a:rPr lang="uz-UZ" altLang="en-US" sz="1200" dirty="0">
+                <a:solidFill>
+                  <a:srgbClr val="B0C4DE"/>
+                </a:solidFill>
+                <a:latin typeface="Calibri"/>
+              </a:rPr>
+              <a:t>   ⚠ Server o'chsa — butun jamoa ishi to'xtaydi, tarix yo'qoladi</a:t>
             </a:r>
           </a:p>
           <a:p>
@@ -11105,23 +11729,23 @@
                 </a:solidFill>
                 <a:latin typeface="Calibri"/>
               </a:rPr>
-              <a:t>    ▸ TAQSIMLANGAN (DVCS) — Git (zamonaviy standart)</a:t>
-            </a:r>
-          </a:p>
-          <a:p>
-            <a:pPr>
-              <a:spcBef>
-                <a:spcPts val="40"/>
-              </a:spcBef>
-            </a:pPr>
-            <a:r>
-              <a:rPr lang="uz-UZ" altLang="en-US" sz="1200" dirty="0">
-                <a:solidFill>
-                  <a:srgbClr val="B0C4DE"/>
-                </a:solidFill>
-                <a:latin typeface="Calibri"/>
-              </a:rPr>
-              <a:t>   ✅ Har dasturchi to'liq repozitoriyaga ega (lokal klon)</a:t>
+              <a:t>▸ TAQSIMLANGAN (DVCS) — Git (zamonaviy standart, 2005-hozir)</a:t>
+            </a:r>
+          </a:p>
+          <a:p>
+            <a:pPr>
+              <a:spcBef>
+                <a:spcPts val="40"/>
+              </a:spcBef>
+            </a:pPr>
+            <a:r>
+              <a:rPr lang="uz-UZ" altLang="en-US" sz="1200" dirty="0">
+                <a:solidFill>
+                  <a:srgbClr val="B0C4DE"/>
+                </a:solidFill>
+                <a:latin typeface="Calibri"/>
+              </a:rPr>
+              <a:t>   ✅ Har dasturchi to'liq repozitoriyani lokal klonlaydi</a:t>
             </a:r>
           </a:p>
           <a:p>
@@ -11153,23 +11777,23 @@
                 </a:solidFill>
                 <a:latin typeface="Calibri"/>
               </a:rPr>
-              <a:t>   ✅ Snapshot asosida saqlash — tezlik va xavfsizlik kafolati</a:t>
-            </a:r>
-          </a:p>
-          <a:p>
-            <a:pPr>
-              <a:spcBef>
-                <a:spcPts val="40"/>
-              </a:spcBef>
-            </a:pPr>
-            <a:r>
-              <a:rPr lang="uz-UZ" altLang="en-US" sz="1200" dirty="0">
-                <a:solidFill>
-                  <a:srgbClr val="B0C4DE"/>
-                </a:solidFill>
-                <a:latin typeface="Calibri"/>
-              </a:rPr>
-              <a:t>   ✅ Yengil tarmoqlanish — branch = 41 baytlik ko'rsatgich</a:t>
+              <a:t>   ✅ Snapshot asosida saqlash — tezlik va ishonchlilik kafolati</a:t>
+            </a:r>
+          </a:p>
+          <a:p>
+            <a:pPr>
+              <a:spcBef>
+                <a:spcPts val="40"/>
+              </a:spcBef>
+            </a:pPr>
+            <a:r>
+              <a:rPr lang="uz-UZ" altLang="en-US" sz="1200" dirty="0">
+                <a:solidFill>
+                  <a:srgbClr val="B0C4DE"/>
+                </a:solidFill>
+                <a:latin typeface="Calibri"/>
+              </a:rPr>
+              <a:t>   ✅ Branch = 41 baytlik ko'rsatgich — yengil va tezkor tarmoqlanish</a:t>
             </a:r>
           </a:p>
           <a:p>
@@ -11201,7 +11825,39 @@
                 </a:solidFill>
                 <a:latin typeface="Calibri"/>
               </a:rPr>
-              <a:t>    📌 Git — dunyo dasturiy injeneriyasining DE FACTO standarti (2005-hozir)</a:t>
+              <a:t>📌 Git — dunyo dasturiy injeneriyasining DE FACTO standarti</a:t>
+            </a:r>
+          </a:p>
+          <a:p>
+            <a:pPr>
+              <a:spcBef>
+                <a:spcPts val="40"/>
+              </a:spcBef>
+            </a:pPr>
+            <a:r>
+              <a:rPr lang="uz-UZ" altLang="en-US" sz="1200" dirty="0">
+                <a:solidFill>
+                  <a:srgbClr val="B0C4DE"/>
+                </a:solidFill>
+                <a:latin typeface="Calibri"/>
+              </a:rPr>
+              <a:t>   Code Review jarayoni: Pull Request → jamoa tekshiruvi → merge</a:t>
+            </a:r>
+          </a:p>
+          <a:p>
+            <a:pPr>
+              <a:spcBef>
+                <a:spcPts val="40"/>
+              </a:spcBef>
+            </a:pPr>
+            <a:r>
+              <a:rPr lang="uz-UZ" altLang="en-US" sz="1200" dirty="0">
+                <a:solidFill>
+                  <a:srgbClr val="B0C4DE"/>
+                </a:solidFill>
+                <a:latin typeface="Calibri"/>
+              </a:rPr>
+              <a:t>   Muammo: Yirik loyihalarda qo'lda tekshirish inson resursini ko'p oladi</a:t>
             </a:r>
           </a:p>
         </p:txBody>
@@ -11215,7 +11871,7 @@
 </file>
 
 <file path=ppt/slides/slide7.xml><?xml version="1.0" encoding="utf-8"?>
-<p:sld xmlns:p="http://schemas.openxmlformats.org/presentationml/2006/main" xmlns:a="http://schemas.openxmlformats.org/drawingml/2006/main" xmlns:r="http://schemas.openxmlformats.org/officeDocument/2006/relationships" xmlns:xdr="http://schemas.openxmlformats.org/drawingml/2006/spreadsheetDrawing">
+<p:sld xmlns:p="http://schemas.openxmlformats.org/presentationml/2006/main" xmlns:a="http://schemas.openxmlformats.org/drawingml/2006/main" xmlns:r="http://schemas.openxmlformats.org/officeDocument/2006/relationships">
   <p:cSld>
     <p:spTree>
       <p:nvGrpSpPr>
@@ -11277,7 +11933,7 @@
             <a:avLst/>
           </a:prstGeom>
           <a:solidFill>
-            <a:srgbClr val="0D1B2A"/>
+            <a:srgbClr val="0a1628"/>
           </a:solidFill>
           <a:ln>
             <a:noFill/>
@@ -11375,7 +12031,7 @@
                 </a:solidFill>
                 <a:latin typeface="Calibri"/>
               </a:rPr>
-              <a:t>Diff Tahlil Algoritmlari — Mayers, Patience, Histogram</a:t>
+              <a:t>Diff Tahlil Algoritmlari — Ilmiy Tahlil</a:t>
             </a:r>
           </a:p>
         </p:txBody>
@@ -11445,23 +12101,39 @@
                 </a:solidFill>
                 <a:latin typeface="Calibri"/>
               </a:rPr>
-              <a:t>    ▸ MAYERS ALGORITMI (1986) — Git standart algoritmi</a:t>
-            </a:r>
-          </a:p>
-          <a:p>
-            <a:pPr>
-              <a:spcBef>
-                <a:spcPts val="40"/>
-              </a:spcBef>
-            </a:pPr>
-            <a:r>
-              <a:rPr lang="uz-UZ" altLang="en-US" sz="1200" dirty="0">
-                <a:solidFill>
-                  <a:srgbClr val="B0C4DE"/>
-                </a:solidFill>
-                <a:latin typeface="Calibri"/>
-              </a:rPr>
-              <a:t>  Asosi: LCS (Longest Common Subsequence) — eng qisqa tahrirlash skripti</a:t>
+              <a:t>▸ UNIFIED DIFF FORMATI — xalqaro standart:</a:t>
+            </a:r>
+          </a:p>
+          <a:p>
+            <a:pPr>
+              <a:spcBef>
+                <a:spcPts val="40"/>
+              </a:spcBef>
+            </a:pPr>
+            <a:r>
+              <a:rPr lang="uz-UZ" altLang="en-US" sz="1200" dirty="0">
+                <a:solidFill>
+                  <a:srgbClr val="B0C4DE"/>
+                </a:solidFill>
+                <a:latin typeface="Calibri"/>
+              </a:rPr>
+              <a:t>   (+) — qo'shilgan qatorlar  |  (-) — o'chirilgan qatorlar</a:t>
+            </a:r>
+          </a:p>
+          <a:p>
+            <a:pPr>
+              <a:spcBef>
+                <a:spcPts val="40"/>
+              </a:spcBef>
+            </a:pPr>
+            <a:r>
+              <a:rPr lang="uz-UZ" altLang="en-US" sz="1200" dirty="0">
+                <a:solidFill>
+                  <a:srgbClr val="B0C4DE"/>
+                </a:solidFill>
+                <a:latin typeface="Calibri"/>
+              </a:rPr>
+              <a:t>   @@ koordinatlar — qaysi satrdan boshlangani aniq ko'rsatiladi</a:t>
             </a:r>
           </a:p>
           <a:p>
@@ -11493,23 +12165,39 @@
                 </a:solidFill>
                 <a:latin typeface="Calibri"/>
               </a:rPr>
-              <a:t>    ▸ PATIENCE DIFF — noyob qatorlarga tayanadi</a:t>
-            </a:r>
-          </a:p>
-          <a:p>
-            <a:pPr>
-              <a:spcBef>
-                <a:spcPts val="40"/>
-              </a:spcBef>
-            </a:pPr>
-            <a:r>
-              <a:rPr lang="uz-UZ" altLang="en-US" sz="1200" dirty="0">
-                <a:solidFill>
-                  <a:srgbClr val="B0C4DE"/>
-                </a:solidFill>
-                <a:latin typeface="Calibri"/>
-              </a:rPr>
-              <a:t>  Rename, refaktoring operatsiyalarida aniqroq natija beradi</a:t>
+              <a:t>▸ MAYERS ALGORITMI (Eugene Myers, 1986) — Git standart algoritmi</a:t>
+            </a:r>
+          </a:p>
+          <a:p>
+            <a:pPr>
+              <a:spcBef>
+                <a:spcPts val="40"/>
+              </a:spcBef>
+            </a:pPr>
+            <a:r>
+              <a:rPr lang="uz-UZ" altLang="en-US" sz="1200" dirty="0">
+                <a:solidFill>
+                  <a:srgbClr val="B0C4DE"/>
+                </a:solidFill>
+                <a:latin typeface="Calibri"/>
+              </a:rPr>
+              <a:t>   LCS (Longest Common Subsequence) asosida — eng qisqa tahrirlash skripti</a:t>
+            </a:r>
+          </a:p>
+          <a:p>
+            <a:pPr>
+              <a:spcBef>
+                <a:spcPts val="40"/>
+              </a:spcBef>
+            </a:pPr>
+            <a:r>
+              <a:rPr lang="uz-UZ" altLang="en-US" sz="1200" dirty="0">
+                <a:solidFill>
+                  <a:srgbClr val="B0C4DE"/>
+                </a:solidFill>
+                <a:latin typeface="Calibri"/>
+              </a:rPr>
+              <a:t>   Kamchiligi: bir xil kalit so'zlar bo'lsa chalg'ituvchi natija</a:t>
             </a:r>
           </a:p>
           <a:p>
@@ -11541,23 +12229,23 @@
                 </a:solidFill>
                 <a:latin typeface="Calibri"/>
               </a:rPr>
-              <a:t>    ▸ HISTOGRAM DIFF — chastota asosida optimallashtirish</a:t>
-            </a:r>
-          </a:p>
-          <a:p>
-            <a:pPr>
-              <a:spcBef>
-                <a:spcPts val="40"/>
-              </a:spcBef>
-            </a:pPr>
-            <a:r>
-              <a:rPr lang="uz-UZ" altLang="en-US" sz="1200" dirty="0">
-                <a:solidFill>
-                  <a:srgbClr val="B0C4DE"/>
-                </a:solidFill>
-                <a:latin typeface="Calibri"/>
-              </a:rPr>
-              <a:t>  Katta loyihalarda eng yuqori tezlik ko'rsatadi</a:t>
+              <a:t>▸ PATIENCE DIFF — noyob qatorlarga tayanadi</a:t>
+            </a:r>
+          </a:p>
+          <a:p>
+            <a:pPr>
+              <a:spcBef>
+                <a:spcPts val="40"/>
+              </a:spcBef>
+            </a:pPr>
+            <a:r>
+              <a:rPr lang="uz-UZ" altLang="en-US" sz="1200" dirty="0">
+                <a:solidFill>
+                  <a:srgbClr val="B0C4DE"/>
+                </a:solidFill>
+                <a:latin typeface="Calibri"/>
+              </a:rPr>
+              <a:t>   Rename, refaktoring operatsiyalarida aniqroq natija</a:t>
             </a:r>
           </a:p>
           <a:p>
@@ -11589,7 +12277,39 @@
                 </a:solidFill>
                 <a:latin typeface="Calibri"/>
               </a:rPr>
-              <a:t>    ▸ Unified Diff format: qo'shilgan (+), o'chirilgan (-), o'zgarmagan</a:t>
+              <a:t>▸ HISTOGRAM DIFF — chastota asosida optimallashtirish</a:t>
+            </a:r>
+          </a:p>
+          <a:p>
+            <a:pPr>
+              <a:spcBef>
+                <a:spcPts val="40"/>
+              </a:spcBef>
+            </a:pPr>
+            <a:r>
+              <a:rPr lang="uz-UZ" altLang="en-US" sz="1200" dirty="0">
+                <a:solidFill>
+                  <a:srgbClr val="B0C4DE"/>
+                </a:solidFill>
+                <a:latin typeface="Calibri"/>
+              </a:rPr>
+              <a:t>   Katta loyihalarda eng yuqori tezlik va aniqlik</a:t>
+            </a:r>
+          </a:p>
+          <a:p>
+            <a:pPr>
+              <a:spcBef>
+                <a:spcPts val="20"/>
+              </a:spcBef>
+            </a:pPr>
+            <a:r>
+              <a:rPr lang="uz-UZ" altLang="en-US" sz="1400" dirty="0">
+                <a:solidFill>
+                  <a:srgbClr val="FFFFFF"/>
+                </a:solidFill>
+                <a:latin typeface="Calibri"/>
+              </a:rPr>
+              <a:t/>
             </a:r>
           </a:p>
           <a:p>
@@ -11601,59 +12321,27 @@
             <a:r>
               <a:rPr lang="uz-UZ" altLang="en-US" sz="1300" b="1" dirty="0">
                 <a:solidFill>
-                  <a:srgbClr val="00C6FF"/>
-                </a:solidFill>
-                <a:latin typeface="Calibri"/>
-              </a:rPr>
-              <a:t>    ▸ jsdiff kutubxonasi — Mayers + JSON parsing (loyihamizda ishlatildi)</a:t>
-            </a:r>
-          </a:p>
-          <a:p>
-            <a:pPr>
-              <a:spcBef>
-                <a:spcPts val="20"/>
-              </a:spcBef>
-            </a:pPr>
-            <a:r>
-              <a:rPr lang="uz-UZ" altLang="en-US" sz="1400" dirty="0">
-                <a:solidFill>
-                  <a:srgbClr val="FFFFFF"/>
-                </a:solidFill>
-                <a:latin typeface="Calibri"/>
-              </a:rPr>
-              <a:t/>
-            </a:r>
-          </a:p>
-          <a:p>
-            <a:pPr>
-              <a:spcBef>
-                <a:spcPts val="40"/>
-              </a:spcBef>
-            </a:pPr>
-            <a:r>
-              <a:rPr lang="uz-UZ" altLang="en-US" sz="1300" dirty="0">
-                <a:solidFill>
-                  <a:srgbClr val="FF4444"/>
-                </a:solidFill>
-                <a:latin typeface="Calibri"/>
-              </a:rPr>
-              <a:t>    ⚠ Asosiy muammo: Barcha algoritmlar faqat SINTAKTIK tahlil qiladi</a:t>
-            </a:r>
-          </a:p>
-          <a:p>
-            <a:pPr>
-              <a:spcBef>
-                <a:spcPts val="40"/>
-              </a:spcBef>
-            </a:pPr>
-            <a:r>
-              <a:rPr lang="uz-UZ" altLang="en-US" sz="1200" dirty="0">
-                <a:solidFill>
-                  <a:srgbClr val="B0C4DE"/>
-                </a:solidFill>
-                <a:latin typeface="Calibri"/>
-              </a:rPr>
-              <a:t>   Mantiqiy ma'no, xavfsizlik ta'siri — AI tahlilisiz aniqlab bo'lmaydi!</a:t>
+                  <a:srgbClr val="00E676"/>
+                </a:solidFill>
+                <a:latin typeface="Calibri"/>
+              </a:rPr>
+              <a:t>📌 Loyihada: jsdiff kutubxonasi — Mayers algoritmi + JSON parsing</a:t>
+            </a:r>
+          </a:p>
+          <a:p>
+            <a:pPr>
+              <a:spcBef>
+                <a:spcPts val="40"/>
+              </a:spcBef>
+            </a:pPr>
+            <a:r>
+              <a:rPr lang="uz-UZ" altLang="en-US" sz="1200" dirty="0">
+                <a:solidFill>
+                  <a:srgbClr val="B0C4DE"/>
+                </a:solidFill>
+                <a:latin typeface="Calibri"/>
+              </a:rPr>
+              <a:t>   Asosiy muammo: Barchasi FAQAT sintaktik — mantiqiy ma'no yo'q!</a:t>
             </a:r>
           </a:p>
         </p:txBody>
@@ -11667,7 +12355,7 @@
 </file>
 
 <file path=ppt/slides/slide8.xml><?xml version="1.0" encoding="utf-8"?>
-<p:sld xmlns:p="http://schemas.openxmlformats.org/presentationml/2006/main" xmlns:a="http://schemas.openxmlformats.org/drawingml/2006/main" xmlns:r="http://schemas.openxmlformats.org/officeDocument/2006/relationships" xmlns:xdr="http://schemas.openxmlformats.org/drawingml/2006/spreadsheetDrawing">
+<p:sld xmlns:p="http://schemas.openxmlformats.org/presentationml/2006/main" xmlns:a="http://schemas.openxmlformats.org/drawingml/2006/main" xmlns:r="http://schemas.openxmlformats.org/officeDocument/2006/relationships">
   <p:cSld>
     <p:spTree>
       <p:nvGrpSpPr>
@@ -11729,7 +12417,7 @@
             <a:avLst/>
           </a:prstGeom>
           <a:solidFill>
-            <a:srgbClr val="0D1B2A"/>
+            <a:srgbClr val="0a1628"/>
           </a:solidFill>
           <a:ln>
             <a:noFill/>
@@ -11827,7 +12515,7 @@
                 </a:solidFill>
                 <a:latin typeface="Calibri"/>
               </a:rPr>
-              <a:t>Google Gemini LLM Integratsiyasi — Nima uchun?</a:t>
+              <a:t>Google Gemini LLM Integratsiyasi — Nima Uchun?</a:t>
             </a:r>
           </a:p>
         </p:txBody>
@@ -11897,7 +12585,39 @@
                 </a:solidFill>
                 <a:latin typeface="Calibri"/>
               </a:rPr>
-              <a:t>    ▸ Gemini 2.5 Flash modeli tanlangan — asosiy sabablar:</a:t>
+              <a:t>▸ Transformer arxitekturasi + Self-Attention mexanizmi</a:t>
+            </a:r>
+          </a:p>
+          <a:p>
+            <a:pPr>
+              <a:spcBef>
+                <a:spcPts val="40"/>
+              </a:spcBef>
+            </a:pPr>
+            <a:r>
+              <a:rPr lang="uz-UZ" altLang="en-US" sz="1200" dirty="0">
+                <a:solidFill>
+                  <a:srgbClr val="B0C4DE"/>
+                </a:solidFill>
+                <a:latin typeface="Calibri"/>
+              </a:rPr>
+              <a:t>   Kod blokining UMUMIY kontekstini to'liq qamrab oladi</a:t>
+            </a:r>
+          </a:p>
+          <a:p>
+            <a:pPr>
+              <a:spcBef>
+                <a:spcPts val="40"/>
+              </a:spcBef>
+            </a:pPr>
+            <a:r>
+              <a:rPr lang="uz-UZ" altLang="en-US" sz="1200" dirty="0">
+                <a:solidFill>
+                  <a:srgbClr val="B0C4DE"/>
+                </a:solidFill>
+                <a:latin typeface="Calibri"/>
+              </a:rPr>
+              <a:t>   An'anaviy linter: faqat qoidalar → LLM: mantiqiy tahlil</a:t>
             </a:r>
           </a:p>
           <a:p>
@@ -11929,39 +12649,7 @@
                 </a:solidFill>
                 <a:latin typeface="Calibri"/>
               </a:rPr>
-              <a:t>    ✅ 1 MILLION TOKEN kontekst oynasi</a:t>
-            </a:r>
-          </a:p>
-          <a:p>
-            <a:pPr>
-              <a:spcBef>
-                <a:spcPts val="40"/>
-              </a:spcBef>
-            </a:pPr>
-            <a:r>
-              <a:rPr lang="uz-UZ" altLang="en-US" sz="1200" dirty="0">
-                <a:solidFill>
-                  <a:srgbClr val="B0C4DE"/>
-                </a:solidFill>
-                <a:latin typeface="Calibri"/>
-              </a:rPr>
-              <a:t>   → Butun loyiha diff matni bitta so'rovda tahlil qilinadi</a:t>
-            </a:r>
-          </a:p>
-          <a:p>
-            <a:pPr>
-              <a:spcBef>
-                <a:spcPts val="40"/>
-              </a:spcBef>
-            </a:pPr>
-            <a:r>
-              <a:rPr lang="uz-UZ" altLang="en-US" sz="1200" dirty="0">
-                <a:solidFill>
-                  <a:srgbClr val="B0C4DE"/>
-                </a:solidFill>
-                <a:latin typeface="Calibri"/>
-              </a:rPr>
-              <a:t>   → Fragment-fragment yuborish kerak emas — to'liq tahlil</a:t>
+              <a:t>✅ Gemini 2.5 Flash tanlanganligi sabablari:</a:t>
             </a:r>
           </a:p>
           <a:p>
@@ -11993,23 +12681,39 @@
                 </a:solidFill>
                 <a:latin typeface="Calibri"/>
               </a:rPr>
-              <a:t>    ✅ O'ZBEK TILI semantikasini mukammal tushunadi</a:t>
-            </a:r>
-          </a:p>
-          <a:p>
-            <a:pPr>
-              <a:spcBef>
-                <a:spcPts val="40"/>
-              </a:spcBef>
-            </a:pPr>
-            <a:r>
-              <a:rPr lang="uz-UZ" altLang="en-US" sz="1200" dirty="0">
-                <a:solidFill>
-                  <a:srgbClr val="B0C4DE"/>
-                </a:solidFill>
-                <a:latin typeface="Calibri"/>
-              </a:rPr>
-              <a:t>   → Texnik terminologiyani to'g'ri tarjima va izohlash</a:t>
+              <a:t>📌 1 MILLION TOKEN kontekst oynasi</a:t>
+            </a:r>
+          </a:p>
+          <a:p>
+            <a:pPr>
+              <a:spcBef>
+                <a:spcPts val="40"/>
+              </a:spcBef>
+            </a:pPr>
+            <a:r>
+              <a:rPr lang="uz-UZ" altLang="en-US" sz="1200" dirty="0">
+                <a:solidFill>
+                  <a:srgbClr val="B0C4DE"/>
+                </a:solidFill>
+                <a:latin typeface="Calibri"/>
+              </a:rPr>
+              <a:t>   → Butun loyiha diff matni BITTA so'rovda tahlil qilinadi</a:t>
+            </a:r>
+          </a:p>
+          <a:p>
+            <a:pPr>
+              <a:spcBef>
+                <a:spcPts val="40"/>
+              </a:spcBef>
+            </a:pPr>
+            <a:r>
+              <a:rPr lang="uz-UZ" altLang="en-US" sz="1200" dirty="0">
+                <a:solidFill>
+                  <a:srgbClr val="B0C4DE"/>
+                </a:solidFill>
+                <a:latin typeface="Calibri"/>
+              </a:rPr>
+              <a:t>   → Fragment-fragment yuborish kerak emas — to'liq va izchil natija</a:t>
             </a:r>
           </a:p>
           <a:p>
@@ -12041,7 +12745,23 @@
                 </a:solidFill>
                 <a:latin typeface="Calibri"/>
               </a:rPr>
-              <a:t>    ✅ Streaming JSON response — past kechikish, yuqori tezlik</a:t>
+              <a:t>📌 O'ZBEK TILI semantikasini mukammal tushunadi</a:t>
+            </a:r>
+          </a:p>
+          <a:p>
+            <a:pPr>
+              <a:spcBef>
+                <a:spcPts val="40"/>
+              </a:spcBef>
+            </a:pPr>
+            <a:r>
+              <a:rPr lang="uz-UZ" altLang="en-US" sz="1200" dirty="0">
+                <a:solidFill>
+                  <a:srgbClr val="B0C4DE"/>
+                </a:solidFill>
+                <a:latin typeface="Calibri"/>
+              </a:rPr>
+              <a:t>   → Texnik terminologiya + milliy til + professional uslub</a:t>
             </a:r>
           </a:p>
           <a:p>
@@ -12073,71 +12793,55 @@
                 </a:solidFill>
                 <a:latin typeface="Calibri"/>
               </a:rPr>
-              <a:t>    ▸ PROMPT ENGINEERING — 3 qatlamli tuzilma:</a:t>
-            </a:r>
-          </a:p>
-          <a:p>
-            <a:pPr>
-              <a:spcBef>
-                <a:spcPts val="40"/>
-              </a:spcBef>
-            </a:pPr>
-            <a:r>
-              <a:rPr lang="uz-UZ" altLang="en-US" sz="1200" dirty="0">
-                <a:solidFill>
-                  <a:srgbClr val="B0C4DE"/>
-                </a:solidFill>
-                <a:latin typeface="Calibri"/>
-              </a:rPr>
-              <a:t>  1) System Prompt — mutaxassis roli va o'zbek tili talabi</a:t>
-            </a:r>
-          </a:p>
-          <a:p>
-            <a:pPr>
-              <a:spcBef>
-                <a:spcPts val="40"/>
-              </a:spcBef>
-            </a:pPr>
-            <a:r>
-              <a:rPr lang="uz-UZ" altLang="en-US" sz="1200" dirty="0">
-                <a:solidFill>
-                  <a:srgbClr val="B0C4DE"/>
-                </a:solidFill>
-                <a:latin typeface="Calibri"/>
-              </a:rPr>
-              <a:t>  2) Context Injection — diff matni + loyiha metama'lumoti</a:t>
-            </a:r>
-          </a:p>
-          <a:p>
-            <a:pPr>
-              <a:spcBef>
-                <a:spcPts val="40"/>
-              </a:spcBef>
-            </a:pPr>
-            <a:r>
-              <a:rPr lang="uz-UZ" altLang="en-US" sz="1200" dirty="0">
-                <a:solidFill>
-                  <a:srgbClr val="B0C4DE"/>
-                </a:solidFill>
-                <a:latin typeface="Calibri"/>
-              </a:rPr>
-              <a:t>  3) Output Format — Markdown: sarlavhalar + ro'yxatlar + kod</a:t>
-            </a:r>
-          </a:p>
-          <a:p>
-            <a:pPr>
-              <a:spcBef>
-                <a:spcPts val="20"/>
-              </a:spcBef>
-            </a:pPr>
-            <a:r>
-              <a:rPr lang="uz-UZ" altLang="en-US" sz="1400" dirty="0">
-                <a:solidFill>
-                  <a:srgbClr val="FFFFFF"/>
-                </a:solidFill>
-                <a:latin typeface="Calibri"/>
-              </a:rPr>
-              <a:t/>
+              <a:t>▸ 3 QATLAMLI PROMPT ENGINEERING tuzilmasi:</a:t>
+            </a:r>
+          </a:p>
+          <a:p>
+            <a:pPr>
+              <a:spcBef>
+                <a:spcPts val="40"/>
+              </a:spcBef>
+            </a:pPr>
+            <a:r>
+              <a:rPr lang="uz-UZ" altLang="en-US" sz="1200" dirty="0">
+                <a:solidFill>
+                  <a:srgbClr val="B0C4DE"/>
+                </a:solidFill>
+                <a:latin typeface="Calibri"/>
+              </a:rPr>
+              <a:t>   1) System Prompt — mutaxassis roli + o'zbek tili talabi</a:t>
+            </a:r>
+          </a:p>
+          <a:p>
+            <a:pPr>
+              <a:spcBef>
+                <a:spcPts val="40"/>
+              </a:spcBef>
+            </a:pPr>
+            <a:r>
+              <a:rPr lang="uz-UZ" altLang="en-US" sz="1200" dirty="0">
+                <a:solidFill>
+                  <a:srgbClr val="B0C4DE"/>
+                </a:solidFill>
+                <a:latin typeface="Calibri"/>
+              </a:rPr>
+              <a:t>   2) Context Injection — diff matni + loyiha meta-ma'lumoti</a:t>
+            </a:r>
+          </a:p>
+          <a:p>
+            <a:pPr>
+              <a:spcBef>
+                <a:spcPts val="40"/>
+              </a:spcBef>
+            </a:pPr>
+            <a:r>
+              <a:rPr lang="uz-UZ" altLang="en-US" sz="1200" dirty="0">
+                <a:solidFill>
+                  <a:srgbClr val="B0C4DE"/>
+                </a:solidFill>
+                <a:latin typeface="Calibri"/>
+              </a:rPr>
+              <a:t>   3) Output Format — Markdown: sarlavha + ro'yxat + kod namunalari</a:t>
             </a:r>
           </a:p>
           <a:p>
@@ -12153,7 +12857,7 @@
                 </a:solidFill>
                 <a:latin typeface="Calibri"/>
               </a:rPr>
-              <a:t>    📌 Hallucination muammosi: Faqat berilgan diff asosida fikr yuritish talabi</a:t>
+              <a:t>📌 Hallucination kamaytirish: FAQAT berilgan diff asosida fikr yuritish</a:t>
             </a:r>
           </a:p>
         </p:txBody>
@@ -12167,7 +12871,7 @@
 </file>
 
 <file path=ppt/slides/slide9.xml><?xml version="1.0" encoding="utf-8"?>
-<p:sld xmlns:p="http://schemas.openxmlformats.org/presentationml/2006/main" xmlns:a="http://schemas.openxmlformats.org/drawingml/2006/main" xmlns:r="http://schemas.openxmlformats.org/officeDocument/2006/relationships" xmlns:xdr="http://schemas.openxmlformats.org/drawingml/2006/spreadsheetDrawing">
+<p:sld xmlns:p="http://schemas.openxmlformats.org/presentationml/2006/main" xmlns:a="http://schemas.openxmlformats.org/drawingml/2006/main" xmlns:r="http://schemas.openxmlformats.org/officeDocument/2006/relationships">
   <p:cSld>
     <p:spTree>
       <p:nvGrpSpPr>
@@ -12281,15 +12985,15 @@
         <p:spPr>
           <a:xfrm>
             <a:off x="540000" y="1260000"/>
-            <a:ext cx="1800000" cy="1800000"/>
-          </a:xfrm>
-          <a:prstGeom prst="roundRect">
-            <a:avLst>
-              <a:gd name="adj" fmla="val 20000"/>
-            </a:avLst>
-          </a:prstGeom>
-          <a:solidFill>
-            <a:srgbClr val="0F2547"/>
+            <a:ext cx="1800000" cy="1980000"/>
+          </a:xfrm>
+          <a:prstGeom prst="rect">
+            <a:avLst/>
+          </a:prstGeom>
+          <a:solidFill>
+            <a:srgbClr val="0F2547">
+              <a:alpha val="80000"/>
+            </a:srgbClr>
           </a:solidFill>
           <a:ln>
             <a:noFill/>
@@ -12310,7 +13014,7 @@
         <p:spPr>
           <a:xfrm>
             <a:off x="540000" y="1260000"/>
-            <a:ext cx="1800000" cy="1800000"/>
+            <a:ext cx="1800000" cy="1980000"/>
           </a:xfrm>
           <a:prstGeom prst="rect">
             <a:avLst/>
@@ -12323,7 +13027,7 @@
           <a:p>
             <a:pPr algn="ctr"/>
             <a:r>
-              <a:rPr lang="uz-UZ" altLang="en-US" sz="6000" b="1" dirty="0">
+              <a:rPr lang="uz-UZ" altLang="en-US" sz="5800" b="1" dirty="0">
                 <a:solidFill>
                   <a:srgbClr val="00C6FF"/>
                 </a:solidFill>
@@ -12345,12 +13049,10 @@
         <p:spPr>
           <a:xfrm>
             <a:off x="2520000" y="1440000"/>
-            <a:ext cx="8640000" cy="1440000"/>
-          </a:xfrm>
-          <a:prstGeom prst="roundRect">
-            <a:avLst>
-              <a:gd name="adj" fmla="val 15000"/>
-            </a:avLst>
+            <a:ext cx="8640000" cy="1620000"/>
+          </a:xfrm>
+          <a:prstGeom prst="rect">
+            <a:avLst/>
           </a:prstGeom>
           <a:solidFill>
             <a:srgbClr val="0F2547">
@@ -12378,7 +13080,7 @@
         <p:spPr>
           <a:xfrm>
             <a:off x="2520000" y="1440000"/>
-            <a:ext cx="8640000" cy="28800"/>
+            <a:ext cx="8640000" cy="36000"/>
           </a:xfrm>
           <a:prstGeom prst="rect">
             <a:avLst/>
@@ -12404,8 +13106,8 @@
         </p:nvSpPr>
         <p:spPr>
           <a:xfrm>
-            <a:off x="2628000" y="1584000"/>
-            <a:ext cx="8424000" cy="1152000"/>
+            <a:off x="2628000" y="1620000"/>
+            <a:ext cx="8424000" cy="1260000"/>
           </a:xfrm>
           <a:prstGeom prst="rect">
             <a:avLst/>
@@ -12418,46 +13120,44 @@
           <a:p>
             <a:pPr/>
             <a:r>
-              <a:rPr lang="uz-UZ" altLang="en-US" sz="2000" b="1" dirty="0">
+              <a:rPr lang="uz-UZ" altLang="en-US" sz="2200" b="1" dirty="0">
                 <a:solidFill>
                   <a:srgbClr val="FFFFFF"/>
                 </a:solidFill>
                 <a:latin typeface="Calibri"/>
               </a:rPr>
-              <a:t>BOB: ARXITEKTURA</a:t>
+              <a:t>BOB: ARXITEKTURA VA</a:t>
             </a:r>
           </a:p>
           <a:p>
             <a:pPr/>
             <a:r>
-              <a:rPr lang="uz-UZ" altLang="en-US" sz="2000" b="1" dirty="0">
+              <a:rPr lang="uz-UZ" altLang="en-US" sz="2200" b="1" dirty="0">
                 <a:solidFill>
                   <a:srgbClr val="FFFFFF"/>
                 </a:solidFill>
                 <a:latin typeface="Calibri"/>
               </a:rPr>
-              <a:t>VA LOYIHALASH</a:t>
-            </a:r>
-          </a:p>
-        </p:txBody>
-      </p:sp>
-      <p:sp>
-        <p:nvSpPr>
-          <p:cNvPr id="2" name="r"/>
-          <p:cNvSpPr>
-            <a:spLocks noGrp="1"/>
-          </p:cNvSpPr>
-          <p:nvPr/>
-        </p:nvSpPr>
-        <p:spPr>
-          <a:xfrm>
-            <a:off x="540000" y="3420000"/>
-            <a:ext cx="11160000" cy="3060000"/>
-          </a:xfrm>
-          <a:prstGeom prst="roundRect">
-            <a:avLst>
-              <a:gd name="adj" fmla="val 10000"/>
-            </a:avLst>
+              <a:t>DASTURIY TIZIMNI LOYIHALASHTIRISH</a:t>
+            </a:r>
+          </a:p>
+        </p:txBody>
+      </p:sp>
+      <p:sp>
+        <p:nvSpPr>
+          <p:cNvPr id="2" name="r"/>
+          <p:cNvSpPr>
+            <a:spLocks noGrp="1"/>
+          </p:cNvSpPr>
+          <p:nvPr/>
+        </p:nvSpPr>
+        <p:spPr>
+          <a:xfrm>
+            <a:off x="540000" y="3600000"/>
+            <a:ext cx="11160000" cy="2880000"/>
+          </a:xfrm>
+          <a:prstGeom prst="rect">
+            <a:avLst/>
           </a:prstGeom>
           <a:solidFill>
             <a:srgbClr val="0F2547">
@@ -12482,7 +13182,7 @@
         </p:nvSpPr>
         <p:spPr>
           <a:xfrm>
-            <a:off x="720000" y="3600000"/>
+            <a:off x="720000" y="3780000"/>
             <a:ext cx="10800000" cy="2700000"/>
           </a:xfrm>
           <a:prstGeom prst="rect">
